--- a/presentation/Week6_draftPresentation.pptx
+++ b/presentation/Week6_draftPresentation.pptx
@@ -29,8 +29,8 @@
 </file>
 
 <file path=ppt/slideLayouts/slideLayout1.xml><?xml version="1.0" encoding="utf-8"?>
-<p:sldLayout xmlns:a="http://schemas.openxmlformats.org/drawingml/2006/main" xmlns:p="http://schemas.openxmlformats.org/presentationml/2006/main" xmlns:r="http://schemas.openxmlformats.org/officeDocument/2006/relationships" xmlns:p14="http://schemas.microsoft.com/office/powerpoint/2010/main" xmlns:p15="http://schemas.microsoft.com/office/powerpoint/2012/main" xmlns:mc="http://schemas.openxmlformats.org/markup-compatibility/2006" type="vertTitleAndTx" preserve="1">
-  <p:cSld name="Vertical Title and Text">
+<p:sldLayout xmlns:a="http://schemas.openxmlformats.org/drawingml/2006/main" xmlns:p="http://schemas.openxmlformats.org/presentationml/2006/main" xmlns:r="http://schemas.openxmlformats.org/officeDocument/2006/relationships" xmlns:p14="http://schemas.microsoft.com/office/powerpoint/2010/main" xmlns:p15="http://schemas.microsoft.com/office/powerpoint/2012/main" xmlns:mc="http://schemas.openxmlformats.org/markup-compatibility/2006" type="blank" preserve="1">
+  <p:cSld name="Picture with Caption">
     <p:bg>
       <p:bgPr>
         <a:solidFill>
@@ -64,8 +64,8 @@
         </p:nvSpPr>
         <p:spPr>
           <a:xfrm>
-            <a:off x="8724960" y="365040"/>
-            <a:ext cx="2623680" cy="5806440"/>
+            <a:off x="839880" y="457200"/>
+            <a:ext cx="3926520" cy="1594440"/>
           </a:xfrm>
           <a:prstGeom prst="rect">
             <a:avLst/>
@@ -76,7 +76,7 @@
           </a:ln>
         </p:spPr>
         <p:txBody>
-          <a:bodyPr lIns="91440" rIns="91440" tIns="45720" bIns="45720" anchor="ctr" vert="eaVert">
+          <a:bodyPr lIns="91440" rIns="91440" tIns="45720" bIns="45720" anchor="b">
             <a:noAutofit/>
           </a:bodyPr>
           <a:p>
@@ -90,7 +90,7 @@
               </a:tabLst>
             </a:pPr>
             <a:r>
-              <a:rPr b="0" lang="en-US" sz="4400" strike="noStrike" u="none">
+              <a:rPr b="0" lang="en-US" sz="3200" strike="noStrike" u="none">
                 <a:solidFill>
                   <a:schemeClr val="dk1"/>
                 </a:solidFill>
@@ -100,7 +100,7 @@
               </a:rPr>
               <a:t>Click to edit Master title style</a:t>
             </a:r>
-            <a:endParaRPr b="0" lang="en-US" sz="4400" strike="noStrike" u="none">
+            <a:endParaRPr b="0" lang="en-US" sz="3200" strike="noStrike" u="none">
               <a:solidFill>
                 <a:srgbClr val="000000"/>
               </a:solidFill>
@@ -123,8 +123,8 @@
         </p:nvSpPr>
         <p:spPr>
           <a:xfrm>
-            <a:off x="838080" y="365040"/>
-            <a:ext cx="7728840" cy="5806440"/>
+            <a:off x="5183280" y="987480"/>
+            <a:ext cx="6166440" cy="4867920"/>
           </a:xfrm>
           <a:prstGeom prst="rect">
             <a:avLst/>
@@ -135,25 +135,21 @@
           </a:ln>
         </p:spPr>
         <p:txBody>
-          <a:bodyPr lIns="91440" rIns="91440" tIns="45720" bIns="45720" anchor="t" vert="eaVert">
+          <a:bodyPr lIns="90000" rIns="90000" tIns="45000" bIns="45000" anchor="t">
             <a:noAutofit/>
           </a:bodyPr>
           <a:p>
-            <a:pPr marL="228600" indent="-228600" defTabSz="914400">
+            <a:pPr indent="0" defTabSz="914400">
               <a:lnSpc>
-                <a:spcPct val="90000"/>
+                <a:spcPct val="100000"/>
               </a:lnSpc>
-              <a:spcBef>
-                <a:spcPts val="1001"/>
-              </a:spcBef>
-              <a:buClr>
-                <a:srgbClr val="000000"/>
-              </a:buClr>
-              <a:buFont typeface="Arial"/>
-              <a:buChar char="•"/>
+              <a:buNone/>
+              <a:tabLst>
+                <a:tab algn="l" pos="0"/>
+              </a:tabLst>
             </a:pPr>
             <a:r>
-              <a:rPr b="0" lang="en-US" sz="2800" strike="noStrike" u="none">
+              <a:rPr b="0" lang="en-US" sz="3200" strike="noStrike" u="none">
                 <a:solidFill>
                   <a:schemeClr val="dk1"/>
                 </a:solidFill>
@@ -161,145 +157,9 @@
                 <a:uFillTx/>
                 <a:latin typeface="Calibri"/>
               </a:rPr>
-              <a:t>Click to edit Master text styles</a:t>
+              <a:t>Click icon to add picture</a:t>
             </a:r>
-            <a:endParaRPr b="0" lang="en-US" sz="2800" strike="noStrike" u="none">
-              <a:solidFill>
-                <a:srgbClr val="000000"/>
-              </a:solidFill>
-              <a:effectLst/>
-              <a:uFillTx/>
-              <a:latin typeface="Arial"/>
-            </a:endParaRPr>
-          </a:p>
-          <a:p>
-            <a:pPr lvl="1" marL="685800" indent="-228600" defTabSz="914400">
-              <a:lnSpc>
-                <a:spcPct val="90000"/>
-              </a:lnSpc>
-              <a:spcBef>
-                <a:spcPts val="499"/>
-              </a:spcBef>
-              <a:buClr>
-                <a:srgbClr val="000000"/>
-              </a:buClr>
-              <a:buFont typeface="Arial"/>
-              <a:buChar char="•"/>
-            </a:pPr>
-            <a:r>
-              <a:rPr b="0" lang="en-US" sz="2400" strike="noStrike" u="none">
-                <a:solidFill>
-                  <a:schemeClr val="dk1"/>
-                </a:solidFill>
-                <a:effectLst/>
-                <a:uFillTx/>
-                <a:latin typeface="Calibri"/>
-              </a:rPr>
-              <a:t>Second level</a:t>
-            </a:r>
-            <a:endParaRPr b="0" lang="en-US" sz="2400" strike="noStrike" u="none">
-              <a:solidFill>
-                <a:srgbClr val="000000"/>
-              </a:solidFill>
-              <a:effectLst/>
-              <a:uFillTx/>
-              <a:latin typeface="Arial"/>
-            </a:endParaRPr>
-          </a:p>
-          <a:p>
-            <a:pPr lvl="2" marL="1143000" indent="-228600" defTabSz="914400">
-              <a:lnSpc>
-                <a:spcPct val="90000"/>
-              </a:lnSpc>
-              <a:spcBef>
-                <a:spcPts val="499"/>
-              </a:spcBef>
-              <a:buClr>
-                <a:srgbClr val="000000"/>
-              </a:buClr>
-              <a:buFont typeface="Arial"/>
-              <a:buChar char="•"/>
-            </a:pPr>
-            <a:r>
-              <a:rPr b="0" lang="en-US" sz="2000" strike="noStrike" u="none">
-                <a:solidFill>
-                  <a:schemeClr val="dk1"/>
-                </a:solidFill>
-                <a:effectLst/>
-                <a:uFillTx/>
-                <a:latin typeface="Calibri"/>
-              </a:rPr>
-              <a:t>Third level</a:t>
-            </a:r>
-            <a:endParaRPr b="0" lang="en-US" sz="2000" strike="noStrike" u="none">
-              <a:solidFill>
-                <a:srgbClr val="000000"/>
-              </a:solidFill>
-              <a:effectLst/>
-              <a:uFillTx/>
-              <a:latin typeface="Arial"/>
-            </a:endParaRPr>
-          </a:p>
-          <a:p>
-            <a:pPr lvl="3" marL="1600200" indent="-228600" defTabSz="914400">
-              <a:lnSpc>
-                <a:spcPct val="90000"/>
-              </a:lnSpc>
-              <a:spcBef>
-                <a:spcPts val="499"/>
-              </a:spcBef>
-              <a:buClr>
-                <a:srgbClr val="000000"/>
-              </a:buClr>
-              <a:buFont typeface="Arial"/>
-              <a:buChar char="•"/>
-            </a:pPr>
-            <a:r>
-              <a:rPr b="0" lang="en-US" sz="1800" strike="noStrike" u="none">
-                <a:solidFill>
-                  <a:schemeClr val="dk1"/>
-                </a:solidFill>
-                <a:effectLst/>
-                <a:uFillTx/>
-                <a:latin typeface="Calibri"/>
-              </a:rPr>
-              <a:t>Fourth level</a:t>
-            </a:r>
-            <a:endParaRPr b="0" lang="en-US" sz="1800" strike="noStrike" u="none">
-              <a:solidFill>
-                <a:srgbClr val="000000"/>
-              </a:solidFill>
-              <a:effectLst/>
-              <a:uFillTx/>
-              <a:latin typeface="Arial"/>
-            </a:endParaRPr>
-          </a:p>
-          <a:p>
-            <a:pPr lvl="4" marL="2057400" indent="-228600" defTabSz="914400">
-              <a:lnSpc>
-                <a:spcPct val="90000"/>
-              </a:lnSpc>
-              <a:spcBef>
-                <a:spcPts val="499"/>
-              </a:spcBef>
-              <a:buClr>
-                <a:srgbClr val="000000"/>
-              </a:buClr>
-              <a:buFont typeface="Arial"/>
-              <a:buChar char="•"/>
-            </a:pPr>
-            <a:r>
-              <a:rPr b="0" lang="en-US" sz="1800" strike="noStrike" u="none">
-                <a:solidFill>
-                  <a:schemeClr val="dk1"/>
-                </a:solidFill>
-                <a:effectLst/>
-                <a:uFillTx/>
-                <a:latin typeface="Calibri"/>
-              </a:rPr>
-              <a:t>Fifth level</a:t>
-            </a:r>
-            <a:endParaRPr b="0" lang="en-US" sz="1800" strike="noStrike" u="none">
+            <a:endParaRPr b="0" lang="en-US" sz="3200" strike="noStrike" u="none">
               <a:solidFill>
                 <a:srgbClr val="000000"/>
               </a:solidFill>
@@ -317,13 +177,75 @@
             <a:spLocks noGrp="1"/>
           </p:cNvSpPr>
           <p:nvPr>
+            <p:ph type="body"/>
+          </p:nvPr>
+        </p:nvSpPr>
+        <p:spPr>
+          <a:xfrm>
+            <a:off x="839880" y="2057400"/>
+            <a:ext cx="3926520" cy="3805920"/>
+          </a:xfrm>
+          <a:prstGeom prst="rect">
+            <a:avLst/>
+          </a:prstGeom>
+          <a:noFill/>
+          <a:ln w="0">
+            <a:noFill/>
+          </a:ln>
+        </p:spPr>
+        <p:txBody>
+          <a:bodyPr lIns="91440" rIns="91440" tIns="45720" bIns="45720" anchor="t">
+            <a:noAutofit/>
+          </a:bodyPr>
+          <a:p>
+            <a:pPr indent="0" defTabSz="914400">
+              <a:lnSpc>
+                <a:spcPct val="90000"/>
+              </a:lnSpc>
+              <a:spcBef>
+                <a:spcPts val="1001"/>
+              </a:spcBef>
+              <a:buNone/>
+              <a:tabLst>
+                <a:tab algn="l" pos="0"/>
+              </a:tabLst>
+            </a:pPr>
+            <a:r>
+              <a:rPr b="0" lang="en-US" sz="1600" strike="noStrike" u="none">
+                <a:solidFill>
+                  <a:schemeClr val="dk1"/>
+                </a:solidFill>
+                <a:effectLst/>
+                <a:uFillTx/>
+                <a:latin typeface="Calibri"/>
+              </a:rPr>
+              <a:t>Click to edit Master text styles</a:t>
+            </a:r>
+            <a:endParaRPr b="0" lang="en-US" sz="1600" strike="noStrike" u="none">
+              <a:solidFill>
+                <a:srgbClr val="000000"/>
+              </a:solidFill>
+              <a:effectLst/>
+              <a:uFillTx/>
+              <a:latin typeface="Arial"/>
+            </a:endParaRPr>
+          </a:p>
+        </p:txBody>
+      </p:sp>
+      <p:sp>
+        <p:nvSpPr>
+          <p:cNvPr id="5" name="PlaceHolder 4"/>
+          <p:cNvSpPr>
+            <a:spLocks noGrp="1"/>
+          </p:cNvSpPr>
+          <p:nvPr>
             <p:ph type="dt" idx="1"/>
           </p:nvPr>
         </p:nvSpPr>
         <p:spPr>
           <a:xfrm>
             <a:off x="838080" y="6356520"/>
-            <a:ext cx="2737800" cy="359640"/>
+            <a:ext cx="2737440" cy="359280"/>
           </a:xfrm>
           <a:prstGeom prst="rect">
             <a:avLst/>
@@ -394,7 +316,7 @@
       </p:sp>
       <p:sp>
         <p:nvSpPr>
-          <p:cNvPr id="5" name="PlaceHolder 4"/>
+          <p:cNvPr id="6" name="PlaceHolder 5"/>
           <p:cNvSpPr>
             <a:spLocks noGrp="1"/>
           </p:cNvSpPr>
@@ -405,7 +327,7 @@
         <p:spPr>
           <a:xfrm>
             <a:off x="4038480" y="6356520"/>
-            <a:ext cx="4109400" cy="359640"/>
+            <a:ext cx="4109040" cy="359280"/>
           </a:xfrm>
           <a:prstGeom prst="rect">
             <a:avLst/>
@@ -472,7 +394,7 @@
       </p:sp>
       <p:sp>
         <p:nvSpPr>
-          <p:cNvPr id="6" name="PlaceHolder 5"/>
+          <p:cNvPr id="7" name="PlaceHolder 6"/>
           <p:cNvSpPr>
             <a:spLocks noGrp="1"/>
           </p:cNvSpPr>
@@ -483,7 +405,7 @@
         <p:spPr>
           <a:xfrm>
             <a:off x="8610480" y="6356520"/>
-            <a:ext cx="2737800" cy="359640"/>
+            <a:ext cx="2737440" cy="359280"/>
           </a:xfrm>
           <a:prstGeom prst="rect">
             <a:avLst/>
@@ -528,7 +450,7 @@
                 <a:tab algn="l" pos="0"/>
               </a:tabLst>
             </a:pPr>
-            <a:fld id="{008E7680-F66E-42CB-9B2C-80F4533BEF71}" type="slidenum">
+            <a:fld id="{4449A0F7-FBB0-4E08-947C-098427273625}" type="slidenum">
               <a:rPr b="0" lang="en-US" sz="1200" strike="noStrike" u="none">
                 <a:solidFill>
                   <a:schemeClr val="dk1">
@@ -539,7 +461,7 @@
                 <a:uFillTx/>
                 <a:latin typeface="Calibri"/>
               </a:rPr>
-              <a:t>17</a:t>
+              <a:t>6</a:t>
             </a:fld>
             <a:endParaRPr b="0" lang="en-US" sz="1200" strike="noStrike" u="none">
               <a:solidFill>
@@ -558,6 +480,868 @@
 </file>
 
 <file path=ppt/slideLayouts/slideLayout10.xml><?xml version="1.0" encoding="utf-8"?>
+<p:sldLayout xmlns:a="http://schemas.openxmlformats.org/drawingml/2006/main" xmlns:p="http://schemas.openxmlformats.org/presentationml/2006/main" xmlns:r="http://schemas.openxmlformats.org/officeDocument/2006/relationships" xmlns:p14="http://schemas.microsoft.com/office/powerpoint/2010/main" xmlns:p15="http://schemas.microsoft.com/office/powerpoint/2012/main" xmlns:mc="http://schemas.openxmlformats.org/markup-compatibility/2006" type="blank" preserve="1">
+  <p:cSld name="Blank">
+    <p:bg>
+      <p:bgPr>
+        <a:solidFill>
+          <a:srgbClr val="ffffff"/>
+        </a:solidFill>
+      </p:bgPr>
+    </p:bg>
+    <p:spTree>
+      <p:nvGrpSpPr>
+        <p:cNvPr id="1" name=""/>
+        <p:cNvGrpSpPr/>
+        <p:nvPr/>
+      </p:nvGrpSpPr>
+      <p:grpSpPr>
+        <a:xfrm>
+          <a:off x="0" y="0"/>
+          <a:ext cx="0" cy="0"/>
+          <a:chOff x="0" y="0"/>
+          <a:chExt cx="0" cy="0"/>
+        </a:xfrm>
+      </p:grpSpPr>
+      <p:sp>
+        <p:nvSpPr>
+          <p:cNvPr id="51" name="PlaceHolder 1"/>
+          <p:cNvSpPr>
+            <a:spLocks noGrp="1"/>
+          </p:cNvSpPr>
+          <p:nvPr>
+            <p:ph type="dt" idx="28"/>
+          </p:nvPr>
+        </p:nvSpPr>
+        <p:spPr>
+          <a:xfrm>
+            <a:off x="838080" y="6356520"/>
+            <a:ext cx="2737440" cy="359280"/>
+          </a:xfrm>
+          <a:prstGeom prst="rect">
+            <a:avLst/>
+          </a:prstGeom>
+          <a:noFill/>
+          <a:ln w="0">
+            <a:noFill/>
+          </a:ln>
+        </p:spPr>
+        <p:txBody>
+          <a:bodyPr lIns="91440" rIns="91440" tIns="45720" bIns="45720" anchor="ctr">
+            <a:noAutofit/>
+          </a:bodyPr>
+          <a:lstStyle>
+            <a:lvl1pPr indent="0" defTabSz="914400">
+              <a:lnSpc>
+                <a:spcPct val="100000"/>
+              </a:lnSpc>
+              <a:buNone/>
+              <a:tabLst>
+                <a:tab algn="l" pos="0"/>
+              </a:tabLst>
+              <a:defRPr b="0" lang="en-US" sz="1200" strike="noStrike" u="none">
+                <a:solidFill>
+                  <a:schemeClr val="dk1">
+                    <a:tint val="75000"/>
+                  </a:schemeClr>
+                </a:solidFill>
+                <a:effectLst/>
+                <a:uFillTx/>
+                <a:latin typeface="Calibri"/>
+              </a:defRPr>
+            </a:lvl1pPr>
+          </a:lstStyle>
+          <a:p>
+            <a:pPr indent="0" defTabSz="914400">
+              <a:lnSpc>
+                <a:spcPct val="100000"/>
+              </a:lnSpc>
+              <a:buNone/>
+              <a:tabLst>
+                <a:tab algn="l" pos="0"/>
+              </a:tabLst>
+            </a:pPr>
+            <a:r>
+              <a:rPr b="0" lang="en-US" sz="1200" strike="noStrike" u="none">
+                <a:solidFill>
+                  <a:schemeClr val="dk1">
+                    <a:tint val="75000"/>
+                  </a:schemeClr>
+                </a:solidFill>
+                <a:effectLst/>
+                <a:uFillTx/>
+                <a:latin typeface="Calibri"/>
+              </a:rPr>
+              <a:t>&lt;date/time&gt;</a:t>
+            </a:r>
+            <a:endParaRPr b="0" lang="en-US" sz="1200" strike="noStrike" u="none">
+              <a:solidFill>
+                <a:srgbClr val="000000"/>
+              </a:solidFill>
+              <a:effectLst/>
+              <a:uFillTx/>
+              <a:latin typeface="Times New Roman"/>
+            </a:endParaRPr>
+          </a:p>
+        </p:txBody>
+      </p:sp>
+      <p:sp>
+        <p:nvSpPr>
+          <p:cNvPr id="52" name="PlaceHolder 2"/>
+          <p:cNvSpPr>
+            <a:spLocks noGrp="1"/>
+          </p:cNvSpPr>
+          <p:nvPr>
+            <p:ph type="ftr" idx="29"/>
+          </p:nvPr>
+        </p:nvSpPr>
+        <p:spPr>
+          <a:xfrm>
+            <a:off x="4038480" y="6356520"/>
+            <a:ext cx="4109040" cy="359280"/>
+          </a:xfrm>
+          <a:prstGeom prst="rect">
+            <a:avLst/>
+          </a:prstGeom>
+          <a:noFill/>
+          <a:ln w="0">
+            <a:noFill/>
+          </a:ln>
+        </p:spPr>
+        <p:txBody>
+          <a:bodyPr lIns="91440" rIns="91440" tIns="45720" bIns="45720" anchor="ctr">
+            <a:noAutofit/>
+          </a:bodyPr>
+          <a:lstStyle>
+            <a:lvl1pPr indent="0" algn="ctr">
+              <a:lnSpc>
+                <a:spcPct val="100000"/>
+              </a:lnSpc>
+              <a:buNone/>
+              <a:tabLst>
+                <a:tab algn="l" pos="0"/>
+              </a:tabLst>
+              <a:defRPr b="0" lang="en-US" sz="1400" strike="noStrike" u="none">
+                <a:solidFill>
+                  <a:srgbClr val="000000"/>
+                </a:solidFill>
+                <a:effectLst/>
+                <a:uFillTx/>
+                <a:latin typeface="Times New Roman"/>
+              </a:defRPr>
+            </a:lvl1pPr>
+          </a:lstStyle>
+          <a:p>
+            <a:pPr indent="0" algn="ctr">
+              <a:lnSpc>
+                <a:spcPct val="100000"/>
+              </a:lnSpc>
+              <a:buNone/>
+              <a:tabLst>
+                <a:tab algn="l" pos="0"/>
+              </a:tabLst>
+            </a:pPr>
+            <a:r>
+              <a:rPr b="0" lang="en-US" sz="1400" strike="noStrike" u="none">
+                <a:solidFill>
+                  <a:srgbClr val="000000"/>
+                </a:solidFill>
+                <a:effectLst/>
+                <a:uFillTx/>
+                <a:latin typeface="Times New Roman"/>
+              </a:rPr>
+              <a:t>&lt;footer&gt;</a:t>
+            </a:r>
+            <a:endParaRPr b="0" lang="en-US" sz="1400" strike="noStrike" u="none">
+              <a:solidFill>
+                <a:srgbClr val="000000"/>
+              </a:solidFill>
+              <a:effectLst/>
+              <a:uFillTx/>
+              <a:latin typeface="Times New Roman"/>
+            </a:endParaRPr>
+          </a:p>
+        </p:txBody>
+      </p:sp>
+      <p:sp>
+        <p:nvSpPr>
+          <p:cNvPr id="53" name="PlaceHolder 3"/>
+          <p:cNvSpPr>
+            <a:spLocks noGrp="1"/>
+          </p:cNvSpPr>
+          <p:nvPr>
+            <p:ph type="sldNum" idx="30"/>
+          </p:nvPr>
+        </p:nvSpPr>
+        <p:spPr>
+          <a:xfrm>
+            <a:off x="8610480" y="6356520"/>
+            <a:ext cx="2737440" cy="359280"/>
+          </a:xfrm>
+          <a:prstGeom prst="rect">
+            <a:avLst/>
+          </a:prstGeom>
+          <a:noFill/>
+          <a:ln w="0">
+            <a:noFill/>
+          </a:ln>
+        </p:spPr>
+        <p:txBody>
+          <a:bodyPr lIns="91440" rIns="91440" tIns="45720" bIns="45720" anchor="ctr">
+            <a:noAutofit/>
+          </a:bodyPr>
+          <a:lstStyle>
+            <a:lvl1pPr indent="0" algn="r" defTabSz="914400">
+              <a:lnSpc>
+                <a:spcPct val="100000"/>
+              </a:lnSpc>
+              <a:buNone/>
+              <a:tabLst>
+                <a:tab algn="l" pos="0"/>
+              </a:tabLst>
+              <a:defRPr b="0" lang="en-US" sz="1200" strike="noStrike" u="none">
+                <a:solidFill>
+                  <a:schemeClr val="dk1">
+                    <a:tint val="75000"/>
+                  </a:schemeClr>
+                </a:solidFill>
+                <a:effectLst/>
+                <a:uFillTx/>
+                <a:latin typeface="Calibri"/>
+              </a:defRPr>
+            </a:lvl1pPr>
+          </a:lstStyle>
+          <a:p>
+            <a:pPr indent="0" algn="r" defTabSz="914400">
+              <a:lnSpc>
+                <a:spcPct val="100000"/>
+              </a:lnSpc>
+              <a:buNone/>
+              <a:tabLst>
+                <a:tab algn="l" pos="0"/>
+              </a:tabLst>
+            </a:pPr>
+            <a:fld id="{37498554-642B-4720-B2E3-AF9B2CB68C93}" type="slidenum">
+              <a:rPr b="0" lang="en-US" sz="1200" strike="noStrike" u="none">
+                <a:solidFill>
+                  <a:schemeClr val="dk1">
+                    <a:tint val="75000"/>
+                  </a:schemeClr>
+                </a:solidFill>
+                <a:effectLst/>
+                <a:uFillTx/>
+                <a:latin typeface="Calibri"/>
+              </a:rPr>
+              <a:t>&lt;number&gt;</a:t>
+            </a:fld>
+            <a:endParaRPr b="0" lang="en-US" sz="1200" strike="noStrike" u="none">
+              <a:solidFill>
+                <a:srgbClr val="000000"/>
+              </a:solidFill>
+              <a:effectLst/>
+              <a:uFillTx/>
+              <a:latin typeface="Times New Roman"/>
+            </a:endParaRPr>
+          </a:p>
+        </p:txBody>
+      </p:sp>
+    </p:spTree>
+  </p:cSld>
+</p:sldLayout>
+</file>
+
+<file path=ppt/slideLayouts/slideLayout11.xml><?xml version="1.0" encoding="utf-8"?>
+<p:sldLayout xmlns:a="http://schemas.openxmlformats.org/drawingml/2006/main" xmlns:p="http://schemas.openxmlformats.org/presentationml/2006/main" xmlns:r="http://schemas.openxmlformats.org/officeDocument/2006/relationships" xmlns:p14="http://schemas.microsoft.com/office/powerpoint/2010/main" xmlns:p15="http://schemas.microsoft.com/office/powerpoint/2012/main" xmlns:mc="http://schemas.openxmlformats.org/markup-compatibility/2006" type="blank" preserve="1">
+  <p:cSld name="Content with Caption">
+    <p:bg>
+      <p:bgPr>
+        <a:solidFill>
+          <a:srgbClr val="ffffff"/>
+        </a:solidFill>
+      </p:bgPr>
+    </p:bg>
+    <p:spTree>
+      <p:nvGrpSpPr>
+        <p:cNvPr id="1" name=""/>
+        <p:cNvGrpSpPr/>
+        <p:nvPr/>
+      </p:nvGrpSpPr>
+      <p:grpSpPr>
+        <a:xfrm>
+          <a:off x="0" y="0"/>
+          <a:ext cx="0" cy="0"/>
+          <a:chOff x="0" y="0"/>
+          <a:chExt cx="0" cy="0"/>
+        </a:xfrm>
+      </p:grpSpPr>
+      <p:sp>
+        <p:nvSpPr>
+          <p:cNvPr id="54" name="PlaceHolder 1"/>
+          <p:cNvSpPr>
+            <a:spLocks noGrp="1"/>
+          </p:cNvSpPr>
+          <p:nvPr>
+            <p:ph type="title"/>
+          </p:nvPr>
+        </p:nvSpPr>
+        <p:spPr>
+          <a:xfrm>
+            <a:off x="839880" y="457200"/>
+            <a:ext cx="3926520" cy="1594440"/>
+          </a:xfrm>
+          <a:prstGeom prst="rect">
+            <a:avLst/>
+          </a:prstGeom>
+          <a:noFill/>
+          <a:ln w="0">
+            <a:noFill/>
+          </a:ln>
+        </p:spPr>
+        <p:txBody>
+          <a:bodyPr lIns="91440" rIns="91440" tIns="45720" bIns="45720" anchor="b">
+            <a:noAutofit/>
+          </a:bodyPr>
+          <a:p>
+            <a:pPr indent="0" defTabSz="914400">
+              <a:lnSpc>
+                <a:spcPct val="90000"/>
+              </a:lnSpc>
+              <a:buNone/>
+              <a:tabLst>
+                <a:tab algn="l" pos="0"/>
+              </a:tabLst>
+            </a:pPr>
+            <a:r>
+              <a:rPr b="0" lang="en-US" sz="3200" strike="noStrike" u="none">
+                <a:solidFill>
+                  <a:schemeClr val="dk1"/>
+                </a:solidFill>
+                <a:effectLst/>
+                <a:uFillTx/>
+                <a:latin typeface="Calibri Light"/>
+              </a:rPr>
+              <a:t>Click to edit Master title style</a:t>
+            </a:r>
+            <a:endParaRPr b="0" lang="en-US" sz="3200" strike="noStrike" u="none">
+              <a:solidFill>
+                <a:srgbClr val="000000"/>
+              </a:solidFill>
+              <a:effectLst/>
+              <a:uFillTx/>
+              <a:latin typeface="Arial"/>
+            </a:endParaRPr>
+          </a:p>
+        </p:txBody>
+      </p:sp>
+      <p:sp>
+        <p:nvSpPr>
+          <p:cNvPr id="55" name="PlaceHolder 2"/>
+          <p:cNvSpPr>
+            <a:spLocks noGrp="1"/>
+          </p:cNvSpPr>
+          <p:nvPr>
+            <p:ph type="body"/>
+          </p:nvPr>
+        </p:nvSpPr>
+        <p:spPr>
+          <a:xfrm>
+            <a:off x="5183280" y="987480"/>
+            <a:ext cx="6166440" cy="4867920"/>
+          </a:xfrm>
+          <a:prstGeom prst="rect">
+            <a:avLst/>
+          </a:prstGeom>
+          <a:noFill/>
+          <a:ln w="0">
+            <a:noFill/>
+          </a:ln>
+        </p:spPr>
+        <p:txBody>
+          <a:bodyPr lIns="91440" rIns="91440" tIns="45720" bIns="45720" anchor="t">
+            <a:noAutofit/>
+          </a:bodyPr>
+          <a:p>
+            <a:pPr marL="228600" indent="-228600" defTabSz="914400">
+              <a:lnSpc>
+                <a:spcPct val="90000"/>
+              </a:lnSpc>
+              <a:spcBef>
+                <a:spcPts val="1001"/>
+              </a:spcBef>
+              <a:buClr>
+                <a:srgbClr val="000000"/>
+              </a:buClr>
+              <a:buFont typeface="Arial"/>
+              <a:buChar char="•"/>
+            </a:pPr>
+            <a:r>
+              <a:rPr b="0" lang="en-US" sz="3200" strike="noStrike" u="none">
+                <a:solidFill>
+                  <a:schemeClr val="dk1"/>
+                </a:solidFill>
+                <a:effectLst/>
+                <a:uFillTx/>
+                <a:latin typeface="Calibri"/>
+              </a:rPr>
+              <a:t>Click to edit Master text styles</a:t>
+            </a:r>
+            <a:endParaRPr b="0" lang="en-US" sz="3200" strike="noStrike" u="none">
+              <a:solidFill>
+                <a:srgbClr val="000000"/>
+              </a:solidFill>
+              <a:effectLst/>
+              <a:uFillTx/>
+              <a:latin typeface="Arial"/>
+            </a:endParaRPr>
+          </a:p>
+          <a:p>
+            <a:pPr lvl="1" marL="685800" indent="-228600" defTabSz="914400">
+              <a:lnSpc>
+                <a:spcPct val="90000"/>
+              </a:lnSpc>
+              <a:spcBef>
+                <a:spcPts val="499"/>
+              </a:spcBef>
+              <a:buClr>
+                <a:srgbClr val="000000"/>
+              </a:buClr>
+              <a:buFont typeface="Arial"/>
+              <a:buChar char="•"/>
+            </a:pPr>
+            <a:r>
+              <a:rPr b="0" lang="en-US" sz="2800" strike="noStrike" u="none">
+                <a:solidFill>
+                  <a:schemeClr val="dk1"/>
+                </a:solidFill>
+                <a:effectLst/>
+                <a:uFillTx/>
+                <a:latin typeface="Calibri"/>
+              </a:rPr>
+              <a:t>Second level</a:t>
+            </a:r>
+            <a:endParaRPr b="0" lang="en-US" sz="2800" strike="noStrike" u="none">
+              <a:solidFill>
+                <a:srgbClr val="000000"/>
+              </a:solidFill>
+              <a:effectLst/>
+              <a:uFillTx/>
+              <a:latin typeface="Arial"/>
+            </a:endParaRPr>
+          </a:p>
+          <a:p>
+            <a:pPr lvl="2" marL="1143000" indent="-228600" defTabSz="914400">
+              <a:lnSpc>
+                <a:spcPct val="90000"/>
+              </a:lnSpc>
+              <a:spcBef>
+                <a:spcPts val="499"/>
+              </a:spcBef>
+              <a:buClr>
+                <a:srgbClr val="000000"/>
+              </a:buClr>
+              <a:buFont typeface="Arial"/>
+              <a:buChar char="•"/>
+            </a:pPr>
+            <a:r>
+              <a:rPr b="0" lang="en-US" sz="2400" strike="noStrike" u="none">
+                <a:solidFill>
+                  <a:schemeClr val="dk1"/>
+                </a:solidFill>
+                <a:effectLst/>
+                <a:uFillTx/>
+                <a:latin typeface="Calibri"/>
+              </a:rPr>
+              <a:t>Third level</a:t>
+            </a:r>
+            <a:endParaRPr b="0" lang="en-US" sz="2400" strike="noStrike" u="none">
+              <a:solidFill>
+                <a:srgbClr val="000000"/>
+              </a:solidFill>
+              <a:effectLst/>
+              <a:uFillTx/>
+              <a:latin typeface="Arial"/>
+            </a:endParaRPr>
+          </a:p>
+          <a:p>
+            <a:pPr lvl="3" marL="1600200" indent="-228600" defTabSz="914400">
+              <a:lnSpc>
+                <a:spcPct val="90000"/>
+              </a:lnSpc>
+              <a:spcBef>
+                <a:spcPts val="499"/>
+              </a:spcBef>
+              <a:buClr>
+                <a:srgbClr val="000000"/>
+              </a:buClr>
+              <a:buFont typeface="Arial"/>
+              <a:buChar char="•"/>
+            </a:pPr>
+            <a:r>
+              <a:rPr b="0" lang="en-US" sz="2000" strike="noStrike" u="none">
+                <a:solidFill>
+                  <a:schemeClr val="dk1"/>
+                </a:solidFill>
+                <a:effectLst/>
+                <a:uFillTx/>
+                <a:latin typeface="Calibri"/>
+              </a:rPr>
+              <a:t>Fourth level</a:t>
+            </a:r>
+            <a:endParaRPr b="0" lang="en-US" sz="2000" strike="noStrike" u="none">
+              <a:solidFill>
+                <a:srgbClr val="000000"/>
+              </a:solidFill>
+              <a:effectLst/>
+              <a:uFillTx/>
+              <a:latin typeface="Arial"/>
+            </a:endParaRPr>
+          </a:p>
+          <a:p>
+            <a:pPr lvl="4" marL="2057400" indent="-228600" defTabSz="914400">
+              <a:lnSpc>
+                <a:spcPct val="90000"/>
+              </a:lnSpc>
+              <a:spcBef>
+                <a:spcPts val="499"/>
+              </a:spcBef>
+              <a:buClr>
+                <a:srgbClr val="000000"/>
+              </a:buClr>
+              <a:buFont typeface="Arial"/>
+              <a:buChar char="•"/>
+            </a:pPr>
+            <a:r>
+              <a:rPr b="0" lang="en-US" sz="2000" strike="noStrike" u="none">
+                <a:solidFill>
+                  <a:schemeClr val="dk1"/>
+                </a:solidFill>
+                <a:effectLst/>
+                <a:uFillTx/>
+                <a:latin typeface="Calibri"/>
+              </a:rPr>
+              <a:t>Fifth level</a:t>
+            </a:r>
+            <a:endParaRPr b="0" lang="en-US" sz="2000" strike="noStrike" u="none">
+              <a:solidFill>
+                <a:srgbClr val="000000"/>
+              </a:solidFill>
+              <a:effectLst/>
+              <a:uFillTx/>
+              <a:latin typeface="Arial"/>
+            </a:endParaRPr>
+          </a:p>
+        </p:txBody>
+      </p:sp>
+      <p:sp>
+        <p:nvSpPr>
+          <p:cNvPr id="56" name="PlaceHolder 3"/>
+          <p:cNvSpPr>
+            <a:spLocks noGrp="1"/>
+          </p:cNvSpPr>
+          <p:nvPr>
+            <p:ph type="body"/>
+          </p:nvPr>
+        </p:nvSpPr>
+        <p:spPr>
+          <a:xfrm>
+            <a:off x="839880" y="2057400"/>
+            <a:ext cx="3926520" cy="3805920"/>
+          </a:xfrm>
+          <a:prstGeom prst="rect">
+            <a:avLst/>
+          </a:prstGeom>
+          <a:noFill/>
+          <a:ln w="0">
+            <a:noFill/>
+          </a:ln>
+        </p:spPr>
+        <p:txBody>
+          <a:bodyPr lIns="91440" rIns="91440" tIns="45720" bIns="45720" anchor="t">
+            <a:noAutofit/>
+          </a:bodyPr>
+          <a:p>
+            <a:pPr indent="0" defTabSz="914400">
+              <a:lnSpc>
+                <a:spcPct val="90000"/>
+              </a:lnSpc>
+              <a:spcBef>
+                <a:spcPts val="1001"/>
+              </a:spcBef>
+              <a:buNone/>
+              <a:tabLst>
+                <a:tab algn="l" pos="0"/>
+              </a:tabLst>
+            </a:pPr>
+            <a:r>
+              <a:rPr b="0" lang="en-US" sz="1600" strike="noStrike" u="none">
+                <a:solidFill>
+                  <a:schemeClr val="dk1"/>
+                </a:solidFill>
+                <a:effectLst/>
+                <a:uFillTx/>
+                <a:latin typeface="Calibri"/>
+              </a:rPr>
+              <a:t>Click to edit Master text styles</a:t>
+            </a:r>
+            <a:endParaRPr b="0" lang="en-US" sz="1600" strike="noStrike" u="none">
+              <a:solidFill>
+                <a:srgbClr val="000000"/>
+              </a:solidFill>
+              <a:effectLst/>
+              <a:uFillTx/>
+              <a:latin typeface="Arial"/>
+            </a:endParaRPr>
+          </a:p>
+        </p:txBody>
+      </p:sp>
+      <p:sp>
+        <p:nvSpPr>
+          <p:cNvPr id="57" name="PlaceHolder 4"/>
+          <p:cNvSpPr>
+            <a:spLocks noGrp="1"/>
+          </p:cNvSpPr>
+          <p:nvPr>
+            <p:ph type="dt" idx="31"/>
+          </p:nvPr>
+        </p:nvSpPr>
+        <p:spPr>
+          <a:xfrm>
+            <a:off x="838080" y="6356520"/>
+            <a:ext cx="2737440" cy="359280"/>
+          </a:xfrm>
+          <a:prstGeom prst="rect">
+            <a:avLst/>
+          </a:prstGeom>
+          <a:noFill/>
+          <a:ln w="0">
+            <a:noFill/>
+          </a:ln>
+        </p:spPr>
+        <p:txBody>
+          <a:bodyPr lIns="91440" rIns="91440" tIns="45720" bIns="45720" anchor="ctr">
+            <a:noAutofit/>
+          </a:bodyPr>
+          <a:lstStyle>
+            <a:lvl1pPr indent="0" defTabSz="914400">
+              <a:lnSpc>
+                <a:spcPct val="100000"/>
+              </a:lnSpc>
+              <a:buNone/>
+              <a:tabLst>
+                <a:tab algn="l" pos="0"/>
+              </a:tabLst>
+              <a:defRPr b="0" lang="en-US" sz="1200" strike="noStrike" u="none">
+                <a:solidFill>
+                  <a:schemeClr val="dk1">
+                    <a:tint val="75000"/>
+                  </a:schemeClr>
+                </a:solidFill>
+                <a:effectLst/>
+                <a:uFillTx/>
+                <a:latin typeface="Calibri"/>
+              </a:defRPr>
+            </a:lvl1pPr>
+          </a:lstStyle>
+          <a:p>
+            <a:pPr indent="0" defTabSz="914400">
+              <a:lnSpc>
+                <a:spcPct val="100000"/>
+              </a:lnSpc>
+              <a:buNone/>
+              <a:tabLst>
+                <a:tab algn="l" pos="0"/>
+              </a:tabLst>
+            </a:pPr>
+            <a:r>
+              <a:rPr b="0" lang="en-US" sz="1200" strike="noStrike" u="none">
+                <a:solidFill>
+                  <a:schemeClr val="dk1">
+                    <a:tint val="75000"/>
+                  </a:schemeClr>
+                </a:solidFill>
+                <a:effectLst/>
+                <a:uFillTx/>
+                <a:latin typeface="Calibri"/>
+              </a:rPr>
+              <a:t>&lt;date/time&gt;</a:t>
+            </a:r>
+            <a:endParaRPr b="0" lang="en-US" sz="1200" strike="noStrike" u="none">
+              <a:solidFill>
+                <a:srgbClr val="000000"/>
+              </a:solidFill>
+              <a:effectLst/>
+              <a:uFillTx/>
+              <a:latin typeface="Times New Roman"/>
+            </a:endParaRPr>
+          </a:p>
+        </p:txBody>
+      </p:sp>
+      <p:sp>
+        <p:nvSpPr>
+          <p:cNvPr id="58" name="PlaceHolder 5"/>
+          <p:cNvSpPr>
+            <a:spLocks noGrp="1"/>
+          </p:cNvSpPr>
+          <p:nvPr>
+            <p:ph type="ftr" idx="32"/>
+          </p:nvPr>
+        </p:nvSpPr>
+        <p:spPr>
+          <a:xfrm>
+            <a:off x="4038480" y="6356520"/>
+            <a:ext cx="4109040" cy="359280"/>
+          </a:xfrm>
+          <a:prstGeom prst="rect">
+            <a:avLst/>
+          </a:prstGeom>
+          <a:noFill/>
+          <a:ln w="0">
+            <a:noFill/>
+          </a:ln>
+        </p:spPr>
+        <p:txBody>
+          <a:bodyPr lIns="91440" rIns="91440" tIns="45720" bIns="45720" anchor="ctr">
+            <a:noAutofit/>
+          </a:bodyPr>
+          <a:lstStyle>
+            <a:lvl1pPr indent="0" algn="ctr">
+              <a:lnSpc>
+                <a:spcPct val="100000"/>
+              </a:lnSpc>
+              <a:buNone/>
+              <a:tabLst>
+                <a:tab algn="l" pos="0"/>
+              </a:tabLst>
+              <a:defRPr b="0" lang="en-US" sz="1400" strike="noStrike" u="none">
+                <a:solidFill>
+                  <a:srgbClr val="000000"/>
+                </a:solidFill>
+                <a:effectLst/>
+                <a:uFillTx/>
+                <a:latin typeface="Times New Roman"/>
+              </a:defRPr>
+            </a:lvl1pPr>
+          </a:lstStyle>
+          <a:p>
+            <a:pPr indent="0" algn="ctr">
+              <a:lnSpc>
+                <a:spcPct val="100000"/>
+              </a:lnSpc>
+              <a:buNone/>
+              <a:tabLst>
+                <a:tab algn="l" pos="0"/>
+              </a:tabLst>
+            </a:pPr>
+            <a:r>
+              <a:rPr b="0" lang="en-US" sz="1400" strike="noStrike" u="none">
+                <a:solidFill>
+                  <a:srgbClr val="000000"/>
+                </a:solidFill>
+                <a:effectLst/>
+                <a:uFillTx/>
+                <a:latin typeface="Times New Roman"/>
+              </a:rPr>
+              <a:t>&lt;footer&gt;</a:t>
+            </a:r>
+            <a:endParaRPr b="0" lang="en-US" sz="1400" strike="noStrike" u="none">
+              <a:solidFill>
+                <a:srgbClr val="000000"/>
+              </a:solidFill>
+              <a:effectLst/>
+              <a:uFillTx/>
+              <a:latin typeface="Times New Roman"/>
+            </a:endParaRPr>
+          </a:p>
+        </p:txBody>
+      </p:sp>
+      <p:sp>
+        <p:nvSpPr>
+          <p:cNvPr id="59" name="PlaceHolder 6"/>
+          <p:cNvSpPr>
+            <a:spLocks noGrp="1"/>
+          </p:cNvSpPr>
+          <p:nvPr>
+            <p:ph type="sldNum" idx="33"/>
+          </p:nvPr>
+        </p:nvSpPr>
+        <p:spPr>
+          <a:xfrm>
+            <a:off x="8610480" y="6356520"/>
+            <a:ext cx="2737440" cy="359280"/>
+          </a:xfrm>
+          <a:prstGeom prst="rect">
+            <a:avLst/>
+          </a:prstGeom>
+          <a:noFill/>
+          <a:ln w="0">
+            <a:noFill/>
+          </a:ln>
+        </p:spPr>
+        <p:txBody>
+          <a:bodyPr lIns="91440" rIns="91440" tIns="45720" bIns="45720" anchor="ctr">
+            <a:noAutofit/>
+          </a:bodyPr>
+          <a:lstStyle>
+            <a:lvl1pPr indent="0" algn="r" defTabSz="914400">
+              <a:lnSpc>
+                <a:spcPct val="100000"/>
+              </a:lnSpc>
+              <a:buNone/>
+              <a:tabLst>
+                <a:tab algn="l" pos="0"/>
+              </a:tabLst>
+              <a:defRPr b="0" lang="en-US" sz="1200" strike="noStrike" u="none">
+                <a:solidFill>
+                  <a:schemeClr val="dk1">
+                    <a:tint val="75000"/>
+                  </a:schemeClr>
+                </a:solidFill>
+                <a:effectLst/>
+                <a:uFillTx/>
+                <a:latin typeface="Calibri"/>
+              </a:defRPr>
+            </a:lvl1pPr>
+          </a:lstStyle>
+          <a:p>
+            <a:pPr indent="0" algn="r" defTabSz="914400">
+              <a:lnSpc>
+                <a:spcPct val="100000"/>
+              </a:lnSpc>
+              <a:buNone/>
+              <a:tabLst>
+                <a:tab algn="l" pos="0"/>
+              </a:tabLst>
+            </a:pPr>
+            <a:fld id="{C6DDF472-585D-4CC8-BF8C-79DE7FDFF232}" type="slidenum">
+              <a:rPr b="0" lang="en-US" sz="1200" strike="noStrike" u="none">
+                <a:solidFill>
+                  <a:schemeClr val="dk1">
+                    <a:tint val="75000"/>
+                  </a:schemeClr>
+                </a:solidFill>
+                <a:effectLst/>
+                <a:uFillTx/>
+                <a:latin typeface="Calibri"/>
+              </a:rPr>
+              <a:t>&lt;number&gt;</a:t>
+            </a:fld>
+            <a:endParaRPr b="0" lang="en-US" sz="1200" strike="noStrike" u="none">
+              <a:solidFill>
+                <a:srgbClr val="000000"/>
+              </a:solidFill>
+              <a:effectLst/>
+              <a:uFillTx/>
+              <a:latin typeface="Times New Roman"/>
+            </a:endParaRPr>
+          </a:p>
+        </p:txBody>
+      </p:sp>
+    </p:spTree>
+  </p:cSld>
+</p:sldLayout>
+</file>
+
+<file path=ppt/slideLayouts/slideLayout2.xml><?xml version="1.0" encoding="utf-8"?>
 <p:sldLayout xmlns:a="http://schemas.openxmlformats.org/drawingml/2006/main" xmlns:p="http://schemas.openxmlformats.org/presentationml/2006/main" xmlns:r="http://schemas.openxmlformats.org/officeDocument/2006/relationships" xmlns:p14="http://schemas.microsoft.com/office/powerpoint/2010/main" xmlns:p15="http://schemas.microsoft.com/office/powerpoint/2012/main" xmlns:mc="http://schemas.openxmlformats.org/markup-compatibility/2006" type="title" preserve="1">
   <p:cSld name="Title Slide">
     <p:bg>
@@ -583,7 +1367,7 @@
       </p:grpSpPr>
       <p:sp>
         <p:nvSpPr>
-          <p:cNvPr id="50" name="PlaceHolder 1"/>
+          <p:cNvPr id="8" name="PlaceHolder 1"/>
           <p:cNvSpPr>
             <a:spLocks noGrp="1"/>
           </p:cNvSpPr>
@@ -594,7 +1378,7 @@
         <p:spPr>
           <a:xfrm>
             <a:off x="1523880" y="1122480"/>
-            <a:ext cx="9138600" cy="2382120"/>
+            <a:ext cx="9138240" cy="2381760"/>
           </a:xfrm>
           <a:prstGeom prst="rect">
             <a:avLst/>
@@ -642,18 +1426,18 @@
       </p:sp>
       <p:sp>
         <p:nvSpPr>
-          <p:cNvPr id="51" name="PlaceHolder 2"/>
+          <p:cNvPr id="9" name="PlaceHolder 2"/>
           <p:cNvSpPr>
             <a:spLocks noGrp="1"/>
           </p:cNvSpPr>
           <p:nvPr>
-            <p:ph type="dt" idx="28"/>
+            <p:ph type="dt" idx="4"/>
           </p:nvPr>
         </p:nvSpPr>
         <p:spPr>
           <a:xfrm>
             <a:off x="838080" y="6356520"/>
-            <a:ext cx="2737800" cy="359640"/>
+            <a:ext cx="2737440" cy="359280"/>
           </a:xfrm>
           <a:prstGeom prst="rect">
             <a:avLst/>
@@ -724,18 +1508,18 @@
       </p:sp>
       <p:sp>
         <p:nvSpPr>
-          <p:cNvPr id="52" name="PlaceHolder 3"/>
+          <p:cNvPr id="10" name="PlaceHolder 3"/>
           <p:cNvSpPr>
             <a:spLocks noGrp="1"/>
           </p:cNvSpPr>
           <p:nvPr>
-            <p:ph type="ftr" idx="29"/>
+            <p:ph type="ftr" idx="5"/>
           </p:nvPr>
         </p:nvSpPr>
         <p:spPr>
           <a:xfrm>
             <a:off x="4038480" y="6356520"/>
-            <a:ext cx="4109400" cy="359640"/>
+            <a:ext cx="4109040" cy="359280"/>
           </a:xfrm>
           <a:prstGeom prst="rect">
             <a:avLst/>
@@ -802,18 +1586,18 @@
       </p:sp>
       <p:sp>
         <p:nvSpPr>
-          <p:cNvPr id="53" name="PlaceHolder 4"/>
+          <p:cNvPr id="11" name="PlaceHolder 4"/>
           <p:cNvSpPr>
             <a:spLocks noGrp="1"/>
           </p:cNvSpPr>
           <p:nvPr>
-            <p:ph type="sldNum" idx="30"/>
+            <p:ph type="sldNum" idx="6"/>
           </p:nvPr>
         </p:nvSpPr>
         <p:spPr>
           <a:xfrm>
             <a:off x="8610480" y="6356520"/>
-            <a:ext cx="2737800" cy="359640"/>
+            <a:ext cx="2737440" cy="359280"/>
           </a:xfrm>
           <a:prstGeom prst="rect">
             <a:avLst/>
@@ -858,7 +1642,7 @@
                 <a:tab algn="l" pos="0"/>
               </a:tabLst>
             </a:pPr>
-            <a:fld id="{0DB6FBA0-C279-4C1F-B5F9-2FD9F6AD3C75}" type="slidenum">
+            <a:fld id="{3B73F91C-7B14-4FCD-8469-0B7FBE4918A8}" type="slidenum">
               <a:rPr b="0" lang="en-US" sz="1200" strike="noStrike" u="none">
                 <a:solidFill>
                   <a:schemeClr val="dk1">
@@ -869,7 +1653,7 @@
                 <a:uFillTx/>
                 <a:latin typeface="Calibri"/>
               </a:rPr>
-              <a:t>17</a:t>
+              <a:t>6</a:t>
             </a:fld>
             <a:endParaRPr b="0" lang="en-US" sz="1200" strike="noStrike" u="none">
               <a:solidFill>
@@ -884,7 +1668,7 @@
       </p:sp>
       <p:sp>
         <p:nvSpPr>
-          <p:cNvPr id="54" name="PlaceHolder 5"/>
+          <p:cNvPr id="12" name="PlaceHolder 5"/>
           <p:cNvSpPr>
             <a:spLocks noGrp="1"/>
           </p:cNvSpPr>
@@ -895,7 +1679,7 @@
         <p:spPr>
           <a:xfrm>
             <a:off x="609480" y="1604520"/>
-            <a:ext cx="10967400" cy="3972240"/>
+            <a:ext cx="10967040" cy="3971880"/>
           </a:xfrm>
           <a:prstGeom prst="rect">
             <a:avLst/>
@@ -1161,7 +1945,7 @@
 </p:sldLayout>
 </file>
 
-<file path=ppt/slideLayouts/slideLayout11.xml><?xml version="1.0" encoding="utf-8"?>
+<file path=ppt/slideLayouts/slideLayout3.xml><?xml version="1.0" encoding="utf-8"?>
 <p:sldLayout xmlns:a="http://schemas.openxmlformats.org/drawingml/2006/main" xmlns:p="http://schemas.openxmlformats.org/presentationml/2006/main" xmlns:r="http://schemas.openxmlformats.org/officeDocument/2006/relationships" xmlns:p14="http://schemas.microsoft.com/office/powerpoint/2010/main" xmlns:p15="http://schemas.microsoft.com/office/powerpoint/2012/main" xmlns:mc="http://schemas.openxmlformats.org/markup-compatibility/2006" type="vertTx" preserve="1">
   <p:cSld name="Title and Vertical Text">
     <p:bg>
@@ -1187,7 +1971,7 @@
       </p:grpSpPr>
       <p:sp>
         <p:nvSpPr>
-          <p:cNvPr id="55" name="PlaceHolder 1"/>
+          <p:cNvPr id="13" name="PlaceHolder 1"/>
           <p:cNvSpPr>
             <a:spLocks noGrp="1"/>
           </p:cNvSpPr>
@@ -1198,7 +1982,7 @@
         <p:spPr>
           <a:xfrm>
             <a:off x="838080" y="365040"/>
-            <a:ext cx="10510200" cy="1320120"/>
+            <a:ext cx="10509840" cy="1319760"/>
           </a:xfrm>
           <a:prstGeom prst="rect">
             <a:avLst/>
@@ -1246,7 +2030,7 @@
       </p:sp>
       <p:sp>
         <p:nvSpPr>
-          <p:cNvPr id="56" name="PlaceHolder 2"/>
+          <p:cNvPr id="14" name="PlaceHolder 2"/>
           <p:cNvSpPr>
             <a:spLocks noGrp="1"/>
           </p:cNvSpPr>
@@ -1257,7 +2041,7 @@
         <p:spPr>
           <a:xfrm>
             <a:off x="838080" y="1825560"/>
-            <a:ext cx="10510200" cy="4345920"/>
+            <a:ext cx="10509840" cy="4345560"/>
           </a:xfrm>
           <a:prstGeom prst="rect">
             <a:avLst/>
@@ -1445,18 +2229,18 @@
       </p:sp>
       <p:sp>
         <p:nvSpPr>
-          <p:cNvPr id="57" name="PlaceHolder 3"/>
+          <p:cNvPr id="15" name="PlaceHolder 3"/>
           <p:cNvSpPr>
             <a:spLocks noGrp="1"/>
           </p:cNvSpPr>
           <p:nvPr>
-            <p:ph type="dt" idx="31"/>
+            <p:ph type="dt" idx="7"/>
           </p:nvPr>
         </p:nvSpPr>
         <p:spPr>
           <a:xfrm>
             <a:off x="838080" y="6356520"/>
-            <a:ext cx="2737800" cy="359640"/>
+            <a:ext cx="2737440" cy="359280"/>
           </a:xfrm>
           <a:prstGeom prst="rect">
             <a:avLst/>
@@ -1527,18 +2311,18 @@
       </p:sp>
       <p:sp>
         <p:nvSpPr>
-          <p:cNvPr id="58" name="PlaceHolder 4"/>
+          <p:cNvPr id="16" name="PlaceHolder 4"/>
           <p:cNvSpPr>
             <a:spLocks noGrp="1"/>
           </p:cNvSpPr>
           <p:nvPr>
-            <p:ph type="ftr" idx="32"/>
+            <p:ph type="ftr" idx="8"/>
           </p:nvPr>
         </p:nvSpPr>
         <p:spPr>
           <a:xfrm>
             <a:off x="4038480" y="6356520"/>
-            <a:ext cx="4109400" cy="359640"/>
+            <a:ext cx="4109040" cy="359280"/>
           </a:xfrm>
           <a:prstGeom prst="rect">
             <a:avLst/>
@@ -1605,18 +2389,18 @@
       </p:sp>
       <p:sp>
         <p:nvSpPr>
-          <p:cNvPr id="59" name="PlaceHolder 5"/>
+          <p:cNvPr id="17" name="PlaceHolder 5"/>
           <p:cNvSpPr>
             <a:spLocks noGrp="1"/>
           </p:cNvSpPr>
           <p:nvPr>
-            <p:ph type="sldNum" idx="33"/>
+            <p:ph type="sldNum" idx="9"/>
           </p:nvPr>
         </p:nvSpPr>
         <p:spPr>
           <a:xfrm>
             <a:off x="8610480" y="6356520"/>
-            <a:ext cx="2737800" cy="359640"/>
+            <a:ext cx="2737440" cy="359280"/>
           </a:xfrm>
           <a:prstGeom prst="rect">
             <a:avLst/>
@@ -1661,7 +2445,7 @@
                 <a:tab algn="l" pos="0"/>
               </a:tabLst>
             </a:pPr>
-            <a:fld id="{71A5FBB2-A1F1-4461-9FCD-3B1ADDACDC26}" type="slidenum">
+            <a:fld id="{00DA8439-0A1D-40FB-B56F-840FA7014CDE}" type="slidenum">
               <a:rPr b="0" lang="en-US" sz="1200" strike="noStrike" u="none">
                 <a:solidFill>
                   <a:schemeClr val="dk1">
@@ -1690,9 +2474,9 @@
 </p:sldLayout>
 </file>
 
-<file path=ppt/slideLayouts/slideLayout2.xml><?xml version="1.0" encoding="utf-8"?>
-<p:sldLayout xmlns:a="http://schemas.openxmlformats.org/drawingml/2006/main" xmlns:p="http://schemas.openxmlformats.org/presentationml/2006/main" xmlns:r="http://schemas.openxmlformats.org/officeDocument/2006/relationships" xmlns:p14="http://schemas.microsoft.com/office/powerpoint/2010/main" xmlns:p15="http://schemas.microsoft.com/office/powerpoint/2012/main" xmlns:mc="http://schemas.openxmlformats.org/markup-compatibility/2006" type="obj" preserve="1">
-  <p:cSld name="Title and Content">
+<file path=ppt/slideLayouts/slideLayout4.xml><?xml version="1.0" encoding="utf-8"?>
+<p:sldLayout xmlns:a="http://schemas.openxmlformats.org/drawingml/2006/main" xmlns:p="http://schemas.openxmlformats.org/presentationml/2006/main" xmlns:r="http://schemas.openxmlformats.org/officeDocument/2006/relationships" xmlns:p14="http://schemas.microsoft.com/office/powerpoint/2010/main" xmlns:p15="http://schemas.microsoft.com/office/powerpoint/2012/main" xmlns:mc="http://schemas.openxmlformats.org/markup-compatibility/2006" type="vertTitleAndTx" preserve="1">
+  <p:cSld name="Vertical Title and Text">
     <p:bg>
       <p:bgPr>
         <a:solidFill>
@@ -1716,7 +2500,7 @@
       </p:grpSpPr>
       <p:sp>
         <p:nvSpPr>
-          <p:cNvPr id="7" name="PlaceHolder 1"/>
+          <p:cNvPr id="18" name="PlaceHolder 1"/>
           <p:cNvSpPr>
             <a:spLocks noGrp="1"/>
           </p:cNvSpPr>
@@ -1726,8 +2510,8 @@
         </p:nvSpPr>
         <p:spPr>
           <a:xfrm>
-            <a:off x="838080" y="365040"/>
-            <a:ext cx="10510200" cy="1320120"/>
+            <a:off x="8724960" y="365040"/>
+            <a:ext cx="2623320" cy="5806080"/>
           </a:xfrm>
           <a:prstGeom prst="rect">
             <a:avLst/>
@@ -1738,7 +2522,7 @@
           </a:ln>
         </p:spPr>
         <p:txBody>
-          <a:bodyPr lIns="91440" rIns="91440" tIns="45720" bIns="45720" anchor="ctr">
+          <a:bodyPr lIns="91440" rIns="91440" tIns="45720" bIns="45720" anchor="ctr" vert="eaVert">
             <a:noAutofit/>
           </a:bodyPr>
           <a:p>
@@ -1775,7 +2559,7 @@
       </p:sp>
       <p:sp>
         <p:nvSpPr>
-          <p:cNvPr id="8" name="PlaceHolder 2"/>
+          <p:cNvPr id="19" name="PlaceHolder 2"/>
           <p:cNvSpPr>
             <a:spLocks noGrp="1"/>
           </p:cNvSpPr>
@@ -1785,8 +2569,8 @@
         </p:nvSpPr>
         <p:spPr>
           <a:xfrm>
-            <a:off x="838080" y="1825560"/>
-            <a:ext cx="10510200" cy="4345920"/>
+            <a:off x="838080" y="365040"/>
+            <a:ext cx="7728480" cy="5806080"/>
           </a:xfrm>
           <a:prstGeom prst="rect">
             <a:avLst/>
@@ -1797,7 +2581,7 @@
           </a:ln>
         </p:spPr>
         <p:txBody>
-          <a:bodyPr lIns="91440" rIns="91440" tIns="45720" bIns="45720" anchor="t">
+          <a:bodyPr lIns="91440" rIns="91440" tIns="45720" bIns="45720" anchor="t" vert="eaVert">
             <a:noAutofit/>
           </a:bodyPr>
           <a:p>
@@ -1974,18 +2758,18 @@
       </p:sp>
       <p:sp>
         <p:nvSpPr>
-          <p:cNvPr id="9" name="PlaceHolder 3"/>
+          <p:cNvPr id="20" name="PlaceHolder 3"/>
           <p:cNvSpPr>
             <a:spLocks noGrp="1"/>
           </p:cNvSpPr>
           <p:nvPr>
-            <p:ph type="dt" idx="4"/>
+            <p:ph type="dt" idx="10"/>
           </p:nvPr>
         </p:nvSpPr>
         <p:spPr>
           <a:xfrm>
             <a:off x="838080" y="6356520"/>
-            <a:ext cx="2737800" cy="359640"/>
+            <a:ext cx="2737440" cy="359280"/>
           </a:xfrm>
           <a:prstGeom prst="rect">
             <a:avLst/>
@@ -2041,7 +2825,7 @@
                 <a:uFillTx/>
                 <a:latin typeface="Calibri"/>
               </a:rPr>
-              <a:t> </a:t>
+              <a:t>&lt;date/time&gt;</a:t>
             </a:r>
             <a:endParaRPr b="0" lang="en-US" sz="1200" strike="noStrike" u="none">
               <a:solidFill>
@@ -2056,18 +2840,18 @@
       </p:sp>
       <p:sp>
         <p:nvSpPr>
-          <p:cNvPr id="10" name="PlaceHolder 4"/>
+          <p:cNvPr id="21" name="PlaceHolder 4"/>
           <p:cNvSpPr>
             <a:spLocks noGrp="1"/>
           </p:cNvSpPr>
           <p:nvPr>
-            <p:ph type="ftr" idx="5"/>
+            <p:ph type="ftr" idx="11"/>
           </p:nvPr>
         </p:nvSpPr>
         <p:spPr>
           <a:xfrm>
             <a:off x="4038480" y="6356520"/>
-            <a:ext cx="4109400" cy="359640"/>
+            <a:ext cx="4109040" cy="359280"/>
           </a:xfrm>
           <a:prstGeom prst="rect">
             <a:avLst/>
@@ -2119,7 +2903,7 @@
                 <a:uFillTx/>
                 <a:latin typeface="Times New Roman"/>
               </a:rPr>
-              <a:t> </a:t>
+              <a:t>&lt;footer&gt;</a:t>
             </a:r>
             <a:endParaRPr b="0" lang="en-US" sz="1400" strike="noStrike" u="none">
               <a:solidFill>
@@ -2134,18 +2918,18 @@
       </p:sp>
       <p:sp>
         <p:nvSpPr>
-          <p:cNvPr id="11" name="PlaceHolder 5"/>
+          <p:cNvPr id="22" name="PlaceHolder 5"/>
           <p:cNvSpPr>
             <a:spLocks noGrp="1"/>
           </p:cNvSpPr>
           <p:nvPr>
-            <p:ph type="sldNum" idx="6"/>
+            <p:ph type="sldNum" idx="12"/>
           </p:nvPr>
         </p:nvSpPr>
         <p:spPr>
           <a:xfrm>
             <a:off x="8610480" y="6356520"/>
-            <a:ext cx="2737800" cy="359640"/>
+            <a:ext cx="2737440" cy="359280"/>
           </a:xfrm>
           <a:prstGeom prst="rect">
             <a:avLst/>
@@ -2190,7 +2974,7 @@
                 <a:tab algn="l" pos="0"/>
               </a:tabLst>
             </a:pPr>
-            <a:fld id="{DF4B55B4-D9B4-49CA-A2AB-9F36BC019DC4}" type="slidenum">
+            <a:fld id="{5E2859E4-129B-4B30-A3D3-6D9F1A8E8CFD}" type="slidenum">
               <a:rPr b="0" lang="en-US" sz="1200" strike="noStrike" u="none">
                 <a:solidFill>
                   <a:schemeClr val="dk1">
@@ -2201,7 +2985,7 @@
                 <a:uFillTx/>
                 <a:latin typeface="Calibri"/>
               </a:rPr>
-              <a:t>17</a:t>
+              <a:t>&lt;number&gt;</a:t>
             </a:fld>
             <a:endParaRPr b="0" lang="en-US" sz="1200" strike="noStrike" u="none">
               <a:solidFill>
@@ -2219,9 +3003,9 @@
 </p:sldLayout>
 </file>
 
-<file path=ppt/slideLayouts/slideLayout3.xml><?xml version="1.0" encoding="utf-8"?>
-<p:sldLayout xmlns:a="http://schemas.openxmlformats.org/drawingml/2006/main" xmlns:p="http://schemas.openxmlformats.org/presentationml/2006/main" xmlns:r="http://schemas.openxmlformats.org/officeDocument/2006/relationships" xmlns:p14="http://schemas.microsoft.com/office/powerpoint/2010/main" xmlns:p15="http://schemas.microsoft.com/office/powerpoint/2012/main" xmlns:mc="http://schemas.openxmlformats.org/markup-compatibility/2006" type="blank" preserve="1">
-  <p:cSld name="Section Header">
+<file path=ppt/slideLayouts/slideLayout5.xml><?xml version="1.0" encoding="utf-8"?>
+<p:sldLayout xmlns:a="http://schemas.openxmlformats.org/drawingml/2006/main" xmlns:p="http://schemas.openxmlformats.org/presentationml/2006/main" xmlns:r="http://schemas.openxmlformats.org/officeDocument/2006/relationships" xmlns:p14="http://schemas.microsoft.com/office/powerpoint/2010/main" xmlns:p15="http://schemas.microsoft.com/office/powerpoint/2012/main" xmlns:mc="http://schemas.openxmlformats.org/markup-compatibility/2006" type="obj" preserve="1">
+  <p:cSld name="Title and Content">
     <p:bg>
       <p:bgPr>
         <a:solidFill>
@@ -2245,7 +3029,7 @@
       </p:grpSpPr>
       <p:sp>
         <p:nvSpPr>
-          <p:cNvPr id="12" name="PlaceHolder 1"/>
+          <p:cNvPr id="23" name="PlaceHolder 1"/>
           <p:cNvSpPr>
             <a:spLocks noGrp="1"/>
           </p:cNvSpPr>
@@ -2255,8 +3039,8 @@
         </p:nvSpPr>
         <p:spPr>
           <a:xfrm>
-            <a:off x="831960" y="1709640"/>
-            <a:ext cx="10510200" cy="2847240"/>
+            <a:off x="838080" y="365040"/>
+            <a:ext cx="10509840" cy="1319760"/>
           </a:xfrm>
           <a:prstGeom prst="rect">
             <a:avLst/>
@@ -2267,7 +3051,7 @@
           </a:ln>
         </p:spPr>
         <p:txBody>
-          <a:bodyPr lIns="91440" rIns="91440" tIns="45720" bIns="45720" anchor="b">
+          <a:bodyPr lIns="91440" rIns="91440" tIns="45720" bIns="45720" anchor="ctr">
             <a:noAutofit/>
           </a:bodyPr>
           <a:p>
@@ -2281,7 +3065,7 @@
               </a:tabLst>
             </a:pPr>
             <a:r>
-              <a:rPr b="0" lang="en-US" sz="6000" strike="noStrike" u="none">
+              <a:rPr b="0" lang="en-US" sz="4400" strike="noStrike" u="none">
                 <a:solidFill>
                   <a:schemeClr val="dk1"/>
                 </a:solidFill>
@@ -2291,7 +3075,7 @@
               </a:rPr>
               <a:t>Click to edit Master title style</a:t>
             </a:r>
-            <a:endParaRPr b="0" lang="en-US" sz="6000" strike="noStrike" u="none">
+            <a:endParaRPr b="0" lang="en-US" sz="4400" strike="noStrike" u="none">
               <a:solidFill>
                 <a:srgbClr val="000000"/>
               </a:solidFill>
@@ -2304,7 +3088,7 @@
       </p:sp>
       <p:sp>
         <p:nvSpPr>
-          <p:cNvPr id="13" name="PlaceHolder 2"/>
+          <p:cNvPr id="24" name="PlaceHolder 2"/>
           <p:cNvSpPr>
             <a:spLocks noGrp="1"/>
           </p:cNvSpPr>
@@ -2314,8 +3098,8 @@
         </p:nvSpPr>
         <p:spPr>
           <a:xfrm>
-            <a:off x="831960" y="4589640"/>
-            <a:ext cx="10510200" cy="1494720"/>
+            <a:off x="838080" y="1825560"/>
+            <a:ext cx="10509840" cy="4345560"/>
           </a:xfrm>
           <a:prstGeom prst="rect">
             <a:avLst/>
@@ -2330,24 +3114,23 @@
             <a:noAutofit/>
           </a:bodyPr>
           <a:p>
-            <a:pPr indent="0" defTabSz="914400">
+            <a:pPr marL="228600" indent="-228600" defTabSz="914400">
               <a:lnSpc>
                 <a:spcPct val="90000"/>
               </a:lnSpc>
               <a:spcBef>
                 <a:spcPts val="1001"/>
               </a:spcBef>
-              <a:buNone/>
-              <a:tabLst>
-                <a:tab algn="l" pos="0"/>
-              </a:tabLst>
+              <a:buClr>
+                <a:srgbClr val="000000"/>
+              </a:buClr>
+              <a:buFont typeface="Arial"/>
+              <a:buChar char="•"/>
             </a:pPr>
             <a:r>
-              <a:rPr b="0" lang="en-US" sz="2400" strike="noStrike" u="none">
+              <a:rPr b="0" lang="en-US" sz="2800" strike="noStrike" u="none">
                 <a:solidFill>
-                  <a:schemeClr val="dk1">
-                    <a:tint val="75000"/>
-                  </a:schemeClr>
+                  <a:schemeClr val="dk1"/>
                 </a:solidFill>
                 <a:effectLst/>
                 <a:uFillTx/>
@@ -2355,7 +3138,143 @@
               </a:rPr>
               <a:t>Click to edit Master text styles</a:t>
             </a:r>
+            <a:endParaRPr b="0" lang="en-US" sz="2800" strike="noStrike" u="none">
+              <a:solidFill>
+                <a:srgbClr val="000000"/>
+              </a:solidFill>
+              <a:effectLst/>
+              <a:uFillTx/>
+              <a:latin typeface="Arial"/>
+            </a:endParaRPr>
+          </a:p>
+          <a:p>
+            <a:pPr lvl="1" marL="685800" indent="-228600" defTabSz="914400">
+              <a:lnSpc>
+                <a:spcPct val="90000"/>
+              </a:lnSpc>
+              <a:spcBef>
+                <a:spcPts val="499"/>
+              </a:spcBef>
+              <a:buClr>
+                <a:srgbClr val="000000"/>
+              </a:buClr>
+              <a:buFont typeface="Arial"/>
+              <a:buChar char="•"/>
+            </a:pPr>
+            <a:r>
+              <a:rPr b="0" lang="en-US" sz="2400" strike="noStrike" u="none">
+                <a:solidFill>
+                  <a:schemeClr val="dk1"/>
+                </a:solidFill>
+                <a:effectLst/>
+                <a:uFillTx/>
+                <a:latin typeface="Calibri"/>
+              </a:rPr>
+              <a:t>Second level</a:t>
+            </a:r>
             <a:endParaRPr b="0" lang="en-US" sz="2400" strike="noStrike" u="none">
+              <a:solidFill>
+                <a:srgbClr val="000000"/>
+              </a:solidFill>
+              <a:effectLst/>
+              <a:uFillTx/>
+              <a:latin typeface="Arial"/>
+            </a:endParaRPr>
+          </a:p>
+          <a:p>
+            <a:pPr lvl="2" marL="1143000" indent="-228600" defTabSz="914400">
+              <a:lnSpc>
+                <a:spcPct val="90000"/>
+              </a:lnSpc>
+              <a:spcBef>
+                <a:spcPts val="499"/>
+              </a:spcBef>
+              <a:buClr>
+                <a:srgbClr val="000000"/>
+              </a:buClr>
+              <a:buFont typeface="Arial"/>
+              <a:buChar char="•"/>
+            </a:pPr>
+            <a:r>
+              <a:rPr b="0" lang="en-US" sz="2000" strike="noStrike" u="none">
+                <a:solidFill>
+                  <a:schemeClr val="dk1"/>
+                </a:solidFill>
+                <a:effectLst/>
+                <a:uFillTx/>
+                <a:latin typeface="Calibri"/>
+              </a:rPr>
+              <a:t>Third level</a:t>
+            </a:r>
+            <a:endParaRPr b="0" lang="en-US" sz="2000" strike="noStrike" u="none">
+              <a:solidFill>
+                <a:srgbClr val="000000"/>
+              </a:solidFill>
+              <a:effectLst/>
+              <a:uFillTx/>
+              <a:latin typeface="Arial"/>
+            </a:endParaRPr>
+          </a:p>
+          <a:p>
+            <a:pPr lvl="3" marL="1600200" indent="-228600" defTabSz="914400">
+              <a:lnSpc>
+                <a:spcPct val="90000"/>
+              </a:lnSpc>
+              <a:spcBef>
+                <a:spcPts val="499"/>
+              </a:spcBef>
+              <a:buClr>
+                <a:srgbClr val="000000"/>
+              </a:buClr>
+              <a:buFont typeface="Arial"/>
+              <a:buChar char="•"/>
+            </a:pPr>
+            <a:r>
+              <a:rPr b="0" lang="en-US" sz="1800" strike="noStrike" u="none">
+                <a:solidFill>
+                  <a:schemeClr val="dk1"/>
+                </a:solidFill>
+                <a:effectLst/>
+                <a:uFillTx/>
+                <a:latin typeface="Calibri"/>
+              </a:rPr>
+              <a:t>Fourth level</a:t>
+            </a:r>
+            <a:endParaRPr b="0" lang="en-US" sz="1800" strike="noStrike" u="none">
+              <a:solidFill>
+                <a:srgbClr val="000000"/>
+              </a:solidFill>
+              <a:effectLst/>
+              <a:uFillTx/>
+              <a:latin typeface="Arial"/>
+            </a:endParaRPr>
+          </a:p>
+          <a:p>
+            <a:pPr lvl="4" marL="2057400" indent="-228600" defTabSz="914400">
+              <a:lnSpc>
+                <a:spcPct val="90000"/>
+              </a:lnSpc>
+              <a:spcBef>
+                <a:spcPts val="499"/>
+              </a:spcBef>
+              <a:buClr>
+                <a:srgbClr val="000000"/>
+              </a:buClr>
+              <a:buFont typeface="Arial"/>
+              <a:buChar char="•"/>
+            </a:pPr>
+            <a:r>
+              <a:rPr b="0" lang="en-US" sz="1800" strike="noStrike" u="none">
+                <a:solidFill>
+                  <a:schemeClr val="dk1"/>
+                </a:solidFill>
+                <a:effectLst/>
+                <a:uFillTx/>
+                <a:latin typeface="Calibri"/>
+              </a:rPr>
+              <a:t>Fifth level</a:t>
+            </a:r>
+            <a:endParaRPr b="0" lang="en-US" sz="1800" strike="noStrike" u="none">
               <a:solidFill>
                 <a:srgbClr val="000000"/>
               </a:solidFill>
@@ -2368,18 +3287,18 @@
       </p:sp>
       <p:sp>
         <p:nvSpPr>
-          <p:cNvPr id="14" name="PlaceHolder 3"/>
+          <p:cNvPr id="25" name="PlaceHolder 3"/>
           <p:cNvSpPr>
             <a:spLocks noGrp="1"/>
           </p:cNvSpPr>
           <p:nvPr>
-            <p:ph type="dt" idx="7"/>
+            <p:ph type="dt" idx="13"/>
           </p:nvPr>
         </p:nvSpPr>
         <p:spPr>
           <a:xfrm>
             <a:off x="838080" y="6356520"/>
-            <a:ext cx="2737800" cy="359640"/>
+            <a:ext cx="2737440" cy="359280"/>
           </a:xfrm>
           <a:prstGeom prst="rect">
             <a:avLst/>
@@ -2435,7 +3354,7 @@
                 <a:uFillTx/>
                 <a:latin typeface="Calibri"/>
               </a:rPr>
-              <a:t> </a:t>
+              <a:t>&lt;date/time&gt;</a:t>
             </a:r>
             <a:endParaRPr b="0" lang="en-US" sz="1200" strike="noStrike" u="none">
               <a:solidFill>
@@ -2450,18 +3369,18 @@
       </p:sp>
       <p:sp>
         <p:nvSpPr>
-          <p:cNvPr id="15" name="PlaceHolder 4"/>
+          <p:cNvPr id="26" name="PlaceHolder 4"/>
           <p:cNvSpPr>
             <a:spLocks noGrp="1"/>
           </p:cNvSpPr>
           <p:nvPr>
-            <p:ph type="ftr" idx="8"/>
+            <p:ph type="ftr" idx="14"/>
           </p:nvPr>
         </p:nvSpPr>
         <p:spPr>
           <a:xfrm>
             <a:off x="4038480" y="6356520"/>
-            <a:ext cx="4109400" cy="359640"/>
+            <a:ext cx="4109040" cy="359280"/>
           </a:xfrm>
           <a:prstGeom prst="rect">
             <a:avLst/>
@@ -2513,7 +3432,7 @@
                 <a:uFillTx/>
                 <a:latin typeface="Times New Roman"/>
               </a:rPr>
-              <a:t> </a:t>
+              <a:t>&lt;footer&gt;</a:t>
             </a:r>
             <a:endParaRPr b="0" lang="en-US" sz="1400" strike="noStrike" u="none">
               <a:solidFill>
@@ -2528,18 +3447,18 @@
       </p:sp>
       <p:sp>
         <p:nvSpPr>
-          <p:cNvPr id="16" name="PlaceHolder 5"/>
+          <p:cNvPr id="27" name="PlaceHolder 5"/>
           <p:cNvSpPr>
             <a:spLocks noGrp="1"/>
           </p:cNvSpPr>
           <p:nvPr>
-            <p:ph type="sldNum" idx="9"/>
+            <p:ph type="sldNum" idx="15"/>
           </p:nvPr>
         </p:nvSpPr>
         <p:spPr>
           <a:xfrm>
             <a:off x="8610480" y="6356520"/>
-            <a:ext cx="2737800" cy="359640"/>
+            <a:ext cx="2737440" cy="359280"/>
           </a:xfrm>
           <a:prstGeom prst="rect">
             <a:avLst/>
@@ -2584,7 +3503,7 @@
                 <a:tab algn="l" pos="0"/>
               </a:tabLst>
             </a:pPr>
-            <a:fld id="{CABB33CD-3867-49F7-A80E-344661225B72}" type="slidenum">
+            <a:fld id="{EF618038-24B8-4872-A236-87499F5E7276}" type="slidenum">
               <a:rPr b="0" lang="en-US" sz="1200" strike="noStrike" u="none">
                 <a:solidFill>
                   <a:schemeClr val="dk1">
@@ -2595,7 +3514,7 @@
                 <a:uFillTx/>
                 <a:latin typeface="Calibri"/>
               </a:rPr>
-              <a:t>17</a:t>
+              <a:t>&lt;number&gt;</a:t>
             </a:fld>
             <a:endParaRPr b="0" lang="en-US" sz="1200" strike="noStrike" u="none">
               <a:solidFill>
@@ -2613,9 +3532,9 @@
 </p:sldLayout>
 </file>
 
-<file path=ppt/slideLayouts/slideLayout4.xml><?xml version="1.0" encoding="utf-8"?>
-<p:sldLayout xmlns:a="http://schemas.openxmlformats.org/drawingml/2006/main" xmlns:p="http://schemas.openxmlformats.org/presentationml/2006/main" xmlns:r="http://schemas.openxmlformats.org/officeDocument/2006/relationships" xmlns:p14="http://schemas.microsoft.com/office/powerpoint/2010/main" xmlns:p15="http://schemas.microsoft.com/office/powerpoint/2012/main" xmlns:mc="http://schemas.openxmlformats.org/markup-compatibility/2006" type="twoObj" preserve="1">
-  <p:cSld name="Two Content">
+<file path=ppt/slideLayouts/slideLayout6.xml><?xml version="1.0" encoding="utf-8"?>
+<p:sldLayout xmlns:a="http://schemas.openxmlformats.org/drawingml/2006/main" xmlns:p="http://schemas.openxmlformats.org/presentationml/2006/main" xmlns:r="http://schemas.openxmlformats.org/officeDocument/2006/relationships" xmlns:p14="http://schemas.microsoft.com/office/powerpoint/2010/main" xmlns:p15="http://schemas.microsoft.com/office/powerpoint/2012/main" xmlns:mc="http://schemas.openxmlformats.org/markup-compatibility/2006" type="blank" preserve="1">
+  <p:cSld name="Section Header">
     <p:bg>
       <p:bgPr>
         <a:solidFill>
@@ -2639,7 +3558,7 @@
       </p:grpSpPr>
       <p:sp>
         <p:nvSpPr>
-          <p:cNvPr id="17" name="PlaceHolder 1"/>
+          <p:cNvPr id="28" name="PlaceHolder 1"/>
           <p:cNvSpPr>
             <a:spLocks noGrp="1"/>
           </p:cNvSpPr>
@@ -2649,8 +3568,8 @@
         </p:nvSpPr>
         <p:spPr>
           <a:xfrm>
-            <a:off x="838080" y="365040"/>
-            <a:ext cx="10510200" cy="1320120"/>
+            <a:off x="831960" y="1709640"/>
+            <a:ext cx="10509840" cy="2846880"/>
           </a:xfrm>
           <a:prstGeom prst="rect">
             <a:avLst/>
@@ -2661,7 +3580,7 @@
           </a:ln>
         </p:spPr>
         <p:txBody>
-          <a:bodyPr lIns="91440" rIns="91440" tIns="45720" bIns="45720" anchor="ctr">
+          <a:bodyPr lIns="91440" rIns="91440" tIns="45720" bIns="45720" anchor="b">
             <a:noAutofit/>
           </a:bodyPr>
           <a:p>
@@ -2675,7 +3594,7 @@
               </a:tabLst>
             </a:pPr>
             <a:r>
-              <a:rPr b="0" lang="en-US" sz="4400" strike="noStrike" u="none">
+              <a:rPr b="0" lang="en-US" sz="6000" strike="noStrike" u="none">
                 <a:solidFill>
                   <a:schemeClr val="dk1"/>
                 </a:solidFill>
@@ -2685,7 +3604,7 @@
               </a:rPr>
               <a:t>Click to edit Master title style</a:t>
             </a:r>
-            <a:endParaRPr b="0" lang="en-US" sz="4400" strike="noStrike" u="none">
+            <a:endParaRPr b="0" lang="en-US" sz="6000" strike="noStrike" u="none">
               <a:solidFill>
                 <a:srgbClr val="000000"/>
               </a:solidFill>
@@ -2698,7 +3617,7 @@
       </p:sp>
       <p:sp>
         <p:nvSpPr>
-          <p:cNvPr id="18" name="PlaceHolder 2"/>
+          <p:cNvPr id="29" name="PlaceHolder 2"/>
           <p:cNvSpPr>
             <a:spLocks noGrp="1"/>
           </p:cNvSpPr>
@@ -2708,8 +3627,8 @@
         </p:nvSpPr>
         <p:spPr>
           <a:xfrm>
-            <a:off x="838080" y="1825560"/>
-            <a:ext cx="5176080" cy="4345920"/>
+            <a:off x="831960" y="4589640"/>
+            <a:ext cx="10509840" cy="1494360"/>
           </a:xfrm>
           <a:prstGeom prst="rect">
             <a:avLst/>
@@ -2724,23 +3643,24 @@
             <a:noAutofit/>
           </a:bodyPr>
           <a:p>
-            <a:pPr marL="228600" indent="-228600" defTabSz="914400">
+            <a:pPr indent="0" defTabSz="914400">
               <a:lnSpc>
                 <a:spcPct val="90000"/>
               </a:lnSpc>
               <a:spcBef>
                 <a:spcPts val="1001"/>
               </a:spcBef>
-              <a:buClr>
-                <a:srgbClr val="000000"/>
-              </a:buClr>
-              <a:buFont typeface="Arial"/>
-              <a:buChar char="•"/>
+              <a:buNone/>
+              <a:tabLst>
+                <a:tab algn="l" pos="0"/>
+              </a:tabLst>
             </a:pPr>
             <a:r>
-              <a:rPr b="0" lang="en-US" sz="2800" strike="noStrike" u="none">
+              <a:rPr b="0" lang="en-US" sz="2400" strike="noStrike" u="none">
                 <a:solidFill>
-                  <a:schemeClr val="dk1"/>
+                  <a:schemeClr val="dk1">
+                    <a:tint val="75000"/>
+                  </a:schemeClr>
                 </a:solidFill>
                 <a:effectLst/>
                 <a:uFillTx/>
@@ -2748,143 +3668,7 @@
               </a:rPr>
               <a:t>Click to edit Master text styles</a:t>
             </a:r>
-            <a:endParaRPr b="0" lang="en-US" sz="2800" strike="noStrike" u="none">
-              <a:solidFill>
-                <a:srgbClr val="000000"/>
-              </a:solidFill>
-              <a:effectLst/>
-              <a:uFillTx/>
-              <a:latin typeface="Arial"/>
-            </a:endParaRPr>
-          </a:p>
-          <a:p>
-            <a:pPr lvl="1" marL="685800" indent="-228600" defTabSz="914400">
-              <a:lnSpc>
-                <a:spcPct val="90000"/>
-              </a:lnSpc>
-              <a:spcBef>
-                <a:spcPts val="499"/>
-              </a:spcBef>
-              <a:buClr>
-                <a:srgbClr val="000000"/>
-              </a:buClr>
-              <a:buFont typeface="Arial"/>
-              <a:buChar char="•"/>
-            </a:pPr>
-            <a:r>
-              <a:rPr b="0" lang="en-US" sz="2400" strike="noStrike" u="none">
-                <a:solidFill>
-                  <a:schemeClr val="dk1"/>
-                </a:solidFill>
-                <a:effectLst/>
-                <a:uFillTx/>
-                <a:latin typeface="Calibri"/>
-              </a:rPr>
-              <a:t>Second level</a:t>
-            </a:r>
             <a:endParaRPr b="0" lang="en-US" sz="2400" strike="noStrike" u="none">
-              <a:solidFill>
-                <a:srgbClr val="000000"/>
-              </a:solidFill>
-              <a:effectLst/>
-              <a:uFillTx/>
-              <a:latin typeface="Arial"/>
-            </a:endParaRPr>
-          </a:p>
-          <a:p>
-            <a:pPr lvl="2" marL="1143000" indent="-228600" defTabSz="914400">
-              <a:lnSpc>
-                <a:spcPct val="90000"/>
-              </a:lnSpc>
-              <a:spcBef>
-                <a:spcPts val="499"/>
-              </a:spcBef>
-              <a:buClr>
-                <a:srgbClr val="000000"/>
-              </a:buClr>
-              <a:buFont typeface="Arial"/>
-              <a:buChar char="•"/>
-            </a:pPr>
-            <a:r>
-              <a:rPr b="0" lang="en-US" sz="2000" strike="noStrike" u="none">
-                <a:solidFill>
-                  <a:schemeClr val="dk1"/>
-                </a:solidFill>
-                <a:effectLst/>
-                <a:uFillTx/>
-                <a:latin typeface="Calibri"/>
-              </a:rPr>
-              <a:t>Third level</a:t>
-            </a:r>
-            <a:endParaRPr b="0" lang="en-US" sz="2000" strike="noStrike" u="none">
-              <a:solidFill>
-                <a:srgbClr val="000000"/>
-              </a:solidFill>
-              <a:effectLst/>
-              <a:uFillTx/>
-              <a:latin typeface="Arial"/>
-            </a:endParaRPr>
-          </a:p>
-          <a:p>
-            <a:pPr lvl="3" marL="1600200" indent="-228600" defTabSz="914400">
-              <a:lnSpc>
-                <a:spcPct val="90000"/>
-              </a:lnSpc>
-              <a:spcBef>
-                <a:spcPts val="499"/>
-              </a:spcBef>
-              <a:buClr>
-                <a:srgbClr val="000000"/>
-              </a:buClr>
-              <a:buFont typeface="Arial"/>
-              <a:buChar char="•"/>
-            </a:pPr>
-            <a:r>
-              <a:rPr b="0" lang="en-US" sz="1800" strike="noStrike" u="none">
-                <a:solidFill>
-                  <a:schemeClr val="dk1"/>
-                </a:solidFill>
-                <a:effectLst/>
-                <a:uFillTx/>
-                <a:latin typeface="Calibri"/>
-              </a:rPr>
-              <a:t>Fourth level</a:t>
-            </a:r>
-            <a:endParaRPr b="0" lang="en-US" sz="1800" strike="noStrike" u="none">
-              <a:solidFill>
-                <a:srgbClr val="000000"/>
-              </a:solidFill>
-              <a:effectLst/>
-              <a:uFillTx/>
-              <a:latin typeface="Arial"/>
-            </a:endParaRPr>
-          </a:p>
-          <a:p>
-            <a:pPr lvl="4" marL="2057400" indent="-228600" defTabSz="914400">
-              <a:lnSpc>
-                <a:spcPct val="90000"/>
-              </a:lnSpc>
-              <a:spcBef>
-                <a:spcPts val="499"/>
-              </a:spcBef>
-              <a:buClr>
-                <a:srgbClr val="000000"/>
-              </a:buClr>
-              <a:buFont typeface="Arial"/>
-              <a:buChar char="•"/>
-            </a:pPr>
-            <a:r>
-              <a:rPr b="0" lang="en-US" sz="1800" strike="noStrike" u="none">
-                <a:solidFill>
-                  <a:schemeClr val="dk1"/>
-                </a:solidFill>
-                <a:effectLst/>
-                <a:uFillTx/>
-                <a:latin typeface="Calibri"/>
-              </a:rPr>
-              <a:t>Fifth level</a:t>
-            </a:r>
-            <a:endParaRPr b="0" lang="en-US" sz="1800" strike="noStrike" u="none">
               <a:solidFill>
                 <a:srgbClr val="000000"/>
               </a:solidFill>
@@ -2897,217 +3681,18 @@
       </p:sp>
       <p:sp>
         <p:nvSpPr>
-          <p:cNvPr id="19" name="PlaceHolder 3"/>
+          <p:cNvPr id="30" name="PlaceHolder 3"/>
           <p:cNvSpPr>
             <a:spLocks noGrp="1"/>
           </p:cNvSpPr>
           <p:nvPr>
-            <p:ph type="body"/>
-          </p:nvPr>
-        </p:nvSpPr>
-        <p:spPr>
-          <a:xfrm>
-            <a:off x="6172200" y="1825560"/>
-            <a:ext cx="5176080" cy="4345920"/>
-          </a:xfrm>
-          <a:prstGeom prst="rect">
-            <a:avLst/>
-          </a:prstGeom>
-          <a:noFill/>
-          <a:ln w="0">
-            <a:noFill/>
-          </a:ln>
-        </p:spPr>
-        <p:txBody>
-          <a:bodyPr lIns="91440" rIns="91440" tIns="45720" bIns="45720" anchor="t">
-            <a:noAutofit/>
-          </a:bodyPr>
-          <a:p>
-            <a:pPr marL="228600" indent="-228600" defTabSz="914400">
-              <a:lnSpc>
-                <a:spcPct val="90000"/>
-              </a:lnSpc>
-              <a:spcBef>
-                <a:spcPts val="1001"/>
-              </a:spcBef>
-              <a:buClr>
-                <a:srgbClr val="000000"/>
-              </a:buClr>
-              <a:buFont typeface="Arial"/>
-              <a:buChar char="•"/>
-            </a:pPr>
-            <a:r>
-              <a:rPr b="0" lang="en-US" sz="2800" strike="noStrike" u="none">
-                <a:solidFill>
-                  <a:schemeClr val="dk1"/>
-                </a:solidFill>
-                <a:effectLst/>
-                <a:uFillTx/>
-                <a:latin typeface="Calibri"/>
-              </a:rPr>
-              <a:t>Click to edit Master text styles</a:t>
-            </a:r>
-            <a:endParaRPr b="0" lang="en-US" sz="2800" strike="noStrike" u="none">
-              <a:solidFill>
-                <a:srgbClr val="000000"/>
-              </a:solidFill>
-              <a:effectLst/>
-              <a:uFillTx/>
-              <a:latin typeface="Arial"/>
-            </a:endParaRPr>
-          </a:p>
-          <a:p>
-            <a:pPr lvl="1" marL="685800" indent="-228600" defTabSz="914400">
-              <a:lnSpc>
-                <a:spcPct val="90000"/>
-              </a:lnSpc>
-              <a:spcBef>
-                <a:spcPts val="499"/>
-              </a:spcBef>
-              <a:buClr>
-                <a:srgbClr val="000000"/>
-              </a:buClr>
-              <a:buFont typeface="Arial"/>
-              <a:buChar char="•"/>
-            </a:pPr>
-            <a:r>
-              <a:rPr b="0" lang="en-US" sz="2400" strike="noStrike" u="none">
-                <a:solidFill>
-                  <a:schemeClr val="dk1"/>
-                </a:solidFill>
-                <a:effectLst/>
-                <a:uFillTx/>
-                <a:latin typeface="Calibri"/>
-              </a:rPr>
-              <a:t>Second level</a:t>
-            </a:r>
-            <a:endParaRPr b="0" lang="en-US" sz="2400" strike="noStrike" u="none">
-              <a:solidFill>
-                <a:srgbClr val="000000"/>
-              </a:solidFill>
-              <a:effectLst/>
-              <a:uFillTx/>
-              <a:latin typeface="Arial"/>
-            </a:endParaRPr>
-          </a:p>
-          <a:p>
-            <a:pPr lvl="2" marL="1143000" indent="-228600" defTabSz="914400">
-              <a:lnSpc>
-                <a:spcPct val="90000"/>
-              </a:lnSpc>
-              <a:spcBef>
-                <a:spcPts val="499"/>
-              </a:spcBef>
-              <a:buClr>
-                <a:srgbClr val="000000"/>
-              </a:buClr>
-              <a:buFont typeface="Arial"/>
-              <a:buChar char="•"/>
-            </a:pPr>
-            <a:r>
-              <a:rPr b="0" lang="en-US" sz="2000" strike="noStrike" u="none">
-                <a:solidFill>
-                  <a:schemeClr val="dk1"/>
-                </a:solidFill>
-                <a:effectLst/>
-                <a:uFillTx/>
-                <a:latin typeface="Calibri"/>
-              </a:rPr>
-              <a:t>Third level</a:t>
-            </a:r>
-            <a:endParaRPr b="0" lang="en-US" sz="2000" strike="noStrike" u="none">
-              <a:solidFill>
-                <a:srgbClr val="000000"/>
-              </a:solidFill>
-              <a:effectLst/>
-              <a:uFillTx/>
-              <a:latin typeface="Arial"/>
-            </a:endParaRPr>
-          </a:p>
-          <a:p>
-            <a:pPr lvl="3" marL="1600200" indent="-228600" defTabSz="914400">
-              <a:lnSpc>
-                <a:spcPct val="90000"/>
-              </a:lnSpc>
-              <a:spcBef>
-                <a:spcPts val="499"/>
-              </a:spcBef>
-              <a:buClr>
-                <a:srgbClr val="000000"/>
-              </a:buClr>
-              <a:buFont typeface="Arial"/>
-              <a:buChar char="•"/>
-            </a:pPr>
-            <a:r>
-              <a:rPr b="0" lang="en-US" sz="1800" strike="noStrike" u="none">
-                <a:solidFill>
-                  <a:schemeClr val="dk1"/>
-                </a:solidFill>
-                <a:effectLst/>
-                <a:uFillTx/>
-                <a:latin typeface="Calibri"/>
-              </a:rPr>
-              <a:t>Fourth level</a:t>
-            </a:r>
-            <a:endParaRPr b="0" lang="en-US" sz="1800" strike="noStrike" u="none">
-              <a:solidFill>
-                <a:srgbClr val="000000"/>
-              </a:solidFill>
-              <a:effectLst/>
-              <a:uFillTx/>
-              <a:latin typeface="Arial"/>
-            </a:endParaRPr>
-          </a:p>
-          <a:p>
-            <a:pPr lvl="4" marL="2057400" indent="-228600" defTabSz="914400">
-              <a:lnSpc>
-                <a:spcPct val="90000"/>
-              </a:lnSpc>
-              <a:spcBef>
-                <a:spcPts val="499"/>
-              </a:spcBef>
-              <a:buClr>
-                <a:srgbClr val="000000"/>
-              </a:buClr>
-              <a:buFont typeface="Arial"/>
-              <a:buChar char="•"/>
-            </a:pPr>
-            <a:r>
-              <a:rPr b="0" lang="en-US" sz="1800" strike="noStrike" u="none">
-                <a:solidFill>
-                  <a:schemeClr val="dk1"/>
-                </a:solidFill>
-                <a:effectLst/>
-                <a:uFillTx/>
-                <a:latin typeface="Calibri"/>
-              </a:rPr>
-              <a:t>Fifth level</a:t>
-            </a:r>
-            <a:endParaRPr b="0" lang="en-US" sz="1800" strike="noStrike" u="none">
-              <a:solidFill>
-                <a:srgbClr val="000000"/>
-              </a:solidFill>
-              <a:effectLst/>
-              <a:uFillTx/>
-              <a:latin typeface="Arial"/>
-            </a:endParaRPr>
-          </a:p>
-        </p:txBody>
-      </p:sp>
-      <p:sp>
-        <p:nvSpPr>
-          <p:cNvPr id="20" name="PlaceHolder 4"/>
-          <p:cNvSpPr>
-            <a:spLocks noGrp="1"/>
-          </p:cNvSpPr>
-          <p:nvPr>
-            <p:ph type="dt" idx="10"/>
+            <p:ph type="dt" idx="16"/>
           </p:nvPr>
         </p:nvSpPr>
         <p:spPr>
           <a:xfrm>
             <a:off x="838080" y="6356520"/>
-            <a:ext cx="2737800" cy="359640"/>
+            <a:ext cx="2737440" cy="359280"/>
           </a:xfrm>
           <a:prstGeom prst="rect">
             <a:avLst/>
@@ -3163,7 +3748,7 @@
                 <a:uFillTx/>
                 <a:latin typeface="Calibri"/>
               </a:rPr>
-              <a:t> </a:t>
+              <a:t>&lt;date/time&gt;</a:t>
             </a:r>
             <a:endParaRPr b="0" lang="en-US" sz="1200" strike="noStrike" u="none">
               <a:solidFill>
@@ -3178,18 +3763,18 @@
       </p:sp>
       <p:sp>
         <p:nvSpPr>
-          <p:cNvPr id="21" name="PlaceHolder 5"/>
+          <p:cNvPr id="31" name="PlaceHolder 4"/>
           <p:cNvSpPr>
             <a:spLocks noGrp="1"/>
           </p:cNvSpPr>
           <p:nvPr>
-            <p:ph type="ftr" idx="11"/>
+            <p:ph type="ftr" idx="17"/>
           </p:nvPr>
         </p:nvSpPr>
         <p:spPr>
           <a:xfrm>
             <a:off x="4038480" y="6356520"/>
-            <a:ext cx="4109400" cy="359640"/>
+            <a:ext cx="4109040" cy="359280"/>
           </a:xfrm>
           <a:prstGeom prst="rect">
             <a:avLst/>
@@ -3241,7 +3826,7 @@
                 <a:uFillTx/>
                 <a:latin typeface="Times New Roman"/>
               </a:rPr>
-              <a:t> </a:t>
+              <a:t>&lt;footer&gt;</a:t>
             </a:r>
             <a:endParaRPr b="0" lang="en-US" sz="1400" strike="noStrike" u="none">
               <a:solidFill>
@@ -3256,18 +3841,18 @@
       </p:sp>
       <p:sp>
         <p:nvSpPr>
-          <p:cNvPr id="22" name="PlaceHolder 6"/>
+          <p:cNvPr id="32" name="PlaceHolder 5"/>
           <p:cNvSpPr>
             <a:spLocks noGrp="1"/>
           </p:cNvSpPr>
           <p:nvPr>
-            <p:ph type="sldNum" idx="12"/>
+            <p:ph type="sldNum" idx="18"/>
           </p:nvPr>
         </p:nvSpPr>
         <p:spPr>
           <a:xfrm>
             <a:off x="8610480" y="6356520"/>
-            <a:ext cx="2737800" cy="359640"/>
+            <a:ext cx="2737440" cy="359280"/>
           </a:xfrm>
           <a:prstGeom prst="rect">
             <a:avLst/>
@@ -3312,7 +3897,7 @@
                 <a:tab algn="l" pos="0"/>
               </a:tabLst>
             </a:pPr>
-            <a:fld id="{8DF4B245-4D68-4179-ABA5-C5B2277150A5}" type="slidenum">
+            <a:fld id="{3133B449-7152-4EC2-93D0-41F7BB3D3E15}" type="slidenum">
               <a:rPr b="0" lang="en-US" sz="1200" strike="noStrike" u="none">
                 <a:solidFill>
                   <a:schemeClr val="dk1">
@@ -3323,7 +3908,7 @@
                 <a:uFillTx/>
                 <a:latin typeface="Calibri"/>
               </a:rPr>
-              <a:t>17</a:t>
+              <a:t>&lt;number&gt;</a:t>
             </a:fld>
             <a:endParaRPr b="0" lang="en-US" sz="1200" strike="noStrike" u="none">
               <a:solidFill>
@@ -3341,9 +3926,9 @@
 </p:sldLayout>
 </file>
 
-<file path=ppt/slideLayouts/slideLayout5.xml><?xml version="1.0" encoding="utf-8"?>
-<p:sldLayout xmlns:a="http://schemas.openxmlformats.org/drawingml/2006/main" xmlns:p="http://schemas.openxmlformats.org/presentationml/2006/main" xmlns:r="http://schemas.openxmlformats.org/officeDocument/2006/relationships" xmlns:p14="http://schemas.microsoft.com/office/powerpoint/2010/main" xmlns:p15="http://schemas.microsoft.com/office/powerpoint/2012/main" xmlns:mc="http://schemas.openxmlformats.org/markup-compatibility/2006" type="blank" preserve="1">
-  <p:cSld name="Comparison">
+<file path=ppt/slideLayouts/slideLayout7.xml><?xml version="1.0" encoding="utf-8"?>
+<p:sldLayout xmlns:a="http://schemas.openxmlformats.org/drawingml/2006/main" xmlns:p="http://schemas.openxmlformats.org/presentationml/2006/main" xmlns:r="http://schemas.openxmlformats.org/officeDocument/2006/relationships" xmlns:p14="http://schemas.microsoft.com/office/powerpoint/2010/main" xmlns:p15="http://schemas.microsoft.com/office/powerpoint/2012/main" xmlns:mc="http://schemas.openxmlformats.org/markup-compatibility/2006" type="twoObj" preserve="1">
+  <p:cSld name="Two Content">
     <p:bg>
       <p:bgPr>
         <a:solidFill>
@@ -3367,7 +3952,7 @@
       </p:grpSpPr>
       <p:sp>
         <p:nvSpPr>
-          <p:cNvPr id="23" name="PlaceHolder 1"/>
+          <p:cNvPr id="33" name="PlaceHolder 1"/>
           <p:cNvSpPr>
             <a:spLocks noGrp="1"/>
           </p:cNvSpPr>
@@ -3377,8 +3962,8 @@
         </p:nvSpPr>
         <p:spPr>
           <a:xfrm>
-            <a:off x="839880" y="365040"/>
-            <a:ext cx="10510200" cy="1320120"/>
+            <a:off x="838080" y="365040"/>
+            <a:ext cx="10509840" cy="1319760"/>
           </a:xfrm>
           <a:prstGeom prst="rect">
             <a:avLst/>
@@ -3426,7 +4011,7 @@
       </p:sp>
       <p:sp>
         <p:nvSpPr>
-          <p:cNvPr id="24" name="PlaceHolder 2"/>
+          <p:cNvPr id="34" name="PlaceHolder 2"/>
           <p:cNvSpPr>
             <a:spLocks noGrp="1"/>
           </p:cNvSpPr>
@@ -3436,70 +4021,8 @@
         </p:nvSpPr>
         <p:spPr>
           <a:xfrm>
-            <a:off x="839880" y="1681200"/>
-            <a:ext cx="5152320" cy="818640"/>
-          </a:xfrm>
-          <a:prstGeom prst="rect">
-            <a:avLst/>
-          </a:prstGeom>
-          <a:noFill/>
-          <a:ln w="0">
-            <a:noFill/>
-          </a:ln>
-        </p:spPr>
-        <p:txBody>
-          <a:bodyPr lIns="91440" rIns="91440" tIns="45720" bIns="45720" anchor="b">
-            <a:noAutofit/>
-          </a:bodyPr>
-          <a:p>
-            <a:pPr indent="0" defTabSz="914400">
-              <a:lnSpc>
-                <a:spcPct val="90000"/>
-              </a:lnSpc>
-              <a:spcBef>
-                <a:spcPts val="1001"/>
-              </a:spcBef>
-              <a:buNone/>
-              <a:tabLst>
-                <a:tab algn="l" pos="0"/>
-              </a:tabLst>
-            </a:pPr>
-            <a:r>
-              <a:rPr b="1" lang="en-US" sz="2400" strike="noStrike" u="none">
-                <a:solidFill>
-                  <a:schemeClr val="dk1"/>
-                </a:solidFill>
-                <a:effectLst/>
-                <a:uFillTx/>
-                <a:latin typeface="Calibri"/>
-              </a:rPr>
-              <a:t>Click to edit Master text styles</a:t>
-            </a:r>
-            <a:endParaRPr b="0" lang="en-US" sz="2400" strike="noStrike" u="none">
-              <a:solidFill>
-                <a:srgbClr val="000000"/>
-              </a:solidFill>
-              <a:effectLst/>
-              <a:uFillTx/>
-              <a:latin typeface="Arial"/>
-            </a:endParaRPr>
-          </a:p>
-        </p:txBody>
-      </p:sp>
-      <p:sp>
-        <p:nvSpPr>
-          <p:cNvPr id="25" name="PlaceHolder 3"/>
-          <p:cNvSpPr>
-            <a:spLocks noGrp="1"/>
-          </p:cNvSpPr>
-          <p:nvPr>
-            <p:ph type="body"/>
-          </p:nvPr>
-        </p:nvSpPr>
-        <p:spPr>
-          <a:xfrm>
-            <a:off x="839880" y="2505240"/>
-            <a:ext cx="5152320" cy="3679200"/>
+            <a:off x="838080" y="1825560"/>
+            <a:ext cx="5175720" cy="4345560"/>
           </a:xfrm>
           <a:prstGeom prst="rect">
             <a:avLst/>
@@ -3687,7 +4210,7 @@
       </p:sp>
       <p:sp>
         <p:nvSpPr>
-          <p:cNvPr id="26" name="PlaceHolder 4"/>
+          <p:cNvPr id="35" name="PlaceHolder 3"/>
           <p:cNvSpPr>
             <a:spLocks noGrp="1"/>
           </p:cNvSpPr>
@@ -3697,70 +4220,8 @@
         </p:nvSpPr>
         <p:spPr>
           <a:xfrm>
-            <a:off x="6172200" y="1681200"/>
-            <a:ext cx="5177880" cy="818640"/>
-          </a:xfrm>
-          <a:prstGeom prst="rect">
-            <a:avLst/>
-          </a:prstGeom>
-          <a:noFill/>
-          <a:ln w="0">
-            <a:noFill/>
-          </a:ln>
-        </p:spPr>
-        <p:txBody>
-          <a:bodyPr lIns="91440" rIns="91440" tIns="45720" bIns="45720" anchor="b">
-            <a:noAutofit/>
-          </a:bodyPr>
-          <a:p>
-            <a:pPr indent="0" defTabSz="914400">
-              <a:lnSpc>
-                <a:spcPct val="90000"/>
-              </a:lnSpc>
-              <a:spcBef>
-                <a:spcPts val="1001"/>
-              </a:spcBef>
-              <a:buNone/>
-              <a:tabLst>
-                <a:tab algn="l" pos="0"/>
-              </a:tabLst>
-            </a:pPr>
-            <a:r>
-              <a:rPr b="1" lang="en-US" sz="2400" strike="noStrike" u="none">
-                <a:solidFill>
-                  <a:schemeClr val="dk1"/>
-                </a:solidFill>
-                <a:effectLst/>
-                <a:uFillTx/>
-                <a:latin typeface="Calibri"/>
-              </a:rPr>
-              <a:t>Click to edit Master text styles</a:t>
-            </a:r>
-            <a:endParaRPr b="0" lang="en-US" sz="2400" strike="noStrike" u="none">
-              <a:solidFill>
-                <a:srgbClr val="000000"/>
-              </a:solidFill>
-              <a:effectLst/>
-              <a:uFillTx/>
-              <a:latin typeface="Arial"/>
-            </a:endParaRPr>
-          </a:p>
-        </p:txBody>
-      </p:sp>
-      <p:sp>
-        <p:nvSpPr>
-          <p:cNvPr id="27" name="PlaceHolder 5"/>
-          <p:cNvSpPr>
-            <a:spLocks noGrp="1"/>
-          </p:cNvSpPr>
-          <p:nvPr>
-            <p:ph type="body"/>
-          </p:nvPr>
-        </p:nvSpPr>
-        <p:spPr>
-          <a:xfrm>
-            <a:off x="6172200" y="2505240"/>
-            <a:ext cx="5177880" cy="3679200"/>
+            <a:off x="6172200" y="1825560"/>
+            <a:ext cx="5175720" cy="4345560"/>
           </a:xfrm>
           <a:prstGeom prst="rect">
             <a:avLst/>
@@ -3948,18 +4409,18 @@
       </p:sp>
       <p:sp>
         <p:nvSpPr>
-          <p:cNvPr id="28" name="PlaceHolder 6"/>
+          <p:cNvPr id="36" name="PlaceHolder 4"/>
           <p:cNvSpPr>
             <a:spLocks noGrp="1"/>
           </p:cNvSpPr>
           <p:nvPr>
-            <p:ph type="dt" idx="13"/>
+            <p:ph type="dt" idx="19"/>
           </p:nvPr>
         </p:nvSpPr>
         <p:spPr>
           <a:xfrm>
             <a:off x="838080" y="6356520"/>
-            <a:ext cx="2737800" cy="359640"/>
+            <a:ext cx="2737440" cy="359280"/>
           </a:xfrm>
           <a:prstGeom prst="rect">
             <a:avLst/>
@@ -4015,7 +4476,7 @@
                 <a:uFillTx/>
                 <a:latin typeface="Calibri"/>
               </a:rPr>
-              <a:t> </a:t>
+              <a:t>&lt;date/time&gt;</a:t>
             </a:r>
             <a:endParaRPr b="0" lang="en-US" sz="1200" strike="noStrike" u="none">
               <a:solidFill>
@@ -4030,18 +4491,18 @@
       </p:sp>
       <p:sp>
         <p:nvSpPr>
-          <p:cNvPr id="29" name="PlaceHolder 7"/>
+          <p:cNvPr id="37" name="PlaceHolder 5"/>
           <p:cNvSpPr>
             <a:spLocks noGrp="1"/>
           </p:cNvSpPr>
           <p:nvPr>
-            <p:ph type="ftr" idx="14"/>
+            <p:ph type="ftr" idx="20"/>
           </p:nvPr>
         </p:nvSpPr>
         <p:spPr>
           <a:xfrm>
             <a:off x="4038480" y="6356520"/>
-            <a:ext cx="4109400" cy="359640"/>
+            <a:ext cx="4109040" cy="359280"/>
           </a:xfrm>
           <a:prstGeom prst="rect">
             <a:avLst/>
@@ -4093,7 +4554,7 @@
                 <a:uFillTx/>
                 <a:latin typeface="Times New Roman"/>
               </a:rPr>
-              <a:t> </a:t>
+              <a:t>&lt;footer&gt;</a:t>
             </a:r>
             <a:endParaRPr b="0" lang="en-US" sz="1400" strike="noStrike" u="none">
               <a:solidFill>
@@ -4108,18 +4569,18 @@
       </p:sp>
       <p:sp>
         <p:nvSpPr>
-          <p:cNvPr id="30" name="PlaceHolder 8"/>
+          <p:cNvPr id="38" name="PlaceHolder 6"/>
           <p:cNvSpPr>
             <a:spLocks noGrp="1"/>
           </p:cNvSpPr>
           <p:nvPr>
-            <p:ph type="sldNum" idx="15"/>
+            <p:ph type="sldNum" idx="21"/>
           </p:nvPr>
         </p:nvSpPr>
         <p:spPr>
           <a:xfrm>
             <a:off x="8610480" y="6356520"/>
-            <a:ext cx="2737800" cy="359640"/>
+            <a:ext cx="2737440" cy="359280"/>
           </a:xfrm>
           <a:prstGeom prst="rect">
             <a:avLst/>
@@ -4164,7 +4625,7 @@
                 <a:tab algn="l" pos="0"/>
               </a:tabLst>
             </a:pPr>
-            <a:fld id="{99C844AE-607B-4547-AADF-4C177E1DB85D}" type="slidenum">
+            <a:fld id="{CDC78F77-C9D4-4BBF-906B-6F951A8BBDDA}" type="slidenum">
               <a:rPr b="0" lang="en-US" sz="1200" strike="noStrike" u="none">
                 <a:solidFill>
                   <a:schemeClr val="dk1">
@@ -4175,7 +4636,7 @@
                 <a:uFillTx/>
                 <a:latin typeface="Calibri"/>
               </a:rPr>
-              <a:t>17</a:t>
+              <a:t>&lt;number&gt;</a:t>
             </a:fld>
             <a:endParaRPr b="0" lang="en-US" sz="1200" strike="noStrike" u="none">
               <a:solidFill>
@@ -4193,9 +4654,9 @@
 </p:sldLayout>
 </file>
 
-<file path=ppt/slideLayouts/slideLayout6.xml><?xml version="1.0" encoding="utf-8"?>
-<p:sldLayout xmlns:a="http://schemas.openxmlformats.org/drawingml/2006/main" xmlns:p="http://schemas.openxmlformats.org/presentationml/2006/main" xmlns:r="http://schemas.openxmlformats.org/officeDocument/2006/relationships" xmlns:p14="http://schemas.microsoft.com/office/powerpoint/2010/main" xmlns:p15="http://schemas.microsoft.com/office/powerpoint/2012/main" xmlns:mc="http://schemas.openxmlformats.org/markup-compatibility/2006" type="titleOnly" preserve="1">
-  <p:cSld name="Title Only">
+<file path=ppt/slideLayouts/slideLayout8.xml><?xml version="1.0" encoding="utf-8"?>
+<p:sldLayout xmlns:a="http://schemas.openxmlformats.org/drawingml/2006/main" xmlns:p="http://schemas.openxmlformats.org/presentationml/2006/main" xmlns:r="http://schemas.openxmlformats.org/officeDocument/2006/relationships" xmlns:p14="http://schemas.microsoft.com/office/powerpoint/2010/main" xmlns:p15="http://schemas.microsoft.com/office/powerpoint/2012/main" xmlns:mc="http://schemas.openxmlformats.org/markup-compatibility/2006" type="blank" preserve="1">
+  <p:cSld name="Comparison">
     <p:bg>
       <p:bgPr>
         <a:solidFill>
@@ -4219,7 +4680,7 @@
       </p:grpSpPr>
       <p:sp>
         <p:nvSpPr>
-          <p:cNvPr id="31" name="PlaceHolder 1"/>
+          <p:cNvPr id="39" name="PlaceHolder 1"/>
           <p:cNvSpPr>
             <a:spLocks noGrp="1"/>
           </p:cNvSpPr>
@@ -4229,8 +4690,8 @@
         </p:nvSpPr>
         <p:spPr>
           <a:xfrm>
-            <a:off x="838080" y="365040"/>
-            <a:ext cx="10510200" cy="1320120"/>
+            <a:off x="839880" y="365040"/>
+            <a:ext cx="10509840" cy="1319760"/>
           </a:xfrm>
           <a:prstGeom prst="rect">
             <a:avLst/>
@@ -4278,18 +4739,540 @@
       </p:sp>
       <p:sp>
         <p:nvSpPr>
-          <p:cNvPr id="32" name="PlaceHolder 2"/>
+          <p:cNvPr id="40" name="PlaceHolder 2"/>
           <p:cNvSpPr>
             <a:spLocks noGrp="1"/>
           </p:cNvSpPr>
           <p:nvPr>
-            <p:ph type="dt" idx="16"/>
+            <p:ph type="body"/>
+          </p:nvPr>
+        </p:nvSpPr>
+        <p:spPr>
+          <a:xfrm>
+            <a:off x="839880" y="1681200"/>
+            <a:ext cx="5151960" cy="818280"/>
+          </a:xfrm>
+          <a:prstGeom prst="rect">
+            <a:avLst/>
+          </a:prstGeom>
+          <a:noFill/>
+          <a:ln w="0">
+            <a:noFill/>
+          </a:ln>
+        </p:spPr>
+        <p:txBody>
+          <a:bodyPr lIns="91440" rIns="91440" tIns="45720" bIns="45720" anchor="b">
+            <a:noAutofit/>
+          </a:bodyPr>
+          <a:p>
+            <a:pPr indent="0" defTabSz="914400">
+              <a:lnSpc>
+                <a:spcPct val="90000"/>
+              </a:lnSpc>
+              <a:spcBef>
+                <a:spcPts val="1001"/>
+              </a:spcBef>
+              <a:buNone/>
+              <a:tabLst>
+                <a:tab algn="l" pos="0"/>
+              </a:tabLst>
+            </a:pPr>
+            <a:r>
+              <a:rPr b="1" lang="en-US" sz="2400" strike="noStrike" u="none">
+                <a:solidFill>
+                  <a:schemeClr val="dk1"/>
+                </a:solidFill>
+                <a:effectLst/>
+                <a:uFillTx/>
+                <a:latin typeface="Calibri"/>
+              </a:rPr>
+              <a:t>Click to edit Master text styles</a:t>
+            </a:r>
+            <a:endParaRPr b="0" lang="en-US" sz="2400" strike="noStrike" u="none">
+              <a:solidFill>
+                <a:srgbClr val="000000"/>
+              </a:solidFill>
+              <a:effectLst/>
+              <a:uFillTx/>
+              <a:latin typeface="Arial"/>
+            </a:endParaRPr>
+          </a:p>
+        </p:txBody>
+      </p:sp>
+      <p:sp>
+        <p:nvSpPr>
+          <p:cNvPr id="41" name="PlaceHolder 3"/>
+          <p:cNvSpPr>
+            <a:spLocks noGrp="1"/>
+          </p:cNvSpPr>
+          <p:nvPr>
+            <p:ph type="body"/>
+          </p:nvPr>
+        </p:nvSpPr>
+        <p:spPr>
+          <a:xfrm>
+            <a:off x="839880" y="2505240"/>
+            <a:ext cx="5151960" cy="3678840"/>
+          </a:xfrm>
+          <a:prstGeom prst="rect">
+            <a:avLst/>
+          </a:prstGeom>
+          <a:noFill/>
+          <a:ln w="0">
+            <a:noFill/>
+          </a:ln>
+        </p:spPr>
+        <p:txBody>
+          <a:bodyPr lIns="91440" rIns="91440" tIns="45720" bIns="45720" anchor="t">
+            <a:noAutofit/>
+          </a:bodyPr>
+          <a:p>
+            <a:pPr marL="228600" indent="-228600" defTabSz="914400">
+              <a:lnSpc>
+                <a:spcPct val="90000"/>
+              </a:lnSpc>
+              <a:spcBef>
+                <a:spcPts val="1001"/>
+              </a:spcBef>
+              <a:buClr>
+                <a:srgbClr val="000000"/>
+              </a:buClr>
+              <a:buFont typeface="Arial"/>
+              <a:buChar char="•"/>
+            </a:pPr>
+            <a:r>
+              <a:rPr b="0" lang="en-US" sz="2800" strike="noStrike" u="none">
+                <a:solidFill>
+                  <a:schemeClr val="dk1"/>
+                </a:solidFill>
+                <a:effectLst/>
+                <a:uFillTx/>
+                <a:latin typeface="Calibri"/>
+              </a:rPr>
+              <a:t>Click to edit Master text styles</a:t>
+            </a:r>
+            <a:endParaRPr b="0" lang="en-US" sz="2800" strike="noStrike" u="none">
+              <a:solidFill>
+                <a:srgbClr val="000000"/>
+              </a:solidFill>
+              <a:effectLst/>
+              <a:uFillTx/>
+              <a:latin typeface="Arial"/>
+            </a:endParaRPr>
+          </a:p>
+          <a:p>
+            <a:pPr lvl="1" marL="685800" indent="-228600" defTabSz="914400">
+              <a:lnSpc>
+                <a:spcPct val="90000"/>
+              </a:lnSpc>
+              <a:spcBef>
+                <a:spcPts val="499"/>
+              </a:spcBef>
+              <a:buClr>
+                <a:srgbClr val="000000"/>
+              </a:buClr>
+              <a:buFont typeface="Arial"/>
+              <a:buChar char="•"/>
+            </a:pPr>
+            <a:r>
+              <a:rPr b="0" lang="en-US" sz="2400" strike="noStrike" u="none">
+                <a:solidFill>
+                  <a:schemeClr val="dk1"/>
+                </a:solidFill>
+                <a:effectLst/>
+                <a:uFillTx/>
+                <a:latin typeface="Calibri"/>
+              </a:rPr>
+              <a:t>Second level</a:t>
+            </a:r>
+            <a:endParaRPr b="0" lang="en-US" sz="2400" strike="noStrike" u="none">
+              <a:solidFill>
+                <a:srgbClr val="000000"/>
+              </a:solidFill>
+              <a:effectLst/>
+              <a:uFillTx/>
+              <a:latin typeface="Arial"/>
+            </a:endParaRPr>
+          </a:p>
+          <a:p>
+            <a:pPr lvl="2" marL="1143000" indent="-228600" defTabSz="914400">
+              <a:lnSpc>
+                <a:spcPct val="90000"/>
+              </a:lnSpc>
+              <a:spcBef>
+                <a:spcPts val="499"/>
+              </a:spcBef>
+              <a:buClr>
+                <a:srgbClr val="000000"/>
+              </a:buClr>
+              <a:buFont typeface="Arial"/>
+              <a:buChar char="•"/>
+            </a:pPr>
+            <a:r>
+              <a:rPr b="0" lang="en-US" sz="2000" strike="noStrike" u="none">
+                <a:solidFill>
+                  <a:schemeClr val="dk1"/>
+                </a:solidFill>
+                <a:effectLst/>
+                <a:uFillTx/>
+                <a:latin typeface="Calibri"/>
+              </a:rPr>
+              <a:t>Third level</a:t>
+            </a:r>
+            <a:endParaRPr b="0" lang="en-US" sz="2000" strike="noStrike" u="none">
+              <a:solidFill>
+                <a:srgbClr val="000000"/>
+              </a:solidFill>
+              <a:effectLst/>
+              <a:uFillTx/>
+              <a:latin typeface="Arial"/>
+            </a:endParaRPr>
+          </a:p>
+          <a:p>
+            <a:pPr lvl="3" marL="1600200" indent="-228600" defTabSz="914400">
+              <a:lnSpc>
+                <a:spcPct val="90000"/>
+              </a:lnSpc>
+              <a:spcBef>
+                <a:spcPts val="499"/>
+              </a:spcBef>
+              <a:buClr>
+                <a:srgbClr val="000000"/>
+              </a:buClr>
+              <a:buFont typeface="Arial"/>
+              <a:buChar char="•"/>
+            </a:pPr>
+            <a:r>
+              <a:rPr b="0" lang="en-US" sz="1800" strike="noStrike" u="none">
+                <a:solidFill>
+                  <a:schemeClr val="dk1"/>
+                </a:solidFill>
+                <a:effectLst/>
+                <a:uFillTx/>
+                <a:latin typeface="Calibri"/>
+              </a:rPr>
+              <a:t>Fourth level</a:t>
+            </a:r>
+            <a:endParaRPr b="0" lang="en-US" sz="1800" strike="noStrike" u="none">
+              <a:solidFill>
+                <a:srgbClr val="000000"/>
+              </a:solidFill>
+              <a:effectLst/>
+              <a:uFillTx/>
+              <a:latin typeface="Arial"/>
+            </a:endParaRPr>
+          </a:p>
+          <a:p>
+            <a:pPr lvl="4" marL="2057400" indent="-228600" defTabSz="914400">
+              <a:lnSpc>
+                <a:spcPct val="90000"/>
+              </a:lnSpc>
+              <a:spcBef>
+                <a:spcPts val="499"/>
+              </a:spcBef>
+              <a:buClr>
+                <a:srgbClr val="000000"/>
+              </a:buClr>
+              <a:buFont typeface="Arial"/>
+              <a:buChar char="•"/>
+            </a:pPr>
+            <a:r>
+              <a:rPr b="0" lang="en-US" sz="1800" strike="noStrike" u="none">
+                <a:solidFill>
+                  <a:schemeClr val="dk1"/>
+                </a:solidFill>
+                <a:effectLst/>
+                <a:uFillTx/>
+                <a:latin typeface="Calibri"/>
+              </a:rPr>
+              <a:t>Fifth level</a:t>
+            </a:r>
+            <a:endParaRPr b="0" lang="en-US" sz="1800" strike="noStrike" u="none">
+              <a:solidFill>
+                <a:srgbClr val="000000"/>
+              </a:solidFill>
+              <a:effectLst/>
+              <a:uFillTx/>
+              <a:latin typeface="Arial"/>
+            </a:endParaRPr>
+          </a:p>
+        </p:txBody>
+      </p:sp>
+      <p:sp>
+        <p:nvSpPr>
+          <p:cNvPr id="42" name="PlaceHolder 4"/>
+          <p:cNvSpPr>
+            <a:spLocks noGrp="1"/>
+          </p:cNvSpPr>
+          <p:nvPr>
+            <p:ph type="body"/>
+          </p:nvPr>
+        </p:nvSpPr>
+        <p:spPr>
+          <a:xfrm>
+            <a:off x="6172200" y="1681200"/>
+            <a:ext cx="5177520" cy="818280"/>
+          </a:xfrm>
+          <a:prstGeom prst="rect">
+            <a:avLst/>
+          </a:prstGeom>
+          <a:noFill/>
+          <a:ln w="0">
+            <a:noFill/>
+          </a:ln>
+        </p:spPr>
+        <p:txBody>
+          <a:bodyPr lIns="91440" rIns="91440" tIns="45720" bIns="45720" anchor="b">
+            <a:noAutofit/>
+          </a:bodyPr>
+          <a:p>
+            <a:pPr indent="0" defTabSz="914400">
+              <a:lnSpc>
+                <a:spcPct val="90000"/>
+              </a:lnSpc>
+              <a:spcBef>
+                <a:spcPts val="1001"/>
+              </a:spcBef>
+              <a:buNone/>
+              <a:tabLst>
+                <a:tab algn="l" pos="0"/>
+              </a:tabLst>
+            </a:pPr>
+            <a:r>
+              <a:rPr b="1" lang="en-US" sz="2400" strike="noStrike" u="none">
+                <a:solidFill>
+                  <a:schemeClr val="dk1"/>
+                </a:solidFill>
+                <a:effectLst/>
+                <a:uFillTx/>
+                <a:latin typeface="Calibri"/>
+              </a:rPr>
+              <a:t>Click to edit Master text styles</a:t>
+            </a:r>
+            <a:endParaRPr b="0" lang="en-US" sz="2400" strike="noStrike" u="none">
+              <a:solidFill>
+                <a:srgbClr val="000000"/>
+              </a:solidFill>
+              <a:effectLst/>
+              <a:uFillTx/>
+              <a:latin typeface="Arial"/>
+            </a:endParaRPr>
+          </a:p>
+        </p:txBody>
+      </p:sp>
+      <p:sp>
+        <p:nvSpPr>
+          <p:cNvPr id="43" name="PlaceHolder 5"/>
+          <p:cNvSpPr>
+            <a:spLocks noGrp="1"/>
+          </p:cNvSpPr>
+          <p:nvPr>
+            <p:ph type="body"/>
+          </p:nvPr>
+        </p:nvSpPr>
+        <p:spPr>
+          <a:xfrm>
+            <a:off x="6172200" y="2505240"/>
+            <a:ext cx="5177520" cy="3678840"/>
+          </a:xfrm>
+          <a:prstGeom prst="rect">
+            <a:avLst/>
+          </a:prstGeom>
+          <a:noFill/>
+          <a:ln w="0">
+            <a:noFill/>
+          </a:ln>
+        </p:spPr>
+        <p:txBody>
+          <a:bodyPr lIns="91440" rIns="91440" tIns="45720" bIns="45720" anchor="t">
+            <a:noAutofit/>
+          </a:bodyPr>
+          <a:p>
+            <a:pPr marL="228600" indent="-228600" defTabSz="914400">
+              <a:lnSpc>
+                <a:spcPct val="90000"/>
+              </a:lnSpc>
+              <a:spcBef>
+                <a:spcPts val="1001"/>
+              </a:spcBef>
+              <a:buClr>
+                <a:srgbClr val="000000"/>
+              </a:buClr>
+              <a:buFont typeface="Arial"/>
+              <a:buChar char="•"/>
+            </a:pPr>
+            <a:r>
+              <a:rPr b="0" lang="en-US" sz="2800" strike="noStrike" u="none">
+                <a:solidFill>
+                  <a:schemeClr val="dk1"/>
+                </a:solidFill>
+                <a:effectLst/>
+                <a:uFillTx/>
+                <a:latin typeface="Calibri"/>
+              </a:rPr>
+              <a:t>Click to edit Master text styles</a:t>
+            </a:r>
+            <a:endParaRPr b="0" lang="en-US" sz="2800" strike="noStrike" u="none">
+              <a:solidFill>
+                <a:srgbClr val="000000"/>
+              </a:solidFill>
+              <a:effectLst/>
+              <a:uFillTx/>
+              <a:latin typeface="Arial"/>
+            </a:endParaRPr>
+          </a:p>
+          <a:p>
+            <a:pPr lvl="1" marL="685800" indent="-228600" defTabSz="914400">
+              <a:lnSpc>
+                <a:spcPct val="90000"/>
+              </a:lnSpc>
+              <a:spcBef>
+                <a:spcPts val="499"/>
+              </a:spcBef>
+              <a:buClr>
+                <a:srgbClr val="000000"/>
+              </a:buClr>
+              <a:buFont typeface="Arial"/>
+              <a:buChar char="•"/>
+            </a:pPr>
+            <a:r>
+              <a:rPr b="0" lang="en-US" sz="2400" strike="noStrike" u="none">
+                <a:solidFill>
+                  <a:schemeClr val="dk1"/>
+                </a:solidFill>
+                <a:effectLst/>
+                <a:uFillTx/>
+                <a:latin typeface="Calibri"/>
+              </a:rPr>
+              <a:t>Second level</a:t>
+            </a:r>
+            <a:endParaRPr b="0" lang="en-US" sz="2400" strike="noStrike" u="none">
+              <a:solidFill>
+                <a:srgbClr val="000000"/>
+              </a:solidFill>
+              <a:effectLst/>
+              <a:uFillTx/>
+              <a:latin typeface="Arial"/>
+            </a:endParaRPr>
+          </a:p>
+          <a:p>
+            <a:pPr lvl="2" marL="1143000" indent="-228600" defTabSz="914400">
+              <a:lnSpc>
+                <a:spcPct val="90000"/>
+              </a:lnSpc>
+              <a:spcBef>
+                <a:spcPts val="499"/>
+              </a:spcBef>
+              <a:buClr>
+                <a:srgbClr val="000000"/>
+              </a:buClr>
+              <a:buFont typeface="Arial"/>
+              <a:buChar char="•"/>
+            </a:pPr>
+            <a:r>
+              <a:rPr b="0" lang="en-US" sz="2000" strike="noStrike" u="none">
+                <a:solidFill>
+                  <a:schemeClr val="dk1"/>
+                </a:solidFill>
+                <a:effectLst/>
+                <a:uFillTx/>
+                <a:latin typeface="Calibri"/>
+              </a:rPr>
+              <a:t>Third level</a:t>
+            </a:r>
+            <a:endParaRPr b="0" lang="en-US" sz="2000" strike="noStrike" u="none">
+              <a:solidFill>
+                <a:srgbClr val="000000"/>
+              </a:solidFill>
+              <a:effectLst/>
+              <a:uFillTx/>
+              <a:latin typeface="Arial"/>
+            </a:endParaRPr>
+          </a:p>
+          <a:p>
+            <a:pPr lvl="3" marL="1600200" indent="-228600" defTabSz="914400">
+              <a:lnSpc>
+                <a:spcPct val="90000"/>
+              </a:lnSpc>
+              <a:spcBef>
+                <a:spcPts val="499"/>
+              </a:spcBef>
+              <a:buClr>
+                <a:srgbClr val="000000"/>
+              </a:buClr>
+              <a:buFont typeface="Arial"/>
+              <a:buChar char="•"/>
+            </a:pPr>
+            <a:r>
+              <a:rPr b="0" lang="en-US" sz="1800" strike="noStrike" u="none">
+                <a:solidFill>
+                  <a:schemeClr val="dk1"/>
+                </a:solidFill>
+                <a:effectLst/>
+                <a:uFillTx/>
+                <a:latin typeface="Calibri"/>
+              </a:rPr>
+              <a:t>Fourth level</a:t>
+            </a:r>
+            <a:endParaRPr b="0" lang="en-US" sz="1800" strike="noStrike" u="none">
+              <a:solidFill>
+                <a:srgbClr val="000000"/>
+              </a:solidFill>
+              <a:effectLst/>
+              <a:uFillTx/>
+              <a:latin typeface="Arial"/>
+            </a:endParaRPr>
+          </a:p>
+          <a:p>
+            <a:pPr lvl="4" marL="2057400" indent="-228600" defTabSz="914400">
+              <a:lnSpc>
+                <a:spcPct val="90000"/>
+              </a:lnSpc>
+              <a:spcBef>
+                <a:spcPts val="499"/>
+              </a:spcBef>
+              <a:buClr>
+                <a:srgbClr val="000000"/>
+              </a:buClr>
+              <a:buFont typeface="Arial"/>
+              <a:buChar char="•"/>
+            </a:pPr>
+            <a:r>
+              <a:rPr b="0" lang="en-US" sz="1800" strike="noStrike" u="none">
+                <a:solidFill>
+                  <a:schemeClr val="dk1"/>
+                </a:solidFill>
+                <a:effectLst/>
+                <a:uFillTx/>
+                <a:latin typeface="Calibri"/>
+              </a:rPr>
+              <a:t>Fifth level</a:t>
+            </a:r>
+            <a:endParaRPr b="0" lang="en-US" sz="1800" strike="noStrike" u="none">
+              <a:solidFill>
+                <a:srgbClr val="000000"/>
+              </a:solidFill>
+              <a:effectLst/>
+              <a:uFillTx/>
+              <a:latin typeface="Arial"/>
+            </a:endParaRPr>
+          </a:p>
+        </p:txBody>
+      </p:sp>
+      <p:sp>
+        <p:nvSpPr>
+          <p:cNvPr id="44" name="PlaceHolder 6"/>
+          <p:cNvSpPr>
+            <a:spLocks noGrp="1"/>
+          </p:cNvSpPr>
+          <p:nvPr>
+            <p:ph type="dt" idx="22"/>
           </p:nvPr>
         </p:nvSpPr>
         <p:spPr>
           <a:xfrm>
             <a:off x="838080" y="6356520"/>
-            <a:ext cx="2737800" cy="359640"/>
+            <a:ext cx="2737440" cy="359280"/>
           </a:xfrm>
           <a:prstGeom prst="rect">
             <a:avLst/>
@@ -4345,7 +5328,7 @@
                 <a:uFillTx/>
                 <a:latin typeface="Calibri"/>
               </a:rPr>
-              <a:t> </a:t>
+              <a:t>&lt;date/time&gt;</a:t>
             </a:r>
             <a:endParaRPr b="0" lang="en-US" sz="1200" strike="noStrike" u="none">
               <a:solidFill>
@@ -4360,18 +5343,18 @@
       </p:sp>
       <p:sp>
         <p:nvSpPr>
-          <p:cNvPr id="33" name="PlaceHolder 3"/>
+          <p:cNvPr id="45" name="PlaceHolder 7"/>
           <p:cNvSpPr>
             <a:spLocks noGrp="1"/>
           </p:cNvSpPr>
           <p:nvPr>
-            <p:ph type="ftr" idx="17"/>
+            <p:ph type="ftr" idx="23"/>
           </p:nvPr>
         </p:nvSpPr>
         <p:spPr>
           <a:xfrm>
             <a:off x="4038480" y="6356520"/>
-            <a:ext cx="4109400" cy="359640"/>
+            <a:ext cx="4109040" cy="359280"/>
           </a:xfrm>
           <a:prstGeom prst="rect">
             <a:avLst/>
@@ -4423,7 +5406,7 @@
                 <a:uFillTx/>
                 <a:latin typeface="Times New Roman"/>
               </a:rPr>
-              <a:t> </a:t>
+              <a:t>&lt;footer&gt;</a:t>
             </a:r>
             <a:endParaRPr b="0" lang="en-US" sz="1400" strike="noStrike" u="none">
               <a:solidFill>
@@ -4438,18 +5421,18 @@
       </p:sp>
       <p:sp>
         <p:nvSpPr>
-          <p:cNvPr id="34" name="PlaceHolder 4"/>
+          <p:cNvPr id="46" name="PlaceHolder 8"/>
           <p:cNvSpPr>
             <a:spLocks noGrp="1"/>
           </p:cNvSpPr>
           <p:nvPr>
-            <p:ph type="sldNum" idx="18"/>
+            <p:ph type="sldNum" idx="24"/>
           </p:nvPr>
         </p:nvSpPr>
         <p:spPr>
           <a:xfrm>
             <a:off x="8610480" y="6356520"/>
-            <a:ext cx="2737800" cy="359640"/>
+            <a:ext cx="2737440" cy="359280"/>
           </a:xfrm>
           <a:prstGeom prst="rect">
             <a:avLst/>
@@ -4494,7 +5477,7 @@
                 <a:tab algn="l" pos="0"/>
               </a:tabLst>
             </a:pPr>
-            <a:fld id="{0B241D09-874F-452F-B76F-99DE85B87AE7}" type="slidenum">
+            <a:fld id="{95DFA841-1AED-4CB5-9FF9-929303B04254}" type="slidenum">
               <a:rPr b="0" lang="en-US" sz="1200" strike="noStrike" u="none">
                 <a:solidFill>
                   <a:schemeClr val="dk1">
@@ -4505,7 +5488,7 @@
                 <a:uFillTx/>
                 <a:latin typeface="Calibri"/>
               </a:rPr>
-              <a:t>17</a:t>
+              <a:t>&lt;number&gt;</a:t>
             </a:fld>
             <a:endParaRPr b="0" lang="en-US" sz="1200" strike="noStrike" u="none">
               <a:solidFill>
@@ -4523,9 +5506,9 @@
 </p:sldLayout>
 </file>
 
-<file path=ppt/slideLayouts/slideLayout7.xml><?xml version="1.0" encoding="utf-8"?>
-<p:sldLayout xmlns:a="http://schemas.openxmlformats.org/drawingml/2006/main" xmlns:p="http://schemas.openxmlformats.org/presentationml/2006/main" xmlns:r="http://schemas.openxmlformats.org/officeDocument/2006/relationships" xmlns:p14="http://schemas.microsoft.com/office/powerpoint/2010/main" xmlns:p15="http://schemas.microsoft.com/office/powerpoint/2012/main" xmlns:mc="http://schemas.openxmlformats.org/markup-compatibility/2006" type="blank" preserve="1">
-  <p:cSld name="Blank">
+<file path=ppt/slideLayouts/slideLayout9.xml><?xml version="1.0" encoding="utf-8"?>
+<p:sldLayout xmlns:a="http://schemas.openxmlformats.org/drawingml/2006/main" xmlns:p="http://schemas.openxmlformats.org/presentationml/2006/main" xmlns:r="http://schemas.openxmlformats.org/officeDocument/2006/relationships" xmlns:p14="http://schemas.microsoft.com/office/powerpoint/2010/main" xmlns:p15="http://schemas.microsoft.com/office/powerpoint/2012/main" xmlns:mc="http://schemas.openxmlformats.org/markup-compatibility/2006" type="titleOnly" preserve="1">
+  <p:cSld name="Title Only">
     <p:bg>
       <p:bgPr>
         <a:solidFill>
@@ -4549,18 +5532,77 @@
       </p:grpSpPr>
       <p:sp>
         <p:nvSpPr>
-          <p:cNvPr id="35" name="PlaceHolder 1"/>
+          <p:cNvPr id="47" name="PlaceHolder 1"/>
           <p:cNvSpPr>
             <a:spLocks noGrp="1"/>
           </p:cNvSpPr>
           <p:nvPr>
-            <p:ph type="dt" idx="19"/>
+            <p:ph type="title"/>
+          </p:nvPr>
+        </p:nvSpPr>
+        <p:spPr>
+          <a:xfrm>
+            <a:off x="838080" y="365040"/>
+            <a:ext cx="10509840" cy="1319760"/>
+          </a:xfrm>
+          <a:prstGeom prst="rect">
+            <a:avLst/>
+          </a:prstGeom>
+          <a:noFill/>
+          <a:ln w="0">
+            <a:noFill/>
+          </a:ln>
+        </p:spPr>
+        <p:txBody>
+          <a:bodyPr lIns="91440" rIns="91440" tIns="45720" bIns="45720" anchor="ctr">
+            <a:noAutofit/>
+          </a:bodyPr>
+          <a:p>
+            <a:pPr indent="0" defTabSz="914400">
+              <a:lnSpc>
+                <a:spcPct val="90000"/>
+              </a:lnSpc>
+              <a:buNone/>
+              <a:tabLst>
+                <a:tab algn="l" pos="0"/>
+              </a:tabLst>
+            </a:pPr>
+            <a:r>
+              <a:rPr b="0" lang="en-US" sz="4400" strike="noStrike" u="none">
+                <a:solidFill>
+                  <a:schemeClr val="dk1"/>
+                </a:solidFill>
+                <a:effectLst/>
+                <a:uFillTx/>
+                <a:latin typeface="Calibri Light"/>
+              </a:rPr>
+              <a:t>Click to edit Master title style</a:t>
+            </a:r>
+            <a:endParaRPr b="0" lang="en-US" sz="4400" strike="noStrike" u="none">
+              <a:solidFill>
+                <a:srgbClr val="000000"/>
+              </a:solidFill>
+              <a:effectLst/>
+              <a:uFillTx/>
+              <a:latin typeface="Arial"/>
+            </a:endParaRPr>
+          </a:p>
+        </p:txBody>
+      </p:sp>
+      <p:sp>
+        <p:nvSpPr>
+          <p:cNvPr id="48" name="PlaceHolder 2"/>
+          <p:cNvSpPr>
+            <a:spLocks noGrp="1"/>
+          </p:cNvSpPr>
+          <p:nvPr>
+            <p:ph type="dt" idx="25"/>
           </p:nvPr>
         </p:nvSpPr>
         <p:spPr>
           <a:xfrm>
             <a:off x="838080" y="6356520"/>
-            <a:ext cx="2737800" cy="359640"/>
+            <a:ext cx="2737440" cy="359280"/>
           </a:xfrm>
           <a:prstGeom prst="rect">
             <a:avLst/>
@@ -4616,7 +5658,7 @@
                 <a:uFillTx/>
                 <a:latin typeface="Calibri"/>
               </a:rPr>
-              <a:t> </a:t>
+              <a:t>&lt;date/time&gt;</a:t>
             </a:r>
             <a:endParaRPr b="0" lang="en-US" sz="1200" strike="noStrike" u="none">
               <a:solidFill>
@@ -4631,18 +5673,18 @@
       </p:sp>
       <p:sp>
         <p:nvSpPr>
-          <p:cNvPr id="36" name="PlaceHolder 2"/>
+          <p:cNvPr id="49" name="PlaceHolder 3"/>
           <p:cNvSpPr>
             <a:spLocks noGrp="1"/>
           </p:cNvSpPr>
           <p:nvPr>
-            <p:ph type="ftr" idx="20"/>
+            <p:ph type="ftr" idx="26"/>
           </p:nvPr>
         </p:nvSpPr>
         <p:spPr>
           <a:xfrm>
             <a:off x="4038480" y="6356520"/>
-            <a:ext cx="4109400" cy="359640"/>
+            <a:ext cx="4109040" cy="359280"/>
           </a:xfrm>
           <a:prstGeom prst="rect">
             <a:avLst/>
@@ -4694,7 +5736,7 @@
                 <a:uFillTx/>
                 <a:latin typeface="Times New Roman"/>
               </a:rPr>
-              <a:t> </a:t>
+              <a:t>&lt;footer&gt;</a:t>
             </a:r>
             <a:endParaRPr b="0" lang="en-US" sz="1400" strike="noStrike" u="none">
               <a:solidFill>
@@ -4709,18 +5751,18 @@
       </p:sp>
       <p:sp>
         <p:nvSpPr>
-          <p:cNvPr id="37" name="PlaceHolder 3"/>
+          <p:cNvPr id="50" name="PlaceHolder 4"/>
           <p:cNvSpPr>
             <a:spLocks noGrp="1"/>
           </p:cNvSpPr>
           <p:nvPr>
-            <p:ph type="sldNum" idx="21"/>
+            <p:ph type="sldNum" idx="27"/>
           </p:nvPr>
         </p:nvSpPr>
         <p:spPr>
           <a:xfrm>
             <a:off x="8610480" y="6356520"/>
-            <a:ext cx="2737800" cy="359640"/>
+            <a:ext cx="2737440" cy="359280"/>
           </a:xfrm>
           <a:prstGeom prst="rect">
             <a:avLst/>
@@ -4765,7 +5807,7 @@
                 <a:tab algn="l" pos="0"/>
               </a:tabLst>
             </a:pPr>
-            <a:fld id="{7944FB14-3C5B-4703-BA3B-76531A8A321D}" type="slidenum">
+            <a:fld id="{634D73F2-00ED-4814-8494-680F03E76482}" type="slidenum">
               <a:rPr b="0" lang="en-US" sz="1200" strike="noStrike" u="none">
                 <a:solidFill>
                   <a:schemeClr val="dk1">
@@ -4776,1049 +5818,7 @@
                 <a:uFillTx/>
                 <a:latin typeface="Calibri"/>
               </a:rPr>
-              <a:t>17</a:t>
-            </a:fld>
-            <a:endParaRPr b="0" lang="en-US" sz="1200" strike="noStrike" u="none">
-              <a:solidFill>
-                <a:srgbClr val="000000"/>
-              </a:solidFill>
-              <a:effectLst/>
-              <a:uFillTx/>
-              <a:latin typeface="Times New Roman"/>
-            </a:endParaRPr>
-          </a:p>
-        </p:txBody>
-      </p:sp>
-    </p:spTree>
-  </p:cSld>
-</p:sldLayout>
-</file>
-
-<file path=ppt/slideLayouts/slideLayout8.xml><?xml version="1.0" encoding="utf-8"?>
-<p:sldLayout xmlns:a="http://schemas.openxmlformats.org/drawingml/2006/main" xmlns:p="http://schemas.openxmlformats.org/presentationml/2006/main" xmlns:r="http://schemas.openxmlformats.org/officeDocument/2006/relationships" xmlns:p14="http://schemas.microsoft.com/office/powerpoint/2010/main" xmlns:p15="http://schemas.microsoft.com/office/powerpoint/2012/main" xmlns:mc="http://schemas.openxmlformats.org/markup-compatibility/2006" type="blank" preserve="1">
-  <p:cSld name="Content with Caption">
-    <p:bg>
-      <p:bgPr>
-        <a:solidFill>
-          <a:srgbClr val="ffffff"/>
-        </a:solidFill>
-      </p:bgPr>
-    </p:bg>
-    <p:spTree>
-      <p:nvGrpSpPr>
-        <p:cNvPr id="1" name=""/>
-        <p:cNvGrpSpPr/>
-        <p:nvPr/>
-      </p:nvGrpSpPr>
-      <p:grpSpPr>
-        <a:xfrm>
-          <a:off x="0" y="0"/>
-          <a:ext cx="0" cy="0"/>
-          <a:chOff x="0" y="0"/>
-          <a:chExt cx="0" cy="0"/>
-        </a:xfrm>
-      </p:grpSpPr>
-      <p:sp>
-        <p:nvSpPr>
-          <p:cNvPr id="38" name="PlaceHolder 1"/>
-          <p:cNvSpPr>
-            <a:spLocks noGrp="1"/>
-          </p:cNvSpPr>
-          <p:nvPr>
-            <p:ph type="title"/>
-          </p:nvPr>
-        </p:nvSpPr>
-        <p:spPr>
-          <a:xfrm>
-            <a:off x="839880" y="457200"/>
-            <a:ext cx="3926880" cy="1594800"/>
-          </a:xfrm>
-          <a:prstGeom prst="rect">
-            <a:avLst/>
-          </a:prstGeom>
-          <a:noFill/>
-          <a:ln w="0">
-            <a:noFill/>
-          </a:ln>
-        </p:spPr>
-        <p:txBody>
-          <a:bodyPr lIns="91440" rIns="91440" tIns="45720" bIns="45720" anchor="b">
-            <a:noAutofit/>
-          </a:bodyPr>
-          <a:p>
-            <a:pPr indent="0" defTabSz="914400">
-              <a:lnSpc>
-                <a:spcPct val="90000"/>
-              </a:lnSpc>
-              <a:buNone/>
-              <a:tabLst>
-                <a:tab algn="l" pos="0"/>
-              </a:tabLst>
-            </a:pPr>
-            <a:r>
-              <a:rPr b="0" lang="en-US" sz="3200" strike="noStrike" u="none">
-                <a:solidFill>
-                  <a:schemeClr val="dk1"/>
-                </a:solidFill>
-                <a:effectLst/>
-                <a:uFillTx/>
-                <a:latin typeface="Calibri Light"/>
-              </a:rPr>
-              <a:t>Click to edit Master title style</a:t>
-            </a:r>
-            <a:endParaRPr b="0" lang="en-US" sz="3200" strike="noStrike" u="none">
-              <a:solidFill>
-                <a:srgbClr val="000000"/>
-              </a:solidFill>
-              <a:effectLst/>
-              <a:uFillTx/>
-              <a:latin typeface="Arial"/>
-            </a:endParaRPr>
-          </a:p>
-        </p:txBody>
-      </p:sp>
-      <p:sp>
-        <p:nvSpPr>
-          <p:cNvPr id="39" name="PlaceHolder 2"/>
-          <p:cNvSpPr>
-            <a:spLocks noGrp="1"/>
-          </p:cNvSpPr>
-          <p:nvPr>
-            <p:ph type="body"/>
-          </p:nvPr>
-        </p:nvSpPr>
-        <p:spPr>
-          <a:xfrm>
-            <a:off x="5183280" y="987480"/>
-            <a:ext cx="6166800" cy="4868280"/>
-          </a:xfrm>
-          <a:prstGeom prst="rect">
-            <a:avLst/>
-          </a:prstGeom>
-          <a:noFill/>
-          <a:ln w="0">
-            <a:noFill/>
-          </a:ln>
-        </p:spPr>
-        <p:txBody>
-          <a:bodyPr lIns="91440" rIns="91440" tIns="45720" bIns="45720" anchor="t">
-            <a:noAutofit/>
-          </a:bodyPr>
-          <a:p>
-            <a:pPr marL="228600" indent="-228600" defTabSz="914400">
-              <a:lnSpc>
-                <a:spcPct val="90000"/>
-              </a:lnSpc>
-              <a:spcBef>
-                <a:spcPts val="1001"/>
-              </a:spcBef>
-              <a:buClr>
-                <a:srgbClr val="000000"/>
-              </a:buClr>
-              <a:buFont typeface="Arial"/>
-              <a:buChar char="•"/>
-            </a:pPr>
-            <a:r>
-              <a:rPr b="0" lang="en-US" sz="3200" strike="noStrike" u="none">
-                <a:solidFill>
-                  <a:schemeClr val="dk1"/>
-                </a:solidFill>
-                <a:effectLst/>
-                <a:uFillTx/>
-                <a:latin typeface="Calibri"/>
-              </a:rPr>
-              <a:t>Click to edit Master text styles</a:t>
-            </a:r>
-            <a:endParaRPr b="0" lang="en-US" sz="3200" strike="noStrike" u="none">
-              <a:solidFill>
-                <a:srgbClr val="000000"/>
-              </a:solidFill>
-              <a:effectLst/>
-              <a:uFillTx/>
-              <a:latin typeface="Arial"/>
-            </a:endParaRPr>
-          </a:p>
-          <a:p>
-            <a:pPr lvl="1" marL="685800" indent="-228600" defTabSz="914400">
-              <a:lnSpc>
-                <a:spcPct val="90000"/>
-              </a:lnSpc>
-              <a:spcBef>
-                <a:spcPts val="499"/>
-              </a:spcBef>
-              <a:buClr>
-                <a:srgbClr val="000000"/>
-              </a:buClr>
-              <a:buFont typeface="Arial"/>
-              <a:buChar char="•"/>
-            </a:pPr>
-            <a:r>
-              <a:rPr b="0" lang="en-US" sz="2800" strike="noStrike" u="none">
-                <a:solidFill>
-                  <a:schemeClr val="dk1"/>
-                </a:solidFill>
-                <a:effectLst/>
-                <a:uFillTx/>
-                <a:latin typeface="Calibri"/>
-              </a:rPr>
-              <a:t>Second level</a:t>
-            </a:r>
-            <a:endParaRPr b="0" lang="en-US" sz="2800" strike="noStrike" u="none">
-              <a:solidFill>
-                <a:srgbClr val="000000"/>
-              </a:solidFill>
-              <a:effectLst/>
-              <a:uFillTx/>
-              <a:latin typeface="Arial"/>
-            </a:endParaRPr>
-          </a:p>
-          <a:p>
-            <a:pPr lvl="2" marL="1143000" indent="-228600" defTabSz="914400">
-              <a:lnSpc>
-                <a:spcPct val="90000"/>
-              </a:lnSpc>
-              <a:spcBef>
-                <a:spcPts val="499"/>
-              </a:spcBef>
-              <a:buClr>
-                <a:srgbClr val="000000"/>
-              </a:buClr>
-              <a:buFont typeface="Arial"/>
-              <a:buChar char="•"/>
-            </a:pPr>
-            <a:r>
-              <a:rPr b="0" lang="en-US" sz="2400" strike="noStrike" u="none">
-                <a:solidFill>
-                  <a:schemeClr val="dk1"/>
-                </a:solidFill>
-                <a:effectLst/>
-                <a:uFillTx/>
-                <a:latin typeface="Calibri"/>
-              </a:rPr>
-              <a:t>Third level</a:t>
-            </a:r>
-            <a:endParaRPr b="0" lang="en-US" sz="2400" strike="noStrike" u="none">
-              <a:solidFill>
-                <a:srgbClr val="000000"/>
-              </a:solidFill>
-              <a:effectLst/>
-              <a:uFillTx/>
-              <a:latin typeface="Arial"/>
-            </a:endParaRPr>
-          </a:p>
-          <a:p>
-            <a:pPr lvl="3" marL="1600200" indent="-228600" defTabSz="914400">
-              <a:lnSpc>
-                <a:spcPct val="90000"/>
-              </a:lnSpc>
-              <a:spcBef>
-                <a:spcPts val="499"/>
-              </a:spcBef>
-              <a:buClr>
-                <a:srgbClr val="000000"/>
-              </a:buClr>
-              <a:buFont typeface="Arial"/>
-              <a:buChar char="•"/>
-            </a:pPr>
-            <a:r>
-              <a:rPr b="0" lang="en-US" sz="2000" strike="noStrike" u="none">
-                <a:solidFill>
-                  <a:schemeClr val="dk1"/>
-                </a:solidFill>
-                <a:effectLst/>
-                <a:uFillTx/>
-                <a:latin typeface="Calibri"/>
-              </a:rPr>
-              <a:t>Fourth level</a:t>
-            </a:r>
-            <a:endParaRPr b="0" lang="en-US" sz="2000" strike="noStrike" u="none">
-              <a:solidFill>
-                <a:srgbClr val="000000"/>
-              </a:solidFill>
-              <a:effectLst/>
-              <a:uFillTx/>
-              <a:latin typeface="Arial"/>
-            </a:endParaRPr>
-          </a:p>
-          <a:p>
-            <a:pPr lvl="4" marL="2057400" indent="-228600" defTabSz="914400">
-              <a:lnSpc>
-                <a:spcPct val="90000"/>
-              </a:lnSpc>
-              <a:spcBef>
-                <a:spcPts val="499"/>
-              </a:spcBef>
-              <a:buClr>
-                <a:srgbClr val="000000"/>
-              </a:buClr>
-              <a:buFont typeface="Arial"/>
-              <a:buChar char="•"/>
-            </a:pPr>
-            <a:r>
-              <a:rPr b="0" lang="en-US" sz="2000" strike="noStrike" u="none">
-                <a:solidFill>
-                  <a:schemeClr val="dk1"/>
-                </a:solidFill>
-                <a:effectLst/>
-                <a:uFillTx/>
-                <a:latin typeface="Calibri"/>
-              </a:rPr>
-              <a:t>Fifth level</a:t>
-            </a:r>
-            <a:endParaRPr b="0" lang="en-US" sz="2000" strike="noStrike" u="none">
-              <a:solidFill>
-                <a:srgbClr val="000000"/>
-              </a:solidFill>
-              <a:effectLst/>
-              <a:uFillTx/>
-              <a:latin typeface="Arial"/>
-            </a:endParaRPr>
-          </a:p>
-        </p:txBody>
-      </p:sp>
-      <p:sp>
-        <p:nvSpPr>
-          <p:cNvPr id="40" name="PlaceHolder 3"/>
-          <p:cNvSpPr>
-            <a:spLocks noGrp="1"/>
-          </p:cNvSpPr>
-          <p:nvPr>
-            <p:ph type="body"/>
-          </p:nvPr>
-        </p:nvSpPr>
-        <p:spPr>
-          <a:xfrm>
-            <a:off x="839880" y="2057400"/>
-            <a:ext cx="3926880" cy="3806280"/>
-          </a:xfrm>
-          <a:prstGeom prst="rect">
-            <a:avLst/>
-          </a:prstGeom>
-          <a:noFill/>
-          <a:ln w="0">
-            <a:noFill/>
-          </a:ln>
-        </p:spPr>
-        <p:txBody>
-          <a:bodyPr lIns="91440" rIns="91440" tIns="45720" bIns="45720" anchor="t">
-            <a:noAutofit/>
-          </a:bodyPr>
-          <a:p>
-            <a:pPr indent="0" defTabSz="914400">
-              <a:lnSpc>
-                <a:spcPct val="90000"/>
-              </a:lnSpc>
-              <a:spcBef>
-                <a:spcPts val="1001"/>
-              </a:spcBef>
-              <a:buNone/>
-              <a:tabLst>
-                <a:tab algn="l" pos="0"/>
-              </a:tabLst>
-            </a:pPr>
-            <a:r>
-              <a:rPr b="0" lang="en-US" sz="1600" strike="noStrike" u="none">
-                <a:solidFill>
-                  <a:schemeClr val="dk1"/>
-                </a:solidFill>
-                <a:effectLst/>
-                <a:uFillTx/>
-                <a:latin typeface="Calibri"/>
-              </a:rPr>
-              <a:t>Click to edit Master text styles</a:t>
-            </a:r>
-            <a:endParaRPr b="0" lang="en-US" sz="1600" strike="noStrike" u="none">
-              <a:solidFill>
-                <a:srgbClr val="000000"/>
-              </a:solidFill>
-              <a:effectLst/>
-              <a:uFillTx/>
-              <a:latin typeface="Arial"/>
-            </a:endParaRPr>
-          </a:p>
-        </p:txBody>
-      </p:sp>
-      <p:sp>
-        <p:nvSpPr>
-          <p:cNvPr id="41" name="PlaceHolder 4"/>
-          <p:cNvSpPr>
-            <a:spLocks noGrp="1"/>
-          </p:cNvSpPr>
-          <p:nvPr>
-            <p:ph type="dt" idx="22"/>
-          </p:nvPr>
-        </p:nvSpPr>
-        <p:spPr>
-          <a:xfrm>
-            <a:off x="838080" y="6356520"/>
-            <a:ext cx="2737800" cy="359640"/>
-          </a:xfrm>
-          <a:prstGeom prst="rect">
-            <a:avLst/>
-          </a:prstGeom>
-          <a:noFill/>
-          <a:ln w="0">
-            <a:noFill/>
-          </a:ln>
-        </p:spPr>
-        <p:txBody>
-          <a:bodyPr lIns="91440" rIns="91440" tIns="45720" bIns="45720" anchor="ctr">
-            <a:noAutofit/>
-          </a:bodyPr>
-          <a:lstStyle>
-            <a:lvl1pPr indent="0" defTabSz="914400">
-              <a:lnSpc>
-                <a:spcPct val="100000"/>
-              </a:lnSpc>
-              <a:buNone/>
-              <a:tabLst>
-                <a:tab algn="l" pos="0"/>
-              </a:tabLst>
-              <a:defRPr b="0" lang="en-US" sz="1200" strike="noStrike" u="none">
-                <a:solidFill>
-                  <a:schemeClr val="dk1">
-                    <a:tint val="75000"/>
-                  </a:schemeClr>
-                </a:solidFill>
-                <a:effectLst/>
-                <a:uFillTx/>
-                <a:latin typeface="Calibri"/>
-              </a:defRPr>
-            </a:lvl1pPr>
-          </a:lstStyle>
-          <a:p>
-            <a:pPr indent="0" defTabSz="914400">
-              <a:lnSpc>
-                <a:spcPct val="100000"/>
-              </a:lnSpc>
-              <a:buNone/>
-              <a:tabLst>
-                <a:tab algn="l" pos="0"/>
-              </a:tabLst>
-            </a:pPr>
-            <a:r>
-              <a:rPr b="0" lang="en-US" sz="1200" strike="noStrike" u="none">
-                <a:solidFill>
-                  <a:schemeClr val="dk1">
-                    <a:tint val="75000"/>
-                  </a:schemeClr>
-                </a:solidFill>
-                <a:effectLst/>
-                <a:uFillTx/>
-                <a:latin typeface="Calibri"/>
-              </a:rPr>
-              <a:t> </a:t>
-            </a:r>
-            <a:endParaRPr b="0" lang="en-US" sz="1200" strike="noStrike" u="none">
-              <a:solidFill>
-                <a:srgbClr val="000000"/>
-              </a:solidFill>
-              <a:effectLst/>
-              <a:uFillTx/>
-              <a:latin typeface="Times New Roman"/>
-            </a:endParaRPr>
-          </a:p>
-        </p:txBody>
-      </p:sp>
-      <p:sp>
-        <p:nvSpPr>
-          <p:cNvPr id="42" name="PlaceHolder 5"/>
-          <p:cNvSpPr>
-            <a:spLocks noGrp="1"/>
-          </p:cNvSpPr>
-          <p:nvPr>
-            <p:ph type="ftr" idx="23"/>
-          </p:nvPr>
-        </p:nvSpPr>
-        <p:spPr>
-          <a:xfrm>
-            <a:off x="4038480" y="6356520"/>
-            <a:ext cx="4109400" cy="359640"/>
-          </a:xfrm>
-          <a:prstGeom prst="rect">
-            <a:avLst/>
-          </a:prstGeom>
-          <a:noFill/>
-          <a:ln w="0">
-            <a:noFill/>
-          </a:ln>
-        </p:spPr>
-        <p:txBody>
-          <a:bodyPr lIns="91440" rIns="91440" tIns="45720" bIns="45720" anchor="ctr">
-            <a:noAutofit/>
-          </a:bodyPr>
-          <a:lstStyle>
-            <a:lvl1pPr indent="0" algn="ctr">
-              <a:lnSpc>
-                <a:spcPct val="100000"/>
-              </a:lnSpc>
-              <a:buNone/>
-              <a:tabLst>
-                <a:tab algn="l" pos="0"/>
-              </a:tabLst>
-              <a:defRPr b="0" lang="en-US" sz="1400" strike="noStrike" u="none">
-                <a:solidFill>
-                  <a:srgbClr val="000000"/>
-                </a:solidFill>
-                <a:effectLst/>
-                <a:uFillTx/>
-                <a:latin typeface="Times New Roman"/>
-              </a:defRPr>
-            </a:lvl1pPr>
-          </a:lstStyle>
-          <a:p>
-            <a:pPr indent="0" algn="ctr">
-              <a:lnSpc>
-                <a:spcPct val="100000"/>
-              </a:lnSpc>
-              <a:buNone/>
-              <a:tabLst>
-                <a:tab algn="l" pos="0"/>
-              </a:tabLst>
-            </a:pPr>
-            <a:r>
-              <a:rPr b="0" lang="en-US" sz="1400" strike="noStrike" u="none">
-                <a:solidFill>
-                  <a:srgbClr val="000000"/>
-                </a:solidFill>
-                <a:effectLst/>
-                <a:uFillTx/>
-                <a:latin typeface="Times New Roman"/>
-              </a:rPr>
-              <a:t> </a:t>
-            </a:r>
-            <a:endParaRPr b="0" lang="en-US" sz="1400" strike="noStrike" u="none">
-              <a:solidFill>
-                <a:srgbClr val="000000"/>
-              </a:solidFill>
-              <a:effectLst/>
-              <a:uFillTx/>
-              <a:latin typeface="Times New Roman"/>
-            </a:endParaRPr>
-          </a:p>
-        </p:txBody>
-      </p:sp>
-      <p:sp>
-        <p:nvSpPr>
-          <p:cNvPr id="43" name="PlaceHolder 6"/>
-          <p:cNvSpPr>
-            <a:spLocks noGrp="1"/>
-          </p:cNvSpPr>
-          <p:nvPr>
-            <p:ph type="sldNum" idx="24"/>
-          </p:nvPr>
-        </p:nvSpPr>
-        <p:spPr>
-          <a:xfrm>
-            <a:off x="8610480" y="6356520"/>
-            <a:ext cx="2737800" cy="359640"/>
-          </a:xfrm>
-          <a:prstGeom prst="rect">
-            <a:avLst/>
-          </a:prstGeom>
-          <a:noFill/>
-          <a:ln w="0">
-            <a:noFill/>
-          </a:ln>
-        </p:spPr>
-        <p:txBody>
-          <a:bodyPr lIns="91440" rIns="91440" tIns="45720" bIns="45720" anchor="ctr">
-            <a:noAutofit/>
-          </a:bodyPr>
-          <a:lstStyle>
-            <a:lvl1pPr indent="0" algn="r" defTabSz="914400">
-              <a:lnSpc>
-                <a:spcPct val="100000"/>
-              </a:lnSpc>
-              <a:buNone/>
-              <a:tabLst>
-                <a:tab algn="l" pos="0"/>
-              </a:tabLst>
-              <a:defRPr b="0" lang="en-US" sz="1200" strike="noStrike" u="none">
-                <a:solidFill>
-                  <a:schemeClr val="dk1">
-                    <a:tint val="75000"/>
-                  </a:schemeClr>
-                </a:solidFill>
-                <a:effectLst/>
-                <a:uFillTx/>
-                <a:latin typeface="Calibri"/>
-              </a:defRPr>
-            </a:lvl1pPr>
-          </a:lstStyle>
-          <a:p>
-            <a:pPr indent="0" algn="r" defTabSz="914400">
-              <a:lnSpc>
-                <a:spcPct val="100000"/>
-              </a:lnSpc>
-              <a:buNone/>
-              <a:tabLst>
-                <a:tab algn="l" pos="0"/>
-              </a:tabLst>
-            </a:pPr>
-            <a:fld id="{B078735D-38AE-4AF0-98B6-6A35EDD9DE41}" type="slidenum">
-              <a:rPr b="0" lang="en-US" sz="1200" strike="noStrike" u="none">
-                <a:solidFill>
-                  <a:schemeClr val="dk1">
-                    <a:tint val="75000"/>
-                  </a:schemeClr>
-                </a:solidFill>
-                <a:effectLst/>
-                <a:uFillTx/>
-                <a:latin typeface="Calibri"/>
-              </a:rPr>
-              <a:t>17</a:t>
-            </a:fld>
-            <a:endParaRPr b="0" lang="en-US" sz="1200" strike="noStrike" u="none">
-              <a:solidFill>
-                <a:srgbClr val="000000"/>
-              </a:solidFill>
-              <a:effectLst/>
-              <a:uFillTx/>
-              <a:latin typeface="Times New Roman"/>
-            </a:endParaRPr>
-          </a:p>
-        </p:txBody>
-      </p:sp>
-    </p:spTree>
-  </p:cSld>
-</p:sldLayout>
-</file>
-
-<file path=ppt/slideLayouts/slideLayout9.xml><?xml version="1.0" encoding="utf-8"?>
-<p:sldLayout xmlns:a="http://schemas.openxmlformats.org/drawingml/2006/main" xmlns:p="http://schemas.openxmlformats.org/presentationml/2006/main" xmlns:r="http://schemas.openxmlformats.org/officeDocument/2006/relationships" xmlns:p14="http://schemas.microsoft.com/office/powerpoint/2010/main" xmlns:p15="http://schemas.microsoft.com/office/powerpoint/2012/main" xmlns:mc="http://schemas.openxmlformats.org/markup-compatibility/2006" type="blank" preserve="1">
-  <p:cSld name="Picture with Caption">
-    <p:bg>
-      <p:bgPr>
-        <a:solidFill>
-          <a:srgbClr val="ffffff"/>
-        </a:solidFill>
-      </p:bgPr>
-    </p:bg>
-    <p:spTree>
-      <p:nvGrpSpPr>
-        <p:cNvPr id="1" name=""/>
-        <p:cNvGrpSpPr/>
-        <p:nvPr/>
-      </p:nvGrpSpPr>
-      <p:grpSpPr>
-        <a:xfrm>
-          <a:off x="0" y="0"/>
-          <a:ext cx="0" cy="0"/>
-          <a:chOff x="0" y="0"/>
-          <a:chExt cx="0" cy="0"/>
-        </a:xfrm>
-      </p:grpSpPr>
-      <p:sp>
-        <p:nvSpPr>
-          <p:cNvPr id="44" name="PlaceHolder 1"/>
-          <p:cNvSpPr>
-            <a:spLocks noGrp="1"/>
-          </p:cNvSpPr>
-          <p:nvPr>
-            <p:ph type="title"/>
-          </p:nvPr>
-        </p:nvSpPr>
-        <p:spPr>
-          <a:xfrm>
-            <a:off x="839880" y="457200"/>
-            <a:ext cx="3926880" cy="1594800"/>
-          </a:xfrm>
-          <a:prstGeom prst="rect">
-            <a:avLst/>
-          </a:prstGeom>
-          <a:noFill/>
-          <a:ln w="0">
-            <a:noFill/>
-          </a:ln>
-        </p:spPr>
-        <p:txBody>
-          <a:bodyPr lIns="91440" rIns="91440" tIns="45720" bIns="45720" anchor="b">
-            <a:noAutofit/>
-          </a:bodyPr>
-          <a:p>
-            <a:pPr indent="0" defTabSz="914400">
-              <a:lnSpc>
-                <a:spcPct val="90000"/>
-              </a:lnSpc>
-              <a:buNone/>
-              <a:tabLst>
-                <a:tab algn="l" pos="0"/>
-              </a:tabLst>
-            </a:pPr>
-            <a:r>
-              <a:rPr b="0" lang="en-US" sz="3200" strike="noStrike" u="none">
-                <a:solidFill>
-                  <a:schemeClr val="dk1"/>
-                </a:solidFill>
-                <a:effectLst/>
-                <a:uFillTx/>
-                <a:latin typeface="Calibri Light"/>
-              </a:rPr>
-              <a:t>Click to edit Master title style</a:t>
-            </a:r>
-            <a:endParaRPr b="0" lang="en-US" sz="3200" strike="noStrike" u="none">
-              <a:solidFill>
-                <a:srgbClr val="000000"/>
-              </a:solidFill>
-              <a:effectLst/>
-              <a:uFillTx/>
-              <a:latin typeface="Arial"/>
-            </a:endParaRPr>
-          </a:p>
-        </p:txBody>
-      </p:sp>
-      <p:sp>
-        <p:nvSpPr>
-          <p:cNvPr id="45" name="PlaceHolder 2"/>
-          <p:cNvSpPr>
-            <a:spLocks noGrp="1"/>
-          </p:cNvSpPr>
-          <p:nvPr>
-            <p:ph type="body"/>
-          </p:nvPr>
-        </p:nvSpPr>
-        <p:spPr>
-          <a:xfrm>
-            <a:off x="5183280" y="987480"/>
-            <a:ext cx="6166800" cy="4868280"/>
-          </a:xfrm>
-          <a:prstGeom prst="rect">
-            <a:avLst/>
-          </a:prstGeom>
-          <a:noFill/>
-          <a:ln w="0">
-            <a:noFill/>
-          </a:ln>
-        </p:spPr>
-        <p:txBody>
-          <a:bodyPr lIns="90000" rIns="90000" tIns="45000" bIns="45000" anchor="t">
-            <a:noAutofit/>
-          </a:bodyPr>
-          <a:p>
-            <a:pPr indent="0" defTabSz="914400">
-              <a:lnSpc>
-                <a:spcPct val="100000"/>
-              </a:lnSpc>
-              <a:buNone/>
-              <a:tabLst>
-                <a:tab algn="l" pos="0"/>
-              </a:tabLst>
-            </a:pPr>
-            <a:r>
-              <a:rPr b="0" lang="en-US" sz="3200" strike="noStrike" u="none">
-                <a:solidFill>
-                  <a:schemeClr val="dk1"/>
-                </a:solidFill>
-                <a:effectLst/>
-                <a:uFillTx/>
-                <a:latin typeface="Calibri"/>
-              </a:rPr>
-              <a:t>Click icon to add picture</a:t>
-            </a:r>
-            <a:endParaRPr b="0" lang="en-US" sz="3200" strike="noStrike" u="none">
-              <a:solidFill>
-                <a:srgbClr val="000000"/>
-              </a:solidFill>
-              <a:effectLst/>
-              <a:uFillTx/>
-              <a:latin typeface="Arial"/>
-            </a:endParaRPr>
-          </a:p>
-        </p:txBody>
-      </p:sp>
-      <p:sp>
-        <p:nvSpPr>
-          <p:cNvPr id="46" name="PlaceHolder 3"/>
-          <p:cNvSpPr>
-            <a:spLocks noGrp="1"/>
-          </p:cNvSpPr>
-          <p:nvPr>
-            <p:ph type="body"/>
-          </p:nvPr>
-        </p:nvSpPr>
-        <p:spPr>
-          <a:xfrm>
-            <a:off x="839880" y="2057400"/>
-            <a:ext cx="3926880" cy="3806280"/>
-          </a:xfrm>
-          <a:prstGeom prst="rect">
-            <a:avLst/>
-          </a:prstGeom>
-          <a:noFill/>
-          <a:ln w="0">
-            <a:noFill/>
-          </a:ln>
-        </p:spPr>
-        <p:txBody>
-          <a:bodyPr lIns="91440" rIns="91440" tIns="45720" bIns="45720" anchor="t">
-            <a:noAutofit/>
-          </a:bodyPr>
-          <a:p>
-            <a:pPr indent="0" defTabSz="914400">
-              <a:lnSpc>
-                <a:spcPct val="90000"/>
-              </a:lnSpc>
-              <a:spcBef>
-                <a:spcPts val="1001"/>
-              </a:spcBef>
-              <a:buNone/>
-              <a:tabLst>
-                <a:tab algn="l" pos="0"/>
-              </a:tabLst>
-            </a:pPr>
-            <a:r>
-              <a:rPr b="0" lang="en-US" sz="1600" strike="noStrike" u="none">
-                <a:solidFill>
-                  <a:schemeClr val="dk1"/>
-                </a:solidFill>
-                <a:effectLst/>
-                <a:uFillTx/>
-                <a:latin typeface="Calibri"/>
-              </a:rPr>
-              <a:t>Click to edit Master text styles</a:t>
-            </a:r>
-            <a:endParaRPr b="0" lang="en-US" sz="1600" strike="noStrike" u="none">
-              <a:solidFill>
-                <a:srgbClr val="000000"/>
-              </a:solidFill>
-              <a:effectLst/>
-              <a:uFillTx/>
-              <a:latin typeface="Arial"/>
-            </a:endParaRPr>
-          </a:p>
-        </p:txBody>
-      </p:sp>
-      <p:sp>
-        <p:nvSpPr>
-          <p:cNvPr id="47" name="PlaceHolder 4"/>
-          <p:cNvSpPr>
-            <a:spLocks noGrp="1"/>
-          </p:cNvSpPr>
-          <p:nvPr>
-            <p:ph type="dt" idx="25"/>
-          </p:nvPr>
-        </p:nvSpPr>
-        <p:spPr>
-          <a:xfrm>
-            <a:off x="838080" y="6356520"/>
-            <a:ext cx="2737800" cy="359640"/>
-          </a:xfrm>
-          <a:prstGeom prst="rect">
-            <a:avLst/>
-          </a:prstGeom>
-          <a:noFill/>
-          <a:ln w="0">
-            <a:noFill/>
-          </a:ln>
-        </p:spPr>
-        <p:txBody>
-          <a:bodyPr lIns="91440" rIns="91440" tIns="45720" bIns="45720" anchor="ctr">
-            <a:noAutofit/>
-          </a:bodyPr>
-          <a:lstStyle>
-            <a:lvl1pPr indent="0" defTabSz="914400">
-              <a:lnSpc>
-                <a:spcPct val="100000"/>
-              </a:lnSpc>
-              <a:buNone/>
-              <a:tabLst>
-                <a:tab algn="l" pos="0"/>
-              </a:tabLst>
-              <a:defRPr b="0" lang="en-US" sz="1200" strike="noStrike" u="none">
-                <a:solidFill>
-                  <a:schemeClr val="dk1">
-                    <a:tint val="75000"/>
-                  </a:schemeClr>
-                </a:solidFill>
-                <a:effectLst/>
-                <a:uFillTx/>
-                <a:latin typeface="Calibri"/>
-              </a:defRPr>
-            </a:lvl1pPr>
-          </a:lstStyle>
-          <a:p>
-            <a:pPr indent="0" defTabSz="914400">
-              <a:lnSpc>
-                <a:spcPct val="100000"/>
-              </a:lnSpc>
-              <a:buNone/>
-              <a:tabLst>
-                <a:tab algn="l" pos="0"/>
-              </a:tabLst>
-            </a:pPr>
-            <a:r>
-              <a:rPr b="0" lang="en-US" sz="1200" strike="noStrike" u="none">
-                <a:solidFill>
-                  <a:schemeClr val="dk1">
-                    <a:tint val="75000"/>
-                  </a:schemeClr>
-                </a:solidFill>
-                <a:effectLst/>
-                <a:uFillTx/>
-                <a:latin typeface="Calibri"/>
-              </a:rPr>
-              <a:t> </a:t>
-            </a:r>
-            <a:endParaRPr b="0" lang="en-US" sz="1200" strike="noStrike" u="none">
-              <a:solidFill>
-                <a:srgbClr val="000000"/>
-              </a:solidFill>
-              <a:effectLst/>
-              <a:uFillTx/>
-              <a:latin typeface="Times New Roman"/>
-            </a:endParaRPr>
-          </a:p>
-        </p:txBody>
-      </p:sp>
-      <p:sp>
-        <p:nvSpPr>
-          <p:cNvPr id="48" name="PlaceHolder 5"/>
-          <p:cNvSpPr>
-            <a:spLocks noGrp="1"/>
-          </p:cNvSpPr>
-          <p:nvPr>
-            <p:ph type="ftr" idx="26"/>
-          </p:nvPr>
-        </p:nvSpPr>
-        <p:spPr>
-          <a:xfrm>
-            <a:off x="4038480" y="6356520"/>
-            <a:ext cx="4109400" cy="359640"/>
-          </a:xfrm>
-          <a:prstGeom prst="rect">
-            <a:avLst/>
-          </a:prstGeom>
-          <a:noFill/>
-          <a:ln w="0">
-            <a:noFill/>
-          </a:ln>
-        </p:spPr>
-        <p:txBody>
-          <a:bodyPr lIns="91440" rIns="91440" tIns="45720" bIns="45720" anchor="ctr">
-            <a:noAutofit/>
-          </a:bodyPr>
-          <a:lstStyle>
-            <a:lvl1pPr indent="0" algn="ctr">
-              <a:lnSpc>
-                <a:spcPct val="100000"/>
-              </a:lnSpc>
-              <a:buNone/>
-              <a:tabLst>
-                <a:tab algn="l" pos="0"/>
-              </a:tabLst>
-              <a:defRPr b="0" lang="en-US" sz="1400" strike="noStrike" u="none">
-                <a:solidFill>
-                  <a:srgbClr val="000000"/>
-                </a:solidFill>
-                <a:effectLst/>
-                <a:uFillTx/>
-                <a:latin typeface="Times New Roman"/>
-              </a:defRPr>
-            </a:lvl1pPr>
-          </a:lstStyle>
-          <a:p>
-            <a:pPr indent="0" algn="ctr">
-              <a:lnSpc>
-                <a:spcPct val="100000"/>
-              </a:lnSpc>
-              <a:buNone/>
-              <a:tabLst>
-                <a:tab algn="l" pos="0"/>
-              </a:tabLst>
-            </a:pPr>
-            <a:r>
-              <a:rPr b="0" lang="en-US" sz="1400" strike="noStrike" u="none">
-                <a:solidFill>
-                  <a:srgbClr val="000000"/>
-                </a:solidFill>
-                <a:effectLst/>
-                <a:uFillTx/>
-                <a:latin typeface="Times New Roman"/>
-              </a:rPr>
-              <a:t> </a:t>
-            </a:r>
-            <a:endParaRPr b="0" lang="en-US" sz="1400" strike="noStrike" u="none">
-              <a:solidFill>
-                <a:srgbClr val="000000"/>
-              </a:solidFill>
-              <a:effectLst/>
-              <a:uFillTx/>
-              <a:latin typeface="Times New Roman"/>
-            </a:endParaRPr>
-          </a:p>
-        </p:txBody>
-      </p:sp>
-      <p:sp>
-        <p:nvSpPr>
-          <p:cNvPr id="49" name="PlaceHolder 6"/>
-          <p:cNvSpPr>
-            <a:spLocks noGrp="1"/>
-          </p:cNvSpPr>
-          <p:nvPr>
-            <p:ph type="sldNum" idx="27"/>
-          </p:nvPr>
-        </p:nvSpPr>
-        <p:spPr>
-          <a:xfrm>
-            <a:off x="8610480" y="6356520"/>
-            <a:ext cx="2737800" cy="359640"/>
-          </a:xfrm>
-          <a:prstGeom prst="rect">
-            <a:avLst/>
-          </a:prstGeom>
-          <a:noFill/>
-          <a:ln w="0">
-            <a:noFill/>
-          </a:ln>
-        </p:spPr>
-        <p:txBody>
-          <a:bodyPr lIns="91440" rIns="91440" tIns="45720" bIns="45720" anchor="ctr">
-            <a:noAutofit/>
-          </a:bodyPr>
-          <a:lstStyle>
-            <a:lvl1pPr indent="0" algn="r" defTabSz="914400">
-              <a:lnSpc>
-                <a:spcPct val="100000"/>
-              </a:lnSpc>
-              <a:buNone/>
-              <a:tabLst>
-                <a:tab algn="l" pos="0"/>
-              </a:tabLst>
-              <a:defRPr b="0" lang="en-US" sz="1200" strike="noStrike" u="none">
-                <a:solidFill>
-                  <a:schemeClr val="dk1">
-                    <a:tint val="75000"/>
-                  </a:schemeClr>
-                </a:solidFill>
-                <a:effectLst/>
-                <a:uFillTx/>
-                <a:latin typeface="Calibri"/>
-              </a:defRPr>
-            </a:lvl1pPr>
-          </a:lstStyle>
-          <a:p>
-            <a:pPr indent="0" algn="r" defTabSz="914400">
-              <a:lnSpc>
-                <a:spcPct val="100000"/>
-              </a:lnSpc>
-              <a:buNone/>
-              <a:tabLst>
-                <a:tab algn="l" pos="0"/>
-              </a:tabLst>
-            </a:pPr>
-            <a:fld id="{CE7573D6-2F77-411A-A391-B1F37C5BDED7}" type="slidenum">
-              <a:rPr b="0" lang="en-US" sz="1200" strike="noStrike" u="none">
-                <a:solidFill>
-                  <a:schemeClr val="dk1">
-                    <a:tint val="75000"/>
-                  </a:schemeClr>
-                </a:solidFill>
-                <a:effectLst/>
-                <a:uFillTx/>
-                <a:latin typeface="Calibri"/>
-              </a:rPr>
-              <a:t>17</a:t>
+              <a:t>&lt;number&gt;</a:t>
             </a:fld>
             <a:endParaRPr b="0" lang="en-US" sz="1200" strike="noStrike" u="none">
               <a:solidFill>
@@ -5902,7 +5902,7 @@
         <p:spPr>
           <a:xfrm>
             <a:off x="1523880" y="1143000"/>
-            <a:ext cx="9138600" cy="2284560"/>
+            <a:ext cx="9138240" cy="2284200"/>
           </a:xfrm>
           <a:prstGeom prst="rect">
             <a:avLst/>
@@ -5962,7 +5962,7 @@
         <p:spPr>
           <a:xfrm>
             <a:off x="1523880" y="4221360"/>
-            <a:ext cx="9138600" cy="1492200"/>
+            <a:ext cx="9138240" cy="1491840"/>
           </a:xfrm>
           <a:prstGeom prst="rect">
             <a:avLst/>
@@ -6093,7 +6093,7 @@
         <p:spPr>
           <a:xfrm>
             <a:off x="10199160" y="282240"/>
-            <a:ext cx="1794960" cy="594720"/>
+            <a:ext cx="1794600" cy="594360"/>
           </a:xfrm>
           <a:prstGeom prst="rect">
             <a:avLst/>
@@ -6143,7 +6143,7 @@
       </p:grpSpPr>
       <p:sp useBgFill="1">
         <p:nvSpPr>
-          <p:cNvPr id="106" name="Rectangle 6">
+          <p:cNvPr id="107" name="Rectangle 6">
             <a:extLst>
               <a:ext uri="{C183D7F6-B498-43B3-948B-1728B52AA6E4}">
                 <adec:decorative xmlns:adec="http://schemas.microsoft.com/office/drawing/2017/decorative" val="1"/>
@@ -6156,7 +6156,7 @@
         <p:spPr>
           <a:xfrm>
             <a:off x="0" y="4680"/>
-            <a:ext cx="12183480" cy="6852600"/>
+            <a:ext cx="12183120" cy="6852240"/>
           </a:xfrm>
           <a:prstGeom prst="rect">
             <a:avLst/>
@@ -6202,7 +6202,7 @@
       </p:sp>
       <p:sp>
         <p:nvSpPr>
-          <p:cNvPr id="107" name="PlaceHolder 1"/>
+          <p:cNvPr id="108" name="PlaceHolder 1"/>
           <p:cNvSpPr>
             <a:spLocks noGrp="1"/>
           </p:cNvSpPr>
@@ -6213,7 +6213,7 @@
         <p:spPr>
           <a:xfrm>
             <a:off x="572400" y="238680"/>
-            <a:ext cx="11013120" cy="1127880"/>
+            <a:ext cx="11012760" cy="1127520"/>
           </a:xfrm>
           <a:prstGeom prst="rect">
             <a:avLst/>
@@ -6261,7 +6261,7 @@
       </p:sp>
       <p:sp>
         <p:nvSpPr>
-          <p:cNvPr id="108" name="sketchy line 7">
+          <p:cNvPr id="109" name="sketchy line 7">
             <a:extLst>
               <a:ext uri="{C183D7F6-B498-43B3-948B-1728B52AA6E4}">
                 <adec:decorative xmlns:adec="http://schemas.microsoft.com/office/drawing/2017/decorative" val="1"/>
@@ -6274,15 +6274,15 @@
         <p:spPr>
           <a:xfrm>
             <a:off x="572400" y="1681560"/>
-            <a:ext cx="10967400" cy="12960"/>
+            <a:ext cx="10967040" cy="12600"/>
           </a:xfrm>
           <a:custGeom>
             <a:avLst/>
             <a:gdLst>
-              <a:gd name="textAreaLeft" fmla="*/ 0 w 10967400"/>
-              <a:gd name="textAreaRight" fmla="*/ 10972800 w 10967400"/>
-              <a:gd name="textAreaTop" fmla="*/ 0 h 12960"/>
-              <a:gd name="textAreaBottom" fmla="*/ 18360 h 12960"/>
+              <a:gd name="textAreaLeft" fmla="*/ 0 w 10967040"/>
+              <a:gd name="textAreaRight" fmla="*/ 10972800 w 10967040"/>
+              <a:gd name="textAreaTop" fmla="*/ 0 h 12600"/>
+              <a:gd name="textAreaBottom" fmla="*/ 18360 h 12600"/>
               <a:gd name="GluePoint1X" fmla="*/ 0 w 10972800"/>
               <a:gd name="GluePoint1Y" fmla="*/ 0 h 18288"/>
               <a:gd name="GluePoint2X" fmla="*/ 356616 w 10972800"/>
@@ -6914,7 +6914,7 @@
       </p:sp>
       <p:pic>
         <p:nvPicPr>
-          <p:cNvPr id="109" name="Picture 10" descr="A blue and white logo&#10;&#10;Description automatically generated"/>
+          <p:cNvPr id="110" name="Picture 10" descr="A blue and white logo&#10;&#10;Description automatically generated"/>
           <p:cNvPicPr/>
           <p:nvPr/>
         </p:nvPicPr>
@@ -6925,7 +6925,7 @@
         <p:spPr>
           <a:xfrm>
             <a:off x="10199520" y="282600"/>
-            <a:ext cx="1794960" cy="594720"/>
+            <a:ext cx="1794600" cy="594360"/>
           </a:xfrm>
           <a:prstGeom prst="rect">
             <a:avLst/>
@@ -6938,14 +6938,14 @@
       </p:pic>
       <p:sp>
         <p:nvSpPr>
-          <p:cNvPr id="110" name="PlaceHolder 11"/>
+          <p:cNvPr id="111" name="PlaceHolder 11"/>
           <p:cNvSpPr/>
           <p:nvPr/>
         </p:nvSpPr>
         <p:spPr>
           <a:xfrm>
             <a:off x="6401520" y="1828800"/>
-            <a:ext cx="5256360" cy="4342680"/>
+            <a:ext cx="5256000" cy="4342320"/>
           </a:xfrm>
           <a:prstGeom prst="rect">
             <a:avLst/>
@@ -7131,7 +7131,7 @@
       </p:sp>
       <p:pic>
         <p:nvPicPr>
-          <p:cNvPr id="111" name="" descr=""/>
+          <p:cNvPr id="112" name="" descr=""/>
           <p:cNvPicPr/>
           <p:nvPr/>
         </p:nvPicPr>
@@ -7142,7 +7142,7 @@
         <p:spPr>
           <a:xfrm>
             <a:off x="549360" y="2017440"/>
-            <a:ext cx="5621760" cy="4153680"/>
+            <a:ext cx="5621400" cy="4153320"/>
           </a:xfrm>
           <a:prstGeom prst="rect">
             <a:avLst/>
@@ -7192,7 +7192,7 @@
       </p:grpSpPr>
       <p:sp useBgFill="1">
         <p:nvSpPr>
-          <p:cNvPr id="112" name="Rectangle 7">
+          <p:cNvPr id="113" name="Rectangle 7">
             <a:extLst>
               <a:ext uri="{C183D7F6-B498-43B3-948B-1728B52AA6E4}">
                 <adec:decorative xmlns:adec="http://schemas.microsoft.com/office/drawing/2017/decorative" val="1"/>
@@ -7205,7 +7205,7 @@
         <p:spPr>
           <a:xfrm>
             <a:off x="0" y="4680"/>
-            <a:ext cx="12183480" cy="6852600"/>
+            <a:ext cx="12183120" cy="6852240"/>
           </a:xfrm>
           <a:prstGeom prst="rect">
             <a:avLst/>
@@ -7251,7 +7251,7 @@
       </p:sp>
       <p:sp>
         <p:nvSpPr>
-          <p:cNvPr id="113" name="PlaceHolder 1"/>
+          <p:cNvPr id="114" name="PlaceHolder 1"/>
           <p:cNvSpPr>
             <a:spLocks noGrp="1"/>
           </p:cNvSpPr>
@@ -7262,7 +7262,7 @@
         <p:spPr>
           <a:xfrm>
             <a:off x="572400" y="238680"/>
-            <a:ext cx="11013120" cy="1127880"/>
+            <a:ext cx="11012760" cy="1127520"/>
           </a:xfrm>
           <a:prstGeom prst="rect">
             <a:avLst/>
@@ -7310,7 +7310,7 @@
       </p:sp>
       <p:sp>
         <p:nvSpPr>
-          <p:cNvPr id="114" name="sketchy line 8">
+          <p:cNvPr id="115" name="sketchy line 8">
             <a:extLst>
               <a:ext uri="{C183D7F6-B498-43B3-948B-1728B52AA6E4}">
                 <adec:decorative xmlns:adec="http://schemas.microsoft.com/office/drawing/2017/decorative" val="1"/>
@@ -7323,15 +7323,15 @@
         <p:spPr>
           <a:xfrm>
             <a:off x="572400" y="1681560"/>
-            <a:ext cx="10967400" cy="12960"/>
+            <a:ext cx="10967040" cy="12600"/>
           </a:xfrm>
           <a:custGeom>
             <a:avLst/>
             <a:gdLst>
-              <a:gd name="textAreaLeft" fmla="*/ 0 w 10967400"/>
-              <a:gd name="textAreaRight" fmla="*/ 10972800 w 10967400"/>
-              <a:gd name="textAreaTop" fmla="*/ 0 h 12960"/>
-              <a:gd name="textAreaBottom" fmla="*/ 18360 h 12960"/>
+              <a:gd name="textAreaLeft" fmla="*/ 0 w 10967040"/>
+              <a:gd name="textAreaRight" fmla="*/ 10972800 w 10967040"/>
+              <a:gd name="textAreaTop" fmla="*/ 0 h 12600"/>
+              <a:gd name="textAreaBottom" fmla="*/ 18360 h 12600"/>
               <a:gd name="GluePoint1X" fmla="*/ 0 w 10972800"/>
               <a:gd name="GluePoint1Y" fmla="*/ 0 h 18288"/>
               <a:gd name="GluePoint2X" fmla="*/ 356616 w 10972800"/>
@@ -7963,7 +7963,7 @@
       </p:sp>
       <p:pic>
         <p:nvPicPr>
-          <p:cNvPr id="115" name="Picture 11" descr="A blue and white logo&#10;&#10;Description automatically generated"/>
+          <p:cNvPr id="116" name="Picture 11" descr="A blue and white logo&#10;&#10;Description automatically generated"/>
           <p:cNvPicPr/>
           <p:nvPr/>
         </p:nvPicPr>
@@ -7974,7 +7974,7 @@
         <p:spPr>
           <a:xfrm>
             <a:off x="10199520" y="282600"/>
-            <a:ext cx="1794960" cy="594720"/>
+            <a:ext cx="1794600" cy="594360"/>
           </a:xfrm>
           <a:prstGeom prst="rect">
             <a:avLst/>
@@ -7987,14 +7987,14 @@
       </p:pic>
       <p:sp>
         <p:nvSpPr>
-          <p:cNvPr id="116" name="PlaceHolder 4"/>
+          <p:cNvPr id="117" name="PlaceHolder 4"/>
           <p:cNvSpPr/>
           <p:nvPr/>
         </p:nvSpPr>
         <p:spPr>
           <a:xfrm>
             <a:off x="457920" y="1970640"/>
-            <a:ext cx="5484960" cy="4342680"/>
+            <a:ext cx="5484600" cy="4342320"/>
           </a:xfrm>
           <a:prstGeom prst="rect">
             <a:avLst/>
@@ -8222,7 +8222,7 @@
       </p:sp>
       <p:pic>
         <p:nvPicPr>
-          <p:cNvPr id="117" name="" descr=""/>
+          <p:cNvPr id="118" name="" descr=""/>
           <p:cNvPicPr/>
           <p:nvPr/>
         </p:nvPicPr>
@@ -8233,7 +8233,7 @@
         <p:spPr>
           <a:xfrm>
             <a:off x="5942880" y="2591640"/>
-            <a:ext cx="5618520" cy="2437560"/>
+            <a:ext cx="5618160" cy="2437200"/>
           </a:xfrm>
           <a:prstGeom prst="rect">
             <a:avLst/>
@@ -8283,7 +8283,7 @@
       </p:grpSpPr>
       <p:sp useBgFill="1">
         <p:nvSpPr>
-          <p:cNvPr id="118" name="Rectangle 8">
+          <p:cNvPr id="119" name="Rectangle 8">
             <a:extLst>
               <a:ext uri="{C183D7F6-B498-43B3-948B-1728B52AA6E4}">
                 <adec:decorative xmlns:adec="http://schemas.microsoft.com/office/drawing/2017/decorative" val="1"/>
@@ -8296,7 +8296,7 @@
         <p:spPr>
           <a:xfrm>
             <a:off x="0" y="4680"/>
-            <a:ext cx="12183480" cy="6852600"/>
+            <a:ext cx="12183120" cy="6852240"/>
           </a:xfrm>
           <a:prstGeom prst="rect">
             <a:avLst/>
@@ -8342,7 +8342,7 @@
       </p:sp>
       <p:sp>
         <p:nvSpPr>
-          <p:cNvPr id="119" name="PlaceHolder 1"/>
+          <p:cNvPr id="120" name="PlaceHolder 1"/>
           <p:cNvSpPr>
             <a:spLocks noGrp="1"/>
           </p:cNvSpPr>
@@ -8353,7 +8353,7 @@
         <p:spPr>
           <a:xfrm>
             <a:off x="572400" y="457200"/>
-            <a:ext cx="11013120" cy="1143000"/>
+            <a:ext cx="11012760" cy="1142640"/>
           </a:xfrm>
           <a:prstGeom prst="rect">
             <a:avLst/>
@@ -8401,7 +8401,7 @@
       </p:sp>
       <p:sp>
         <p:nvSpPr>
-          <p:cNvPr id="120" name="sketchy line 9">
+          <p:cNvPr id="121" name="sketchy line 9">
             <a:extLst>
               <a:ext uri="{C183D7F6-B498-43B3-948B-1728B52AA6E4}">
                 <adec:decorative xmlns:adec="http://schemas.microsoft.com/office/drawing/2017/decorative" val="1"/>
@@ -8414,15 +8414,15 @@
         <p:spPr>
           <a:xfrm>
             <a:off x="572400" y="1681560"/>
-            <a:ext cx="10967400" cy="12960"/>
+            <a:ext cx="10967040" cy="12600"/>
           </a:xfrm>
           <a:custGeom>
             <a:avLst/>
             <a:gdLst>
-              <a:gd name="textAreaLeft" fmla="*/ 0 w 10967400"/>
-              <a:gd name="textAreaRight" fmla="*/ 10972800 w 10967400"/>
-              <a:gd name="textAreaTop" fmla="*/ 0 h 12960"/>
-              <a:gd name="textAreaBottom" fmla="*/ 18360 h 12960"/>
+              <a:gd name="textAreaLeft" fmla="*/ 0 w 10967040"/>
+              <a:gd name="textAreaRight" fmla="*/ 10972800 w 10967040"/>
+              <a:gd name="textAreaTop" fmla="*/ 0 h 12600"/>
+              <a:gd name="textAreaBottom" fmla="*/ 18360 h 12600"/>
               <a:gd name="GluePoint1X" fmla="*/ 0 w 10972800"/>
               <a:gd name="GluePoint1Y" fmla="*/ 0 h 18288"/>
               <a:gd name="GluePoint2X" fmla="*/ 356616 w 10972800"/>
@@ -9054,7 +9054,7 @@
       </p:sp>
       <p:pic>
         <p:nvPicPr>
-          <p:cNvPr id="121" name="Picture 12" descr="A blue and white logo&#10;&#10;Description automatically generated"/>
+          <p:cNvPr id="122" name="Picture 12" descr="A blue and white logo&#10;&#10;Description automatically generated"/>
           <p:cNvPicPr/>
           <p:nvPr/>
         </p:nvPicPr>
@@ -9065,7 +9065,7 @@
         <p:spPr>
           <a:xfrm>
             <a:off x="10199520" y="282600"/>
-            <a:ext cx="1794960" cy="594720"/>
+            <a:ext cx="1794600" cy="594360"/>
           </a:xfrm>
           <a:prstGeom prst="rect">
             <a:avLst/>
@@ -9078,14 +9078,14 @@
       </p:pic>
       <p:sp>
         <p:nvSpPr>
-          <p:cNvPr id="122" name=""/>
-          <p:cNvSpPr txBox="1"/>
+          <p:cNvPr id="123" name=""/>
+          <p:cNvSpPr/>
           <p:nvPr/>
         </p:nvSpPr>
         <p:spPr>
           <a:xfrm>
             <a:off x="685800" y="2057400"/>
-            <a:ext cx="5029200" cy="3886200"/>
+            <a:ext cx="5028840" cy="3885840"/>
           </a:xfrm>
           <a:prstGeom prst="rect">
             <a:avLst/>
@@ -9095,12 +9095,21 @@
             <a:noFill/>
           </a:ln>
         </p:spPr>
+        <p:style>
+          <a:lnRef idx="0"/>
+          <a:fillRef idx="0"/>
+          <a:effectRef idx="0"/>
+          <a:fontRef idx="minor"/>
+        </p:style>
         <p:txBody>
           <a:bodyPr lIns="90000" rIns="90000" tIns="45000" bIns="45000" anchor="t">
             <a:spAutoFit/>
           </a:bodyPr>
           <a:p>
             <a:pPr marL="216000" indent="-216000">
+              <a:lnSpc>
+                <a:spcPct val="100000"/>
+              </a:lnSpc>
               <a:buClr>
                 <a:srgbClr val="000000"/>
               </a:buClr>
@@ -9130,6 +9139,9 @@
           </a:p>
           <a:p>
             <a:pPr marL="216000" indent="-216000">
+              <a:lnSpc>
+                <a:spcPct val="100000"/>
+              </a:lnSpc>
               <a:buClr>
                 <a:srgbClr val="000000"/>
               </a:buClr>
@@ -9159,6 +9171,9 @@
           </a:p>
           <a:p>
             <a:pPr marL="216000" indent="-216000">
+              <a:lnSpc>
+                <a:spcPct val="100000"/>
+              </a:lnSpc>
               <a:buClr>
                 <a:srgbClr val="000000"/>
               </a:buClr>
@@ -9190,7 +9205,7 @@
       </p:sp>
       <p:pic>
         <p:nvPicPr>
-          <p:cNvPr id="123" name="" descr=""/>
+          <p:cNvPr id="124" name="" descr=""/>
           <p:cNvPicPr/>
           <p:nvPr/>
         </p:nvPicPr>
@@ -9201,7 +9216,7 @@
         <p:spPr>
           <a:xfrm>
             <a:off x="5715000" y="2411280"/>
-            <a:ext cx="6172200" cy="3303720"/>
+            <a:ext cx="6171840" cy="3303360"/>
           </a:xfrm>
           <a:prstGeom prst="rect">
             <a:avLst/>
@@ -9251,7 +9266,7 @@
       </p:grpSpPr>
       <p:sp useBgFill="1">
         <p:nvSpPr>
-          <p:cNvPr id="124" name="Rectangle 11">
+          <p:cNvPr id="125" name="Rectangle 11">
             <a:extLst>
               <a:ext uri="{C183D7F6-B498-43B3-948B-1728B52AA6E4}">
                 <adec:decorative xmlns:adec="http://schemas.microsoft.com/office/drawing/2017/decorative" val="1"/>
@@ -9264,7 +9279,7 @@
         <p:spPr>
           <a:xfrm>
             <a:off x="0" y="4680"/>
-            <a:ext cx="12183480" cy="6852600"/>
+            <a:ext cx="12183120" cy="6852240"/>
           </a:xfrm>
           <a:prstGeom prst="rect">
             <a:avLst/>
@@ -9292,6 +9307,11 @@
             <a:noAutofit/>
           </a:bodyPr>
           <a:p>
+            <a:pPr>
+              <a:lnSpc>
+                <a:spcPct val="100000"/>
+              </a:lnSpc>
+            </a:pPr>
             <a:endParaRPr b="0" lang="en-US" sz="1800" strike="noStrike" u="none">
               <a:solidFill>
                 <a:schemeClr val="lt1"/>
@@ -9305,7 +9325,7 @@
       </p:sp>
       <p:sp>
         <p:nvSpPr>
-          <p:cNvPr id="125" name="PlaceHolder 1"/>
+          <p:cNvPr id="126" name="PlaceHolder 1"/>
           <p:cNvSpPr>
             <a:spLocks noGrp="1"/>
           </p:cNvSpPr>
@@ -9316,7 +9336,7 @@
         <p:spPr>
           <a:xfrm>
             <a:off x="572400" y="457200"/>
-            <a:ext cx="11013120" cy="1143000"/>
+            <a:ext cx="11012760" cy="1142640"/>
           </a:xfrm>
           <a:prstGeom prst="rect">
             <a:avLst/>
@@ -9364,7 +9384,7 @@
       </p:sp>
       <p:sp>
         <p:nvSpPr>
-          <p:cNvPr id="126" name="sketchy line 12">
+          <p:cNvPr id="127" name="sketchy line 12">
             <a:extLst>
               <a:ext uri="{C183D7F6-B498-43B3-948B-1728B52AA6E4}">
                 <adec:decorative xmlns:adec="http://schemas.microsoft.com/office/drawing/2017/decorative" val="1"/>
@@ -9377,15 +9397,15 @@
         <p:spPr>
           <a:xfrm>
             <a:off x="572400" y="1681560"/>
-            <a:ext cx="10967400" cy="12960"/>
+            <a:ext cx="10967040" cy="12600"/>
           </a:xfrm>
           <a:custGeom>
             <a:avLst/>
             <a:gdLst>
-              <a:gd name="textAreaLeft" fmla="*/ 0 w 10967400"/>
-              <a:gd name="textAreaRight" fmla="*/ 10972800 w 10967400"/>
-              <a:gd name="textAreaTop" fmla="*/ 0 h 12960"/>
-              <a:gd name="textAreaBottom" fmla="*/ 18360 h 12960"/>
+              <a:gd name="textAreaLeft" fmla="*/ 0 w 10967040"/>
+              <a:gd name="textAreaRight" fmla="*/ 10972800 w 10967040"/>
+              <a:gd name="textAreaTop" fmla="*/ 0 h 12600"/>
+              <a:gd name="textAreaBottom" fmla="*/ 18360 h 12600"/>
               <a:gd name="GluePoint1X" fmla="*/ 0 w 10972800"/>
               <a:gd name="GluePoint1Y" fmla="*/ 0 h 18288"/>
               <a:gd name="GluePoint2X" fmla="*/ 356616 w 10972800"/>
@@ -9999,6 +10019,11 @@
             <a:noAutofit/>
           </a:bodyPr>
           <a:p>
+            <a:pPr>
+              <a:lnSpc>
+                <a:spcPct val="100000"/>
+              </a:lnSpc>
+            </a:pPr>
             <a:endParaRPr b="0" lang="en-US" sz="1800" strike="noStrike" u="none">
               <a:solidFill>
                 <a:schemeClr val="lt1"/>
@@ -10012,7 +10037,7 @@
       </p:sp>
       <p:pic>
         <p:nvPicPr>
-          <p:cNvPr id="127" name="Picture 15" descr="A blue and white logo&#10;&#10;Description automatically generated"/>
+          <p:cNvPr id="128" name="Picture 15" descr="A blue and white logo&#10;&#10;Description automatically generated"/>
           <p:cNvPicPr/>
           <p:nvPr/>
         </p:nvPicPr>
@@ -10023,7 +10048,7 @@
         <p:spPr>
           <a:xfrm>
             <a:off x="10199520" y="282600"/>
-            <a:ext cx="1794960" cy="594720"/>
+            <a:ext cx="1794600" cy="594360"/>
           </a:xfrm>
           <a:prstGeom prst="rect">
             <a:avLst/>
@@ -10036,14 +10061,14 @@
       </p:pic>
       <p:sp>
         <p:nvSpPr>
-          <p:cNvPr id="128" name=""/>
-          <p:cNvSpPr txBox="1"/>
+          <p:cNvPr id="129" name=""/>
+          <p:cNvSpPr/>
           <p:nvPr/>
         </p:nvSpPr>
         <p:spPr>
           <a:xfrm>
             <a:off x="685800" y="2057400"/>
-            <a:ext cx="10972800" cy="940320"/>
+            <a:ext cx="10972440" cy="939960"/>
           </a:xfrm>
           <a:prstGeom prst="rect">
             <a:avLst/>
@@ -10053,12 +10078,21 @@
             <a:noFill/>
           </a:ln>
         </p:spPr>
+        <p:style>
+          <a:lnRef idx="0"/>
+          <a:fillRef idx="0"/>
+          <a:effectRef idx="0"/>
+          <a:fontRef idx="minor"/>
+        </p:style>
         <p:txBody>
           <a:bodyPr lIns="90000" rIns="90000" tIns="45000" bIns="45000" anchor="t">
             <a:spAutoFit/>
           </a:bodyPr>
           <a:p>
             <a:pPr marL="216000" indent="-216000">
+              <a:lnSpc>
+                <a:spcPct val="100000"/>
+              </a:lnSpc>
               <a:buClr>
                 <a:srgbClr val="000000"/>
               </a:buClr>
@@ -10090,7 +10124,7 @@
       </p:sp>
       <p:pic>
         <p:nvPicPr>
-          <p:cNvPr id="129" name="" descr=""/>
+          <p:cNvPr id="130" name="" descr=""/>
           <p:cNvPicPr/>
           <p:nvPr/>
         </p:nvPicPr>
@@ -10101,7 +10135,7 @@
         <p:spPr>
           <a:xfrm>
             <a:off x="685800" y="2971800"/>
-            <a:ext cx="10354680" cy="3451320"/>
+            <a:ext cx="10354320" cy="3450960"/>
           </a:xfrm>
           <a:prstGeom prst="rect">
             <a:avLst/>
@@ -10151,7 +10185,7 @@
       </p:grpSpPr>
       <p:sp useBgFill="1">
         <p:nvSpPr>
-          <p:cNvPr id="130" name="Rectangle 12">
+          <p:cNvPr id="131" name="Rectangle 12">
             <a:extLst>
               <a:ext uri="{C183D7F6-B498-43B3-948B-1728B52AA6E4}">
                 <adec:decorative xmlns:adec="http://schemas.microsoft.com/office/drawing/2017/decorative" val="1"/>
@@ -10164,7 +10198,7 @@
         <p:spPr>
           <a:xfrm>
             <a:off x="8640" y="5400"/>
-            <a:ext cx="12183480" cy="6852600"/>
+            <a:ext cx="12183120" cy="6852240"/>
           </a:xfrm>
           <a:prstGeom prst="rect">
             <a:avLst/>
@@ -10192,6 +10226,11 @@
             <a:noAutofit/>
           </a:bodyPr>
           <a:p>
+            <a:pPr>
+              <a:lnSpc>
+                <a:spcPct val="100000"/>
+              </a:lnSpc>
+            </a:pPr>
             <a:endParaRPr b="0" lang="en-US" sz="1800" strike="noStrike" u="none">
               <a:solidFill>
                 <a:schemeClr val="lt1"/>
@@ -10205,7 +10244,7 @@
       </p:sp>
       <p:sp>
         <p:nvSpPr>
-          <p:cNvPr id="131" name="PlaceHolder 1"/>
+          <p:cNvPr id="132" name="PlaceHolder 1"/>
           <p:cNvSpPr>
             <a:spLocks noGrp="1"/>
           </p:cNvSpPr>
@@ -10216,7 +10255,7 @@
         <p:spPr>
           <a:xfrm>
             <a:off x="572400" y="457200"/>
-            <a:ext cx="11013120" cy="1143000"/>
+            <a:ext cx="11012760" cy="1142640"/>
           </a:xfrm>
           <a:prstGeom prst="rect">
             <a:avLst/>
@@ -10264,7 +10303,7 @@
       </p:sp>
       <p:sp>
         <p:nvSpPr>
-          <p:cNvPr id="132" name="sketchy line 13">
+          <p:cNvPr id="133" name="sketchy line 13">
             <a:extLst>
               <a:ext uri="{C183D7F6-B498-43B3-948B-1728B52AA6E4}">
                 <adec:decorative xmlns:adec="http://schemas.microsoft.com/office/drawing/2017/decorative" val="1"/>
@@ -10277,15 +10316,15 @@
         <p:spPr>
           <a:xfrm>
             <a:off x="572400" y="1681560"/>
-            <a:ext cx="10967400" cy="12960"/>
+            <a:ext cx="10967040" cy="12600"/>
           </a:xfrm>
           <a:custGeom>
             <a:avLst/>
             <a:gdLst>
-              <a:gd name="textAreaLeft" fmla="*/ 0 w 10967400"/>
-              <a:gd name="textAreaRight" fmla="*/ 10972800 w 10967400"/>
-              <a:gd name="textAreaTop" fmla="*/ 0 h 12960"/>
-              <a:gd name="textAreaBottom" fmla="*/ 18360 h 12960"/>
+              <a:gd name="textAreaLeft" fmla="*/ 0 w 10967040"/>
+              <a:gd name="textAreaRight" fmla="*/ 10972800 w 10967040"/>
+              <a:gd name="textAreaTop" fmla="*/ 0 h 12600"/>
+              <a:gd name="textAreaBottom" fmla="*/ 18360 h 12600"/>
               <a:gd name="GluePoint1X" fmla="*/ 0 w 10972800"/>
               <a:gd name="GluePoint1Y" fmla="*/ 0 h 18288"/>
               <a:gd name="GluePoint2X" fmla="*/ 356616 w 10972800"/>
@@ -10899,6 +10938,11 @@
             <a:noAutofit/>
           </a:bodyPr>
           <a:p>
+            <a:pPr>
+              <a:lnSpc>
+                <a:spcPct val="100000"/>
+              </a:lnSpc>
+            </a:pPr>
             <a:endParaRPr b="0" lang="en-US" sz="1800" strike="noStrike" u="none">
               <a:solidFill>
                 <a:schemeClr val="lt1"/>
@@ -10912,7 +10956,7 @@
       </p:sp>
       <p:pic>
         <p:nvPicPr>
-          <p:cNvPr id="133" name="Picture 16" descr="A blue and white logo&#10;&#10;Description automatically generated"/>
+          <p:cNvPr id="134" name="Picture 16" descr="A blue and white logo&#10;&#10;Description automatically generated"/>
           <p:cNvPicPr/>
           <p:nvPr/>
         </p:nvPicPr>
@@ -10923,7 +10967,7 @@
         <p:spPr>
           <a:xfrm>
             <a:off x="10199520" y="282600"/>
-            <a:ext cx="1794960" cy="594720"/>
+            <a:ext cx="1794600" cy="594360"/>
           </a:xfrm>
           <a:prstGeom prst="rect">
             <a:avLst/>
@@ -10936,14 +10980,14 @@
       </p:pic>
       <p:sp>
         <p:nvSpPr>
-          <p:cNvPr id="134" name=""/>
-          <p:cNvSpPr txBox="1"/>
+          <p:cNvPr id="135" name=""/>
+          <p:cNvSpPr/>
           <p:nvPr/>
         </p:nvSpPr>
         <p:spPr>
           <a:xfrm>
             <a:off x="685800" y="1828800"/>
-            <a:ext cx="10972800" cy="940320"/>
+            <a:ext cx="10972440" cy="939960"/>
           </a:xfrm>
           <a:prstGeom prst="rect">
             <a:avLst/>
@@ -10953,12 +10997,21 @@
             <a:noFill/>
           </a:ln>
         </p:spPr>
+        <p:style>
+          <a:lnRef idx="0"/>
+          <a:fillRef idx="0"/>
+          <a:effectRef idx="0"/>
+          <a:fontRef idx="minor"/>
+        </p:style>
         <p:txBody>
           <a:bodyPr lIns="90000" rIns="90000" tIns="45000" bIns="45000" anchor="t">
             <a:spAutoFit/>
           </a:bodyPr>
           <a:p>
             <a:pPr marL="216000" indent="-216000">
+              <a:lnSpc>
+                <a:spcPct val="100000"/>
+              </a:lnSpc>
               <a:buClr>
                 <a:srgbClr val="000000"/>
               </a:buClr>
@@ -11010,6 +11063,9 @@
           </a:p>
           <a:p>
             <a:pPr marL="216000" indent="-216000">
+              <a:lnSpc>
+                <a:spcPct val="100000"/>
+              </a:lnSpc>
               <a:buClr>
                 <a:srgbClr val="000000"/>
               </a:buClr>
@@ -11041,7 +11097,7 @@
       </p:sp>
       <p:pic>
         <p:nvPicPr>
-          <p:cNvPr id="135" name="" descr=""/>
+          <p:cNvPr id="136" name="" descr=""/>
           <p:cNvPicPr/>
           <p:nvPr/>
         </p:nvPicPr>
@@ -11052,7 +11108,7 @@
         <p:spPr>
           <a:xfrm>
             <a:off x="1371600" y="4401000"/>
-            <a:ext cx="8915400" cy="2228400"/>
+            <a:ext cx="8915040" cy="2228040"/>
           </a:xfrm>
           <a:prstGeom prst="rect">
             <a:avLst/>
@@ -11065,13 +11121,13 @@
       </p:pic>
       <p:graphicFrame>
         <p:nvGraphicFramePr>
-          <p:cNvPr id="136" name=""/>
+          <p:cNvPr id="137" name=""/>
           <p:cNvGraphicFramePr/>
           <p:nvPr/>
         </p:nvGraphicFramePr>
         <p:xfrm>
           <a:off x="4329720" y="2849400"/>
-          <a:ext cx="3992400" cy="2143440"/>
+          <a:ext cx="3130200" cy="1641600"/>
         </p:xfrm>
         <a:graphic>
           <a:graphicData uri="http://schemas.openxmlformats.org/drawingml/2006/table">
@@ -11088,6 +11144,11 @@
                       <a:noAutofit/>
                     </a:bodyPr>
                     <a:p>
+                      <a:pPr>
+                        <a:lnSpc>
+                          <a:spcPct val="100000"/>
+                        </a:lnSpc>
+                      </a:pPr>
                       <a:r>
                         <a:rPr b="1" lang="en-US" sz="1500" strike="noStrike" u="none">
                           <a:solidFill>
@@ -11099,7 +11160,7 @@
                         </a:rPr>
                         <a:t>METRIC</a:t>
                       </a:r>
-                      <a:endParaRPr b="1" lang="en-US" sz="1500" strike="noStrike" u="none">
+                      <a:endParaRPr b="0" lang="en-US" sz="1500" strike="noStrike" u="none">
                         <a:solidFill>
                           <a:srgbClr val="000000"/>
                         </a:solidFill>
@@ -11143,6 +11204,11 @@
                       <a:noAutofit/>
                     </a:bodyPr>
                     <a:p>
+                      <a:pPr>
+                        <a:lnSpc>
+                          <a:spcPct val="100000"/>
+                        </a:lnSpc>
+                      </a:pPr>
                       <a:r>
                         <a:rPr b="1" lang="en-US" sz="1500" strike="noStrike" u="none">
                           <a:solidFill>
@@ -11154,7 +11220,7 @@
                         </a:rPr>
                         <a:t>VALUE</a:t>
                       </a:r>
-                      <a:endParaRPr b="1" lang="en-US" sz="1500" strike="noStrike" u="none">
+                      <a:endParaRPr b="0" lang="en-US" sz="1500" strike="noStrike" u="none">
                         <a:solidFill>
                           <a:srgbClr val="000000"/>
                         </a:solidFill>
@@ -11200,6 +11266,11 @@
                       <a:noAutofit/>
                     </a:bodyPr>
                     <a:p>
+                      <a:pPr>
+                        <a:lnSpc>
+                          <a:spcPct val="100000"/>
+                        </a:lnSpc>
+                      </a:pPr>
                       <a:r>
                         <a:rPr b="0" lang="en-US" sz="1500" strike="noStrike" u="none">
                           <a:solidFill>
@@ -11255,6 +11326,11 @@
                       <a:noAutofit/>
                     </a:bodyPr>
                     <a:p>
+                      <a:pPr>
+                        <a:lnSpc>
+                          <a:spcPct val="100000"/>
+                        </a:lnSpc>
+                      </a:pPr>
                       <a:r>
                         <a:rPr b="0" lang="en-US" sz="1500" strike="noStrike" u="none">
                           <a:solidFill>
@@ -11312,6 +11388,11 @@
                       <a:noAutofit/>
                     </a:bodyPr>
                     <a:p>
+                      <a:pPr>
+                        <a:lnSpc>
+                          <a:spcPct val="100000"/>
+                        </a:lnSpc>
+                      </a:pPr>
                       <a:r>
                         <a:rPr b="0" lang="en-US" sz="1500" strike="noStrike" u="none">
                           <a:solidFill>
@@ -11367,6 +11448,11 @@
                       <a:noAutofit/>
                     </a:bodyPr>
                     <a:p>
+                      <a:pPr>
+                        <a:lnSpc>
+                          <a:spcPct val="100000"/>
+                        </a:lnSpc>
+                      </a:pPr>
                       <a:r>
                         <a:rPr b="0" lang="en-US" sz="1500" strike="noStrike" u="none">
                           <a:solidFill>
@@ -11424,6 +11510,11 @@
                       <a:noAutofit/>
                     </a:bodyPr>
                     <a:p>
+                      <a:pPr>
+                        <a:lnSpc>
+                          <a:spcPct val="100000"/>
+                        </a:lnSpc>
+                      </a:pPr>
                       <a:r>
                         <a:rPr b="0" lang="en-US" sz="1500" strike="noStrike" u="none">
                           <a:solidFill>
@@ -11479,6 +11570,11 @@
                       <a:noAutofit/>
                     </a:bodyPr>
                     <a:p>
+                      <a:pPr>
+                        <a:lnSpc>
+                          <a:spcPct val="100000"/>
+                        </a:lnSpc>
+                      </a:pPr>
                       <a:r>
                         <a:rPr b="0" lang="en-US" sz="1500" strike="noStrike" u="none">
                           <a:solidFill>
@@ -11536,6 +11632,11 @@
                       <a:noAutofit/>
                     </a:bodyPr>
                     <a:p>
+                      <a:pPr>
+                        <a:lnSpc>
+                          <a:spcPct val="100000"/>
+                        </a:lnSpc>
+                      </a:pPr>
                       <a:r>
                         <a:rPr b="0" lang="en-US" sz="1500" strike="noStrike" u="none">
                           <a:solidFill>
@@ -11591,6 +11692,11 @@
                       <a:noAutofit/>
                     </a:bodyPr>
                     <a:p>
+                      <a:pPr>
+                        <a:lnSpc>
+                          <a:spcPct val="100000"/>
+                        </a:lnSpc>
+                      </a:pPr>
                       <a:r>
                         <a:rPr b="0" lang="en-US" sz="1500" strike="noStrike" u="none">
                           <a:solidFill>
@@ -11684,7 +11790,7 @@
       </p:grpSpPr>
       <p:sp useBgFill="1">
         <p:nvSpPr>
-          <p:cNvPr id="137" name="Rectangle 14">
+          <p:cNvPr id="138" name="Rectangle 14">
             <a:extLst>
               <a:ext uri="{C183D7F6-B498-43B3-948B-1728B52AA6E4}">
                 <adec:decorative xmlns:adec="http://schemas.microsoft.com/office/drawing/2017/decorative" val="1"/>
@@ -11697,7 +11803,7 @@
         <p:spPr>
           <a:xfrm>
             <a:off x="8640" y="5400"/>
-            <a:ext cx="12183480" cy="6852600"/>
+            <a:ext cx="12183120" cy="6852240"/>
           </a:xfrm>
           <a:prstGeom prst="rect">
             <a:avLst/>
@@ -11725,6 +11831,11 @@
             <a:noAutofit/>
           </a:bodyPr>
           <a:p>
+            <a:pPr>
+              <a:lnSpc>
+                <a:spcPct val="100000"/>
+              </a:lnSpc>
+            </a:pPr>
             <a:endParaRPr b="0" lang="en-US" sz="1800" strike="noStrike" u="none">
               <a:solidFill>
                 <a:schemeClr val="lt1"/>
@@ -11738,7 +11849,7 @@
       </p:sp>
       <p:sp>
         <p:nvSpPr>
-          <p:cNvPr id="138" name="PlaceHolder 1"/>
+          <p:cNvPr id="139" name="PlaceHolder 1"/>
           <p:cNvSpPr>
             <a:spLocks noGrp="1"/>
           </p:cNvSpPr>
@@ -11749,7 +11860,7 @@
         <p:spPr>
           <a:xfrm>
             <a:off x="572400" y="457200"/>
-            <a:ext cx="11013120" cy="1143000"/>
+            <a:ext cx="11012760" cy="1142640"/>
           </a:xfrm>
           <a:prstGeom prst="rect">
             <a:avLst/>
@@ -11797,7 +11908,7 @@
       </p:sp>
       <p:sp>
         <p:nvSpPr>
-          <p:cNvPr id="139" name="sketchy line 14">
+          <p:cNvPr id="140" name="sketchy line 14">
             <a:extLst>
               <a:ext uri="{C183D7F6-B498-43B3-948B-1728B52AA6E4}">
                 <adec:decorative xmlns:adec="http://schemas.microsoft.com/office/drawing/2017/decorative" val="1"/>
@@ -11810,15 +11921,15 @@
         <p:spPr>
           <a:xfrm>
             <a:off x="572400" y="1681560"/>
-            <a:ext cx="10967400" cy="12960"/>
+            <a:ext cx="10967040" cy="12600"/>
           </a:xfrm>
           <a:custGeom>
             <a:avLst/>
             <a:gdLst>
-              <a:gd name="textAreaLeft" fmla="*/ 0 w 10967400"/>
-              <a:gd name="textAreaRight" fmla="*/ 10972800 w 10967400"/>
-              <a:gd name="textAreaTop" fmla="*/ 0 h 12960"/>
-              <a:gd name="textAreaBottom" fmla="*/ 18360 h 12960"/>
+              <a:gd name="textAreaLeft" fmla="*/ 0 w 10967040"/>
+              <a:gd name="textAreaRight" fmla="*/ 10972800 w 10967040"/>
+              <a:gd name="textAreaTop" fmla="*/ 0 h 12600"/>
+              <a:gd name="textAreaBottom" fmla="*/ 18360 h 12600"/>
               <a:gd name="GluePoint1X" fmla="*/ 0 w 10972800"/>
               <a:gd name="GluePoint1Y" fmla="*/ 0 h 18288"/>
               <a:gd name="GluePoint2X" fmla="*/ 356616 w 10972800"/>
@@ -12432,6 +12543,11 @@
             <a:noAutofit/>
           </a:bodyPr>
           <a:p>
+            <a:pPr>
+              <a:lnSpc>
+                <a:spcPct val="100000"/>
+              </a:lnSpc>
+            </a:pPr>
             <a:endParaRPr b="0" lang="en-US" sz="1800" strike="noStrike" u="none">
               <a:solidFill>
                 <a:schemeClr val="lt1"/>
@@ -12445,7 +12561,7 @@
       </p:sp>
       <p:pic>
         <p:nvPicPr>
-          <p:cNvPr id="140" name="Picture 17" descr="A blue and white logo&#10;&#10;Description automatically generated"/>
+          <p:cNvPr id="141" name="Picture 17" descr="A blue and white logo&#10;&#10;Description automatically generated"/>
           <p:cNvPicPr/>
           <p:nvPr/>
         </p:nvPicPr>
@@ -12456,7 +12572,7 @@
         <p:spPr>
           <a:xfrm>
             <a:off x="10199520" y="282600"/>
-            <a:ext cx="1794960" cy="594720"/>
+            <a:ext cx="1794600" cy="594360"/>
           </a:xfrm>
           <a:prstGeom prst="rect">
             <a:avLst/>
@@ -12469,14 +12585,14 @@
       </p:pic>
       <p:sp>
         <p:nvSpPr>
-          <p:cNvPr id="141" name=""/>
-          <p:cNvSpPr txBox="1"/>
+          <p:cNvPr id="142" name=""/>
+          <p:cNvSpPr/>
           <p:nvPr/>
         </p:nvSpPr>
         <p:spPr>
           <a:xfrm>
             <a:off x="685800" y="2057400"/>
-            <a:ext cx="10744200" cy="4465080"/>
+            <a:ext cx="10743840" cy="4464720"/>
           </a:xfrm>
           <a:prstGeom prst="rect">
             <a:avLst/>
@@ -12486,12 +12602,21 @@
             <a:noFill/>
           </a:ln>
         </p:spPr>
+        <p:style>
+          <a:lnRef idx="0"/>
+          <a:fillRef idx="0"/>
+          <a:effectRef idx="0"/>
+          <a:fontRef idx="minor"/>
+        </p:style>
         <p:txBody>
           <a:bodyPr lIns="90000" rIns="90000" tIns="45000" bIns="45000" anchor="t">
             <a:spAutoFit/>
           </a:bodyPr>
           <a:p>
             <a:pPr marL="216000" indent="-216000">
+              <a:lnSpc>
+                <a:spcPct val="100000"/>
+              </a:lnSpc>
               <a:buClr>
                 <a:srgbClr val="000000"/>
               </a:buClr>
@@ -12521,6 +12646,9 @@
           </a:p>
           <a:p>
             <a:pPr marL="216000" indent="-216000">
+              <a:lnSpc>
+                <a:spcPct val="100000"/>
+              </a:lnSpc>
               <a:buClr>
                 <a:srgbClr val="000000"/>
               </a:buClr>
@@ -12550,6 +12678,9 @@
           </a:p>
           <a:p>
             <a:pPr marL="216000" indent="-216000">
+              <a:lnSpc>
+                <a:spcPct val="100000"/>
+              </a:lnSpc>
               <a:buClr>
                 <a:srgbClr val="000000"/>
               </a:buClr>
@@ -12579,6 +12710,9 @@
           </a:p>
           <a:p>
             <a:pPr marL="216000" indent="-216000">
+              <a:lnSpc>
+                <a:spcPct val="100000"/>
+              </a:lnSpc>
               <a:buClr>
                 <a:srgbClr val="000000"/>
               </a:buClr>
@@ -12608,6 +12742,9 @@
           </a:p>
           <a:p>
             <a:pPr marL="216000" indent="-216000">
+              <a:lnSpc>
+                <a:spcPct val="100000"/>
+              </a:lnSpc>
               <a:buClr>
                 <a:srgbClr val="000000"/>
               </a:buClr>
@@ -12676,7 +12813,7 @@
       </p:grpSpPr>
       <p:sp useBgFill="1">
         <p:nvSpPr>
-          <p:cNvPr id="142" name="Rectangle 10">
+          <p:cNvPr id="143" name="Rectangle 10">
             <a:extLst>
               <a:ext uri="{C183D7F6-B498-43B3-948B-1728B52AA6E4}">
                 <adec:decorative xmlns:adec="http://schemas.microsoft.com/office/drawing/2017/decorative" val="1"/>
@@ -12689,7 +12826,7 @@
         <p:spPr>
           <a:xfrm>
             <a:off x="0" y="4680"/>
-            <a:ext cx="12183480" cy="6852600"/>
+            <a:ext cx="12183120" cy="6852240"/>
           </a:xfrm>
           <a:prstGeom prst="rect">
             <a:avLst/>
@@ -12717,6 +12854,11 @@
             <a:noAutofit/>
           </a:bodyPr>
           <a:p>
+            <a:pPr>
+              <a:lnSpc>
+                <a:spcPct val="100000"/>
+              </a:lnSpc>
+            </a:pPr>
             <a:endParaRPr b="0" lang="en-US" sz="1800" strike="noStrike" u="none">
               <a:solidFill>
                 <a:schemeClr val="lt1"/>
@@ -12730,7 +12872,7 @@
       </p:sp>
       <p:sp>
         <p:nvSpPr>
-          <p:cNvPr id="143" name="PlaceHolder 1"/>
+          <p:cNvPr id="144" name="PlaceHolder 1"/>
           <p:cNvSpPr>
             <a:spLocks noGrp="1"/>
           </p:cNvSpPr>
@@ -12741,7 +12883,7 @@
         <p:spPr>
           <a:xfrm>
             <a:off x="572400" y="238680"/>
-            <a:ext cx="11013120" cy="1127880"/>
+            <a:ext cx="11012760" cy="1127520"/>
           </a:xfrm>
           <a:prstGeom prst="rect">
             <a:avLst/>
@@ -12789,7 +12931,7 @@
       </p:sp>
       <p:sp>
         <p:nvSpPr>
-          <p:cNvPr id="144" name="sketchy line 11">
+          <p:cNvPr id="145" name="sketchy line 11">
             <a:extLst>
               <a:ext uri="{C183D7F6-B498-43B3-948B-1728B52AA6E4}">
                 <adec:decorative xmlns:adec="http://schemas.microsoft.com/office/drawing/2017/decorative" val="1"/>
@@ -12802,15 +12944,15 @@
         <p:spPr>
           <a:xfrm>
             <a:off x="572400" y="1681560"/>
-            <a:ext cx="10967400" cy="12960"/>
+            <a:ext cx="10967040" cy="12600"/>
           </a:xfrm>
           <a:custGeom>
             <a:avLst/>
             <a:gdLst>
-              <a:gd name="textAreaLeft" fmla="*/ 0 w 10967400"/>
-              <a:gd name="textAreaRight" fmla="*/ 10972800 w 10967400"/>
-              <a:gd name="textAreaTop" fmla="*/ 0 h 12960"/>
-              <a:gd name="textAreaBottom" fmla="*/ 18360 h 12960"/>
+              <a:gd name="textAreaLeft" fmla="*/ 0 w 10967040"/>
+              <a:gd name="textAreaRight" fmla="*/ 10972800 w 10967040"/>
+              <a:gd name="textAreaTop" fmla="*/ 0 h 12600"/>
+              <a:gd name="textAreaBottom" fmla="*/ 18360 h 12600"/>
               <a:gd name="GluePoint1X" fmla="*/ 0 w 10972800"/>
               <a:gd name="GluePoint1Y" fmla="*/ 0 h 18288"/>
               <a:gd name="GluePoint2X" fmla="*/ 356616 w 10972800"/>
@@ -13424,6 +13566,11 @@
             <a:noAutofit/>
           </a:bodyPr>
           <a:p>
+            <a:pPr>
+              <a:lnSpc>
+                <a:spcPct val="100000"/>
+              </a:lnSpc>
+            </a:pPr>
             <a:endParaRPr b="0" lang="en-US" sz="1800" strike="noStrike" u="none">
               <a:solidFill>
                 <a:schemeClr val="lt1"/>
@@ -13437,7 +13584,7 @@
       </p:sp>
       <p:pic>
         <p:nvPicPr>
-          <p:cNvPr id="145" name="Picture 14" descr="A blue and white logo&#10;&#10;Description automatically generated"/>
+          <p:cNvPr id="146" name="Picture 14" descr="A blue and white logo&#10;&#10;Description automatically generated"/>
           <p:cNvPicPr/>
           <p:nvPr/>
         </p:nvPicPr>
@@ -13448,7 +13595,7 @@
         <p:spPr>
           <a:xfrm>
             <a:off x="10199520" y="282600"/>
-            <a:ext cx="1794960" cy="594720"/>
+            <a:ext cx="1794600" cy="594360"/>
           </a:xfrm>
           <a:prstGeom prst="rect">
             <a:avLst/>
@@ -13461,7 +13608,7 @@
       </p:pic>
       <p:graphicFrame>
         <p:nvGraphicFramePr>
-          <p:cNvPr id="146" name=""/>
+          <p:cNvPr id="147" name=""/>
           <p:cNvGraphicFramePr/>
           <p:nvPr/>
         </p:nvGraphicFramePr>
@@ -14002,7 +14149,7 @@
       </p:grpSpPr>
       <p:sp useBgFill="1">
         <p:nvSpPr>
-          <p:cNvPr id="147" name="Rectangle 9">
+          <p:cNvPr id="148" name="Rectangle 9">
             <a:extLst>
               <a:ext uri="{C183D7F6-B498-43B3-948B-1728B52AA6E4}">
                 <adec:decorative xmlns:adec="http://schemas.microsoft.com/office/drawing/2017/decorative" val="1"/>
@@ -14015,7 +14162,7 @@
         <p:spPr>
           <a:xfrm>
             <a:off x="0" y="4680"/>
-            <a:ext cx="12183480" cy="6852600"/>
+            <a:ext cx="12183120" cy="6852240"/>
           </a:xfrm>
           <a:prstGeom prst="rect">
             <a:avLst/>
@@ -14061,7 +14208,7 @@
       </p:sp>
       <p:sp>
         <p:nvSpPr>
-          <p:cNvPr id="148" name="PlaceHolder 1"/>
+          <p:cNvPr id="149" name="PlaceHolder 1"/>
           <p:cNvSpPr>
             <a:spLocks noGrp="1"/>
           </p:cNvSpPr>
@@ -14072,7 +14219,7 @@
         <p:spPr>
           <a:xfrm>
             <a:off x="572400" y="238680"/>
-            <a:ext cx="11013120" cy="1127880"/>
+            <a:ext cx="11012760" cy="1127520"/>
           </a:xfrm>
           <a:prstGeom prst="rect">
             <a:avLst/>
@@ -14120,7 +14267,7 @@
       </p:sp>
       <p:sp>
         <p:nvSpPr>
-          <p:cNvPr id="149" name="sketchy line 10">
+          <p:cNvPr id="150" name="sketchy line 10">
             <a:extLst>
               <a:ext uri="{C183D7F6-B498-43B3-948B-1728B52AA6E4}">
                 <adec:decorative xmlns:adec="http://schemas.microsoft.com/office/drawing/2017/decorative" val="1"/>
@@ -14133,15 +14280,15 @@
         <p:spPr>
           <a:xfrm>
             <a:off x="572400" y="1681560"/>
-            <a:ext cx="10967400" cy="12960"/>
+            <a:ext cx="10967040" cy="12600"/>
           </a:xfrm>
           <a:custGeom>
             <a:avLst/>
             <a:gdLst>
-              <a:gd name="textAreaLeft" fmla="*/ 0 w 10967400"/>
-              <a:gd name="textAreaRight" fmla="*/ 10972800 w 10967400"/>
-              <a:gd name="textAreaTop" fmla="*/ 0 h 12960"/>
-              <a:gd name="textAreaBottom" fmla="*/ 18360 h 12960"/>
+              <a:gd name="textAreaLeft" fmla="*/ 0 w 10967040"/>
+              <a:gd name="textAreaRight" fmla="*/ 10972800 w 10967040"/>
+              <a:gd name="textAreaTop" fmla="*/ 0 h 12600"/>
+              <a:gd name="textAreaBottom" fmla="*/ 18360 h 12600"/>
               <a:gd name="GluePoint1X" fmla="*/ 0 w 10972800"/>
               <a:gd name="GluePoint1Y" fmla="*/ 0 h 18288"/>
               <a:gd name="GluePoint2X" fmla="*/ 356616 w 10972800"/>
@@ -14773,7 +14920,7 @@
       </p:sp>
       <p:pic>
         <p:nvPicPr>
-          <p:cNvPr id="150" name="Picture 13" descr="A blue and white logo&#10;&#10;Description automatically generated"/>
+          <p:cNvPr id="151" name="Picture 13" descr="A blue and white logo&#10;&#10;Description automatically generated"/>
           <p:cNvPicPr/>
           <p:nvPr/>
         </p:nvPicPr>
@@ -14784,7 +14931,7 @@
         <p:spPr>
           <a:xfrm>
             <a:off x="10199520" y="282600"/>
-            <a:ext cx="1794960" cy="594720"/>
+            <a:ext cx="1794600" cy="594360"/>
           </a:xfrm>
           <a:prstGeom prst="rect">
             <a:avLst/>
@@ -14797,14 +14944,14 @@
       </p:pic>
       <p:sp>
         <p:nvSpPr>
-          <p:cNvPr id="151" name=""/>
-          <p:cNvSpPr txBox="1"/>
+          <p:cNvPr id="152" name=""/>
+          <p:cNvSpPr/>
           <p:nvPr/>
         </p:nvSpPr>
         <p:spPr>
           <a:xfrm>
             <a:off x="5257800" y="2971800"/>
-            <a:ext cx="1371600" cy="1452960"/>
+            <a:ext cx="1371240" cy="1452600"/>
           </a:xfrm>
           <a:prstGeom prst="rect">
             <a:avLst/>
@@ -14814,12 +14961,22 @@
             <a:noFill/>
           </a:ln>
         </p:spPr>
+        <p:style>
+          <a:lnRef idx="0"/>
+          <a:fillRef idx="0"/>
+          <a:effectRef idx="0"/>
+          <a:fontRef idx="minor"/>
+        </p:style>
         <p:txBody>
           <a:bodyPr lIns="90000" rIns="90000" tIns="45000" bIns="45000" anchor="t" anchorCtr="1">
             <a:spAutoFit/>
           </a:bodyPr>
           <a:p>
-            <a:pPr algn="ctr"/>
+            <a:pPr algn="ctr">
+              <a:lnSpc>
+                <a:spcPct val="100000"/>
+              </a:lnSpc>
+            </a:pPr>
             <a:r>
               <a:rPr b="0" lang="en-US" sz="9600" strike="noStrike" u="none">
                 <a:solidFill>
@@ -14892,7 +15049,7 @@
         <p:spPr>
           <a:xfrm>
             <a:off x="572400" y="238680"/>
-            <a:ext cx="11013120" cy="902880"/>
+            <a:ext cx="11012760" cy="902520"/>
           </a:xfrm>
           <a:prstGeom prst="rect">
             <a:avLst/>
@@ -14954,15 +15111,15 @@
         <p:spPr>
           <a:xfrm>
             <a:off x="572400" y="1681560"/>
-            <a:ext cx="10967400" cy="12960"/>
+            <a:ext cx="10967040" cy="12600"/>
           </a:xfrm>
           <a:custGeom>
             <a:avLst/>
             <a:gdLst>
-              <a:gd name="textAreaLeft" fmla="*/ 0 w 10967400"/>
-              <a:gd name="textAreaRight" fmla="*/ 10972800 w 10967400"/>
-              <a:gd name="textAreaTop" fmla="*/ 0 h 12960"/>
-              <a:gd name="textAreaBottom" fmla="*/ 18360 h 12960"/>
+              <a:gd name="textAreaLeft" fmla="*/ 0 w 10967040"/>
+              <a:gd name="textAreaRight" fmla="*/ 10972800 w 10967040"/>
+              <a:gd name="textAreaTop" fmla="*/ 0 h 12600"/>
+              <a:gd name="textAreaBottom" fmla="*/ 18360 h 12600"/>
               <a:gd name="GluePoint1X" fmla="*/ 0 w 10972800"/>
               <a:gd name="GluePoint1Y" fmla="*/ 0 h 18288"/>
               <a:gd name="GluePoint2X" fmla="*/ 356616 w 10972800"/>
@@ -15601,7 +15758,7 @@
         <p:spPr>
           <a:xfrm>
             <a:off x="914400" y="2057400"/>
-            <a:ext cx="10283760" cy="4113000"/>
+            <a:ext cx="10283400" cy="4113000"/>
           </a:xfrm>
           <a:prstGeom prst="rect">
             <a:avLst/>
@@ -15732,7 +15889,7 @@
         <p:spPr>
           <a:xfrm>
             <a:off x="10199520" y="282600"/>
-            <a:ext cx="1794960" cy="594720"/>
+            <a:ext cx="1794600" cy="594360"/>
           </a:xfrm>
           <a:prstGeom prst="rect">
             <a:avLst/>
@@ -15795,7 +15952,7 @@
         <p:spPr>
           <a:xfrm>
             <a:off x="156960" y="0"/>
-            <a:ext cx="12183480" cy="6852600"/>
+            <a:ext cx="12183120" cy="6852240"/>
           </a:xfrm>
           <a:prstGeom prst="rect">
             <a:avLst/>
@@ -15852,7 +16009,7 @@
         <p:spPr>
           <a:xfrm>
             <a:off x="572400" y="238680"/>
-            <a:ext cx="11013120" cy="1198800"/>
+            <a:ext cx="11012760" cy="1198440"/>
           </a:xfrm>
           <a:prstGeom prst="rect">
             <a:avLst/>
@@ -15914,15 +16071,15 @@
         <p:spPr>
           <a:xfrm>
             <a:off x="572400" y="1681560"/>
-            <a:ext cx="10967400" cy="12960"/>
+            <a:ext cx="10967040" cy="12600"/>
           </a:xfrm>
           <a:custGeom>
             <a:avLst/>
             <a:gdLst>
-              <a:gd name="textAreaLeft" fmla="*/ 0 w 10967400"/>
-              <a:gd name="textAreaRight" fmla="*/ 10972800 w 10967400"/>
-              <a:gd name="textAreaTop" fmla="*/ 0 h 12960"/>
-              <a:gd name="textAreaBottom" fmla="*/ 18360 h 12960"/>
+              <a:gd name="textAreaLeft" fmla="*/ 0 w 10967040"/>
+              <a:gd name="textAreaRight" fmla="*/ 10972800 w 10967040"/>
+              <a:gd name="textAreaTop" fmla="*/ 0 h 12600"/>
+              <a:gd name="textAreaBottom" fmla="*/ 18360 h 12600"/>
               <a:gd name="GluePoint1X" fmla="*/ 0 w 10972800"/>
               <a:gd name="GluePoint1Y" fmla="*/ 0 h 18288"/>
               <a:gd name="GluePoint2X" fmla="*/ 356616 w 10972800"/>
@@ -16565,7 +16722,7 @@
         <p:spPr>
           <a:xfrm>
             <a:off x="685800" y="1829520"/>
-            <a:ext cx="10854360" cy="2970000"/>
+            <a:ext cx="10854000" cy="2969640"/>
           </a:xfrm>
           <a:prstGeom prst="rect">
             <a:avLst/>
@@ -16780,7 +16937,7 @@
         <p:spPr>
           <a:xfrm>
             <a:off x="10199520" y="282600"/>
-            <a:ext cx="1794960" cy="594720"/>
+            <a:ext cx="1794600" cy="594360"/>
           </a:xfrm>
           <a:prstGeom prst="rect">
             <a:avLst/>
@@ -16843,7 +17000,7 @@
         <p:spPr>
           <a:xfrm>
             <a:off x="156960" y="0"/>
-            <a:ext cx="12183480" cy="6852600"/>
+            <a:ext cx="12183120" cy="6852240"/>
           </a:xfrm>
           <a:prstGeom prst="rect">
             <a:avLst/>
@@ -16900,7 +17057,7 @@
         <p:spPr>
           <a:xfrm>
             <a:off x="572400" y="238680"/>
-            <a:ext cx="11013120" cy="1198800"/>
+            <a:ext cx="11012760" cy="1198440"/>
           </a:xfrm>
           <a:prstGeom prst="rect">
             <a:avLst/>
@@ -16962,15 +17119,15 @@
         <p:spPr>
           <a:xfrm>
             <a:off x="572400" y="1681560"/>
-            <a:ext cx="10967400" cy="12960"/>
+            <a:ext cx="10967040" cy="12600"/>
           </a:xfrm>
           <a:custGeom>
             <a:avLst/>
             <a:gdLst>
-              <a:gd name="textAreaLeft" fmla="*/ 0 w 10967400"/>
-              <a:gd name="textAreaRight" fmla="*/ 10972800 w 10967400"/>
-              <a:gd name="textAreaTop" fmla="*/ 0 h 12960"/>
-              <a:gd name="textAreaBottom" fmla="*/ 18360 h 12960"/>
+              <a:gd name="textAreaLeft" fmla="*/ 0 w 10967040"/>
+              <a:gd name="textAreaRight" fmla="*/ 10972800 w 10967040"/>
+              <a:gd name="textAreaTop" fmla="*/ 0 h 12600"/>
+              <a:gd name="textAreaBottom" fmla="*/ 18360 h 12600"/>
               <a:gd name="GluePoint1X" fmla="*/ 0 w 10972800"/>
               <a:gd name="GluePoint1Y" fmla="*/ 0 h 18288"/>
               <a:gd name="GluePoint2X" fmla="*/ 356616 w 10972800"/>
@@ -17613,7 +17770,7 @@
         <p:spPr>
           <a:xfrm>
             <a:off x="685800" y="1829520"/>
-            <a:ext cx="10854360" cy="4112640"/>
+            <a:ext cx="10854000" cy="4112280"/>
           </a:xfrm>
           <a:prstGeom prst="rect">
             <a:avLst/>
@@ -17758,7 +17915,7 @@
                 <a:latin typeface="Arial"/>
                 <a:ea typeface="Calibri"/>
               </a:rPr>
-              <a:t>Label 1 – necrotic/non-enhancing tumor core</a:t>
+              <a:t>Label 1 – necrotic/non-enhancing tumor core (NCR/NET)</a:t>
             </a:r>
             <a:endParaRPr b="0" lang="en-US" sz="2400" strike="noStrike" u="none">
               <a:solidFill>
@@ -17892,7 +18049,7 @@
         <p:spPr>
           <a:xfrm>
             <a:off x="10199520" y="282600"/>
-            <a:ext cx="1794960" cy="594720"/>
+            <a:ext cx="1794600" cy="594360"/>
           </a:xfrm>
           <a:prstGeom prst="rect">
             <a:avLst/>
@@ -17955,7 +18112,7 @@
         <p:spPr>
           <a:xfrm>
             <a:off x="156960" y="0"/>
-            <a:ext cx="12183480" cy="6852600"/>
+            <a:ext cx="12183120" cy="6852240"/>
           </a:xfrm>
           <a:prstGeom prst="rect">
             <a:avLst/>
@@ -18012,7 +18169,7 @@
         <p:spPr>
           <a:xfrm>
             <a:off x="572400" y="238680"/>
-            <a:ext cx="11013120" cy="1198800"/>
+            <a:ext cx="11012760" cy="1198440"/>
           </a:xfrm>
           <a:prstGeom prst="rect">
             <a:avLst/>
@@ -18074,15 +18231,15 @@
         <p:spPr>
           <a:xfrm>
             <a:off x="572400" y="1681560"/>
-            <a:ext cx="10967400" cy="12960"/>
+            <a:ext cx="10967040" cy="12600"/>
           </a:xfrm>
           <a:custGeom>
             <a:avLst/>
             <a:gdLst>
-              <a:gd name="textAreaLeft" fmla="*/ 0 w 10967400"/>
-              <a:gd name="textAreaRight" fmla="*/ 10972800 w 10967400"/>
-              <a:gd name="textAreaTop" fmla="*/ 0 h 12960"/>
-              <a:gd name="textAreaBottom" fmla="*/ 18360 h 12960"/>
+              <a:gd name="textAreaLeft" fmla="*/ 0 w 10967040"/>
+              <a:gd name="textAreaRight" fmla="*/ 10972800 w 10967040"/>
+              <a:gd name="textAreaTop" fmla="*/ 0 h 12600"/>
+              <a:gd name="textAreaBottom" fmla="*/ 18360 h 12600"/>
               <a:gd name="GluePoint1X" fmla="*/ 0 w 10972800"/>
               <a:gd name="GluePoint1Y" fmla="*/ 0 h 18288"/>
               <a:gd name="GluePoint2X" fmla="*/ 356616 w 10972800"/>
@@ -18725,7 +18882,7 @@
         <p:spPr>
           <a:xfrm>
             <a:off x="685800" y="1829520"/>
-            <a:ext cx="10854360" cy="4112640"/>
+            <a:ext cx="10854000" cy="4112280"/>
           </a:xfrm>
           <a:prstGeom prst="rect">
             <a:avLst/>
@@ -19038,7 +19195,7 @@
         <p:spPr>
           <a:xfrm>
             <a:off x="10199520" y="282600"/>
-            <a:ext cx="1794960" cy="594720"/>
+            <a:ext cx="1794600" cy="594360"/>
           </a:xfrm>
           <a:prstGeom prst="rect">
             <a:avLst/>
@@ -19101,7 +19258,7 @@
         <p:spPr>
           <a:xfrm>
             <a:off x="3600" y="0"/>
-            <a:ext cx="12183480" cy="6852600"/>
+            <a:ext cx="12183120" cy="6852240"/>
           </a:xfrm>
           <a:prstGeom prst="rect">
             <a:avLst/>
@@ -19158,7 +19315,7 @@
         <p:spPr>
           <a:xfrm>
             <a:off x="572400" y="238680"/>
-            <a:ext cx="11013120" cy="1360440"/>
+            <a:ext cx="11012760" cy="1360080"/>
           </a:xfrm>
           <a:prstGeom prst="rect">
             <a:avLst/>
@@ -19219,15 +19376,15 @@
         <p:spPr>
           <a:xfrm>
             <a:off x="572400" y="1681560"/>
-            <a:ext cx="10967400" cy="12960"/>
+            <a:ext cx="10967040" cy="12600"/>
           </a:xfrm>
           <a:custGeom>
             <a:avLst/>
             <a:gdLst>
-              <a:gd name="textAreaLeft" fmla="*/ 0 w 10967400"/>
-              <a:gd name="textAreaRight" fmla="*/ 10972800 w 10967400"/>
-              <a:gd name="textAreaTop" fmla="*/ 0 h 12960"/>
-              <a:gd name="textAreaBottom" fmla="*/ 18360 h 12960"/>
+              <a:gd name="textAreaLeft" fmla="*/ 0 w 10967040"/>
+              <a:gd name="textAreaRight" fmla="*/ 10972800 w 10967040"/>
+              <a:gd name="textAreaTop" fmla="*/ 0 h 12600"/>
+              <a:gd name="textAreaBottom" fmla="*/ 18360 h 12600"/>
               <a:gd name="GluePoint1X" fmla="*/ 0 w 10972800"/>
               <a:gd name="GluePoint1Y" fmla="*/ 0 h 18288"/>
               <a:gd name="GluePoint2X" fmla="*/ 356616 w 10972800"/>
@@ -19869,8 +20026,8 @@
         </p:nvSpPr>
         <p:spPr>
           <a:xfrm>
-            <a:off x="685800" y="2057400"/>
-            <a:ext cx="5256360" cy="3883680"/>
+            <a:off x="228600" y="2057400"/>
+            <a:ext cx="5486400" cy="4343400"/>
           </a:xfrm>
           <a:prstGeom prst="rect">
             <a:avLst/>
@@ -19882,7 +20039,7 @@
         </p:spPr>
         <p:txBody>
           <a:bodyPr lIns="91440" rIns="91440" tIns="45720" bIns="45720" anchor="t">
-            <a:normAutofit/>
+            <a:normAutofit fontScale="92500" lnSpcReduction="9999"/>
           </a:bodyPr>
           <a:p>
             <a:pPr marL="432000" indent="-324000">
@@ -19908,7 +20065,7 @@
                 <a:uFillTx/>
                 <a:latin typeface="Arial"/>
               </a:rPr>
-              <a:t>Raw visualization segmentation</a:t>
+              <a:t>Left image is an MRI slice with contrast agent (T1ce)</a:t>
             </a:r>
             <a:endParaRPr b="0" lang="en-US" sz="2400" strike="noStrike" u="none">
               <a:solidFill>
@@ -19943,7 +20100,7 @@
                 <a:uFillTx/>
                 <a:latin typeface="Arial"/>
               </a:rPr>
-              <a:t>The regions are color coded for easy of interpretation</a:t>
+              <a:t>Right image is the same slice with segmentation applied.</a:t>
             </a:r>
             <a:endParaRPr b="0" lang="en-US" sz="2400" strike="noStrike" u="none">
               <a:solidFill>
@@ -19978,7 +20135,7 @@
                 <a:uFillTx/>
                 <a:latin typeface="Arial"/>
               </a:rPr>
-              <a:t>Label 0 (normal) is the largest region</a:t>
+              <a:t>The large purple area is normal brain tissue</a:t>
             </a:r>
             <a:endParaRPr b="0" lang="en-US" sz="2400" strike="noStrike" u="none">
               <a:solidFill>
@@ -20013,7 +20170,42 @@
                 <a:uFillTx/>
                 <a:latin typeface="Arial"/>
               </a:rPr>
-              <a:t>Tumor is identified in blue and yellow</a:t>
+              <a:t>Non-enhanced tumor core (NET) is in blue</a:t>
+            </a:r>
+            <a:endParaRPr b="0" lang="en-US" sz="2400" strike="noStrike" u="none">
+              <a:solidFill>
+                <a:srgbClr val="000000"/>
+              </a:solidFill>
+              <a:effectLst/>
+              <a:uFillTx/>
+              <a:latin typeface="Arial"/>
+            </a:endParaRPr>
+          </a:p>
+          <a:p>
+            <a:pPr marL="432000" indent="-324000">
+              <a:lnSpc>
+                <a:spcPct val="100000"/>
+              </a:lnSpc>
+              <a:spcBef>
+                <a:spcPts val="1417"/>
+              </a:spcBef>
+              <a:buClr>
+                <a:srgbClr val="000000"/>
+              </a:buClr>
+              <a:buSzPct val="45000"/>
+              <a:buFont typeface="Wingdings" charset="2"/>
+              <a:buChar char=""/>
+            </a:pPr>
+            <a:r>
+              <a:rPr b="0" lang="en-US" sz="2400" strike="noStrike" u="none">
+                <a:solidFill>
+                  <a:srgbClr val="000000"/>
+                </a:solidFill>
+                <a:effectLst/>
+                <a:uFillTx/>
+                <a:latin typeface="Arial"/>
+              </a:rPr>
+              <a:t>Yellow is necrotic tissue and interruptions to the brain-blood barrier</a:t>
             </a:r>
             <a:endParaRPr b="0" lang="en-US" sz="2400" strike="noStrike" u="none">
               <a:solidFill>
@@ -20063,7 +20255,7 @@
       </p:sp>
       <p:pic>
         <p:nvPicPr>
-          <p:cNvPr id="86" name="" descr=""/>
+          <p:cNvPr id="86" name="Picture 6" descr="A blue and white logo&#10;&#10;Description automatically generated"/>
           <p:cNvPicPr/>
           <p:nvPr/>
         </p:nvPicPr>
@@ -20073,8 +20265,8 @@
         </p:blipFill>
         <p:spPr>
           <a:xfrm>
-            <a:off x="6172200" y="2039400"/>
-            <a:ext cx="4836240" cy="3902760"/>
+            <a:off x="10199520" y="282600"/>
+            <a:ext cx="1794600" cy="594360"/>
           </a:xfrm>
           <a:prstGeom prst="rect">
             <a:avLst/>
@@ -20087,7 +20279,7 @@
       </p:pic>
       <p:pic>
         <p:nvPicPr>
-          <p:cNvPr id="87" name="Picture 6" descr="A blue and white logo&#10;&#10;Description automatically generated"/>
+          <p:cNvPr id="87" name="" descr=""/>
           <p:cNvPicPr/>
           <p:nvPr/>
         </p:nvPicPr>
@@ -20097,8 +20289,8 @@
         </p:blipFill>
         <p:spPr>
           <a:xfrm>
-            <a:off x="10199520" y="282600"/>
-            <a:ext cx="1794960" cy="594720"/>
+            <a:off x="5715000" y="2514600"/>
+            <a:ext cx="6172200" cy="3150000"/>
           </a:xfrm>
           <a:prstGeom prst="rect">
             <a:avLst/>
@@ -20109,6 +20301,52 @@
           </a:ln>
         </p:spPr>
       </p:pic>
+      <p:sp>
+        <p:nvSpPr>
+          <p:cNvPr id="88" name=""/>
+          <p:cNvSpPr txBox="1"/>
+          <p:nvPr/>
+        </p:nvSpPr>
+        <p:spPr>
+          <a:xfrm>
+            <a:off x="6629400" y="5943600"/>
+            <a:ext cx="4114800" cy="457200"/>
+          </a:xfrm>
+          <a:prstGeom prst="rect">
+            <a:avLst/>
+          </a:prstGeom>
+          <a:noFill/>
+          <a:ln w="0">
+            <a:noFill/>
+          </a:ln>
+        </p:spPr>
+        <p:txBody>
+          <a:bodyPr lIns="90000" rIns="90000" tIns="45000" bIns="45000" anchor="t">
+            <a:spAutoFit/>
+          </a:bodyPr>
+          <a:p>
+            <a:r>
+              <a:rPr b="0" i="1" lang="en-US" sz="1800" strike="noStrike" u="none">
+                <a:solidFill>
+                  <a:srgbClr val="000000"/>
+                </a:solidFill>
+                <a:effectLst/>
+                <a:uFillTx/>
+                <a:latin typeface="Arial"/>
+              </a:rPr>
+              <a:t>Image is from post-treatment dataset</a:t>
+            </a:r>
+            <a:endParaRPr b="0" i="1" lang="en-US" sz="1800" strike="noStrike" u="none">
+              <a:solidFill>
+                <a:srgbClr val="000000"/>
+              </a:solidFill>
+              <a:effectLst/>
+              <a:uFillTx/>
+              <a:latin typeface="Arial"/>
+            </a:endParaRPr>
+          </a:p>
+        </p:txBody>
+      </p:sp>
     </p:spTree>
   </p:cSld>
   <mc:AlternateContent>
@@ -20148,7 +20386,7 @@
       </p:grpSpPr>
       <p:sp useBgFill="1">
         <p:nvSpPr>
-          <p:cNvPr id="88" name="Rectangle 1">
+          <p:cNvPr id="89" name="Rectangle 1">
             <a:extLst>
               <a:ext uri="{C183D7F6-B498-43B3-948B-1728B52AA6E4}">
                 <adec:decorative xmlns:adec="http://schemas.microsoft.com/office/drawing/2017/decorative" val="1"/>
@@ -20161,7 +20399,7 @@
         <p:spPr>
           <a:xfrm>
             <a:off x="3600" y="0"/>
-            <a:ext cx="12183480" cy="6852600"/>
+            <a:ext cx="12183120" cy="6852240"/>
           </a:xfrm>
           <a:prstGeom prst="rect">
             <a:avLst/>
@@ -20207,7 +20445,7 @@
       </p:sp>
       <p:sp>
         <p:nvSpPr>
-          <p:cNvPr id="89" name="PlaceHolder 1"/>
+          <p:cNvPr id="90" name="PlaceHolder 1"/>
           <p:cNvSpPr>
             <a:spLocks noGrp="1"/>
           </p:cNvSpPr>
@@ -20218,7 +20456,7 @@
         <p:spPr>
           <a:xfrm>
             <a:off x="572400" y="238680"/>
-            <a:ext cx="11013120" cy="1360440"/>
+            <a:ext cx="11012760" cy="1360080"/>
           </a:xfrm>
           <a:prstGeom prst="rect">
             <a:avLst/>
@@ -20266,7 +20504,7 @@
       </p:sp>
       <p:sp>
         <p:nvSpPr>
-          <p:cNvPr id="90" name="sketchy line 1">
+          <p:cNvPr id="91" name="sketchy line 1">
             <a:extLst>
               <a:ext uri="{C183D7F6-B498-43B3-948B-1728B52AA6E4}">
                 <adec:decorative xmlns:adec="http://schemas.microsoft.com/office/drawing/2017/decorative" val="1"/>
@@ -20279,15 +20517,15 @@
         <p:spPr>
           <a:xfrm>
             <a:off x="572400" y="1681560"/>
-            <a:ext cx="10967400" cy="12960"/>
+            <a:ext cx="10967040" cy="12600"/>
           </a:xfrm>
           <a:custGeom>
             <a:avLst/>
             <a:gdLst>
-              <a:gd name="textAreaLeft" fmla="*/ 0 w 10967400"/>
-              <a:gd name="textAreaRight" fmla="*/ 10972800 w 10967400"/>
-              <a:gd name="textAreaTop" fmla="*/ 0 h 12960"/>
-              <a:gd name="textAreaBottom" fmla="*/ 18360 h 12960"/>
+              <a:gd name="textAreaLeft" fmla="*/ 0 w 10967040"/>
+              <a:gd name="textAreaRight" fmla="*/ 10972800 w 10967040"/>
+              <a:gd name="textAreaTop" fmla="*/ 0 h 12600"/>
+              <a:gd name="textAreaBottom" fmla="*/ 18360 h 12600"/>
               <a:gd name="GluePoint1X" fmla="*/ 0 w 10972800"/>
               <a:gd name="GluePoint1Y" fmla="*/ 0 h 18288"/>
               <a:gd name="GluePoint2X" fmla="*/ 356616 w 10972800"/>
@@ -20919,14 +21157,14 @@
       </p:sp>
       <p:sp>
         <p:nvSpPr>
-          <p:cNvPr id="91" name=""/>
+          <p:cNvPr id="92" name=""/>
           <p:cNvSpPr/>
           <p:nvPr/>
         </p:nvSpPr>
         <p:spPr>
           <a:xfrm>
             <a:off x="685800" y="2057400"/>
-            <a:ext cx="10970280" cy="1918440"/>
+            <a:ext cx="10969920" cy="1918440"/>
           </a:xfrm>
           <a:prstGeom prst="rect">
             <a:avLst/>
@@ -21046,7 +21284,7 @@
       </p:sp>
       <p:pic>
         <p:nvPicPr>
-          <p:cNvPr id="92" name="" descr=""/>
+          <p:cNvPr id="93" name="" descr=""/>
           <p:cNvPicPr/>
           <p:nvPr/>
         </p:nvPicPr>
@@ -21057,7 +21295,7 @@
         <p:spPr>
           <a:xfrm>
             <a:off x="1418760" y="4343400"/>
-            <a:ext cx="8836200" cy="1807560"/>
+            <a:ext cx="8835840" cy="1807200"/>
           </a:xfrm>
           <a:prstGeom prst="rect">
             <a:avLst/>
@@ -21070,7 +21308,7 @@
       </p:pic>
       <p:pic>
         <p:nvPicPr>
-          <p:cNvPr id="93" name="Picture 7" descr="A blue and white logo&#10;&#10;Description automatically generated"/>
+          <p:cNvPr id="94" name="Picture 7" descr="A blue and white logo&#10;&#10;Description automatically generated"/>
           <p:cNvPicPr/>
           <p:nvPr/>
         </p:nvPicPr>
@@ -21081,7 +21319,7 @@
         <p:spPr>
           <a:xfrm>
             <a:off x="10199520" y="282600"/>
-            <a:ext cx="1794960" cy="594720"/>
+            <a:ext cx="1794600" cy="594360"/>
           </a:xfrm>
           <a:prstGeom prst="rect">
             <a:avLst/>
@@ -21131,7 +21369,7 @@
       </p:grpSpPr>
       <p:sp useBgFill="1">
         <p:nvSpPr>
-          <p:cNvPr id="94" name="Rectangle 4">
+          <p:cNvPr id="95" name="Rectangle 4">
             <a:extLst>
               <a:ext uri="{C183D7F6-B498-43B3-948B-1728B52AA6E4}">
                 <adec:decorative xmlns:adec="http://schemas.microsoft.com/office/drawing/2017/decorative" val="1"/>
@@ -21144,7 +21382,7 @@
         <p:spPr>
           <a:xfrm>
             <a:off x="0" y="0"/>
-            <a:ext cx="12183480" cy="6852600"/>
+            <a:ext cx="12183120" cy="6852240"/>
           </a:xfrm>
           <a:prstGeom prst="rect">
             <a:avLst/>
@@ -21190,7 +21428,7 @@
       </p:sp>
       <p:sp>
         <p:nvSpPr>
-          <p:cNvPr id="95" name="PlaceHolder 1"/>
+          <p:cNvPr id="96" name="PlaceHolder 1"/>
           <p:cNvSpPr>
             <a:spLocks noGrp="1"/>
           </p:cNvSpPr>
@@ -21201,7 +21439,7 @@
         <p:spPr>
           <a:xfrm>
             <a:off x="572400" y="238680"/>
-            <a:ext cx="11013120" cy="1127880"/>
+            <a:ext cx="11012760" cy="1127520"/>
           </a:xfrm>
           <a:prstGeom prst="rect">
             <a:avLst/>
@@ -21249,7 +21487,7 @@
       </p:sp>
       <p:sp>
         <p:nvSpPr>
-          <p:cNvPr id="96" name="sketchy line 5">
+          <p:cNvPr id="97" name="sketchy line 5">
             <a:extLst>
               <a:ext uri="{C183D7F6-B498-43B3-948B-1728B52AA6E4}">
                 <adec:decorative xmlns:adec="http://schemas.microsoft.com/office/drawing/2017/decorative" val="1"/>
@@ -21262,15 +21500,15 @@
         <p:spPr>
           <a:xfrm>
             <a:off x="572400" y="1681560"/>
-            <a:ext cx="10967400" cy="12960"/>
+            <a:ext cx="10967040" cy="12600"/>
           </a:xfrm>
           <a:custGeom>
             <a:avLst/>
             <a:gdLst>
-              <a:gd name="textAreaLeft" fmla="*/ 0 w 10967400"/>
-              <a:gd name="textAreaRight" fmla="*/ 10972800 w 10967400"/>
-              <a:gd name="textAreaTop" fmla="*/ 0 h 12960"/>
-              <a:gd name="textAreaBottom" fmla="*/ 18360 h 12960"/>
+              <a:gd name="textAreaLeft" fmla="*/ 0 w 10967040"/>
+              <a:gd name="textAreaRight" fmla="*/ 10972800 w 10967040"/>
+              <a:gd name="textAreaTop" fmla="*/ 0 h 12600"/>
+              <a:gd name="textAreaBottom" fmla="*/ 18360 h 12600"/>
               <a:gd name="GluePoint1X" fmla="*/ 0 w 10972800"/>
               <a:gd name="GluePoint1Y" fmla="*/ 0 h 18288"/>
               <a:gd name="GluePoint2X" fmla="*/ 356616 w 10972800"/>
@@ -21902,14 +22140,14 @@
       </p:sp>
       <p:sp>
         <p:nvSpPr>
-          <p:cNvPr id="97" name=""/>
+          <p:cNvPr id="98" name=""/>
           <p:cNvSpPr/>
           <p:nvPr/>
         </p:nvSpPr>
         <p:spPr>
           <a:xfrm>
             <a:off x="685800" y="2057400"/>
-            <a:ext cx="10970280" cy="821160"/>
+            <a:ext cx="10969920" cy="821160"/>
           </a:xfrm>
           <a:prstGeom prst="rect">
             <a:avLst/>
@@ -21959,7 +22197,7 @@
       </p:sp>
       <p:graphicFrame>
         <p:nvGraphicFramePr>
-          <p:cNvPr id="98" name=""/>
+          <p:cNvPr id="99" name=""/>
           <p:cNvGraphicFramePr/>
           <p:nvPr/>
         </p:nvGraphicFramePr>
@@ -22591,7 +22829,7 @@
       </p:graphicFrame>
       <p:pic>
         <p:nvPicPr>
-          <p:cNvPr id="99" name="Picture 8" descr="A blue and white logo&#10;&#10;Description automatically generated"/>
+          <p:cNvPr id="100" name="Picture 8" descr="A blue and white logo&#10;&#10;Description automatically generated"/>
           <p:cNvPicPr/>
           <p:nvPr/>
         </p:nvPicPr>
@@ -22602,7 +22840,7 @@
         <p:spPr>
           <a:xfrm>
             <a:off x="10199520" y="282600"/>
-            <a:ext cx="1794960" cy="594720"/>
+            <a:ext cx="1794600" cy="594360"/>
           </a:xfrm>
           <a:prstGeom prst="rect">
             <a:avLst/>
@@ -22652,7 +22890,7 @@
       </p:grpSpPr>
       <p:sp useBgFill="1">
         <p:nvSpPr>
-          <p:cNvPr id="100" name="Rectangle 5">
+          <p:cNvPr id="101" name="Rectangle 5">
             <a:extLst>
               <a:ext uri="{C183D7F6-B498-43B3-948B-1728B52AA6E4}">
                 <adec:decorative xmlns:adec="http://schemas.microsoft.com/office/drawing/2017/decorative" val="1"/>
@@ -22665,7 +22903,7 @@
         <p:spPr>
           <a:xfrm>
             <a:off x="0" y="4320"/>
-            <a:ext cx="12183480" cy="6852600"/>
+            <a:ext cx="12183120" cy="6852240"/>
           </a:xfrm>
           <a:prstGeom prst="rect">
             <a:avLst/>
@@ -22711,7 +22949,7 @@
       </p:sp>
       <p:sp>
         <p:nvSpPr>
-          <p:cNvPr id="101" name="PlaceHolder 1"/>
+          <p:cNvPr id="102" name="PlaceHolder 1"/>
           <p:cNvSpPr>
             <a:spLocks noGrp="1"/>
           </p:cNvSpPr>
@@ -22722,7 +22960,7 @@
         <p:spPr>
           <a:xfrm>
             <a:off x="572400" y="238680"/>
-            <a:ext cx="11013120" cy="1360440"/>
+            <a:ext cx="11012760" cy="1360080"/>
           </a:xfrm>
           <a:prstGeom prst="rect">
             <a:avLst/>
@@ -22770,7 +23008,7 @@
       </p:sp>
       <p:sp>
         <p:nvSpPr>
-          <p:cNvPr id="102" name="sketchy line 6">
+          <p:cNvPr id="103" name="sketchy line 6">
             <a:extLst>
               <a:ext uri="{C183D7F6-B498-43B3-948B-1728B52AA6E4}">
                 <adec:decorative xmlns:adec="http://schemas.microsoft.com/office/drawing/2017/decorative" val="1"/>
@@ -22783,15 +23021,15 @@
         <p:spPr>
           <a:xfrm>
             <a:off x="572400" y="1681560"/>
-            <a:ext cx="10967400" cy="12960"/>
+            <a:ext cx="10967040" cy="12600"/>
           </a:xfrm>
           <a:custGeom>
             <a:avLst/>
             <a:gdLst>
-              <a:gd name="textAreaLeft" fmla="*/ 0 w 10967400"/>
-              <a:gd name="textAreaRight" fmla="*/ 10972800 w 10967400"/>
-              <a:gd name="textAreaTop" fmla="*/ 0 h 12960"/>
-              <a:gd name="textAreaBottom" fmla="*/ 18360 h 12960"/>
+              <a:gd name="textAreaLeft" fmla="*/ 0 w 10967040"/>
+              <a:gd name="textAreaRight" fmla="*/ 10972800 w 10967040"/>
+              <a:gd name="textAreaTop" fmla="*/ 0 h 12600"/>
+              <a:gd name="textAreaBottom" fmla="*/ 18360 h 12600"/>
               <a:gd name="GluePoint1X" fmla="*/ 0 w 10972800"/>
               <a:gd name="GluePoint1Y" fmla="*/ 0 h 18288"/>
               <a:gd name="GluePoint2X" fmla="*/ 356616 w 10972800"/>
@@ -23423,14 +23661,14 @@
       </p:sp>
       <p:sp>
         <p:nvSpPr>
-          <p:cNvPr id="103" name=""/>
+          <p:cNvPr id="104" name=""/>
           <p:cNvSpPr/>
           <p:nvPr/>
         </p:nvSpPr>
         <p:spPr>
           <a:xfrm>
             <a:off x="685800" y="2057400"/>
-            <a:ext cx="10970280" cy="821160"/>
+            <a:ext cx="10969920" cy="821160"/>
           </a:xfrm>
           <a:prstGeom prst="rect">
             <a:avLst/>
@@ -23502,7 +23740,7 @@
       </p:sp>
       <p:pic>
         <p:nvPicPr>
-          <p:cNvPr id="104" name="" descr=""/>
+          <p:cNvPr id="105" name="" descr=""/>
           <p:cNvPicPr/>
           <p:nvPr/>
         </p:nvPicPr>
@@ -23513,7 +23751,7 @@
         <p:spPr>
           <a:xfrm>
             <a:off x="371520" y="3200400"/>
-            <a:ext cx="11286000" cy="2284920"/>
+            <a:ext cx="11285640" cy="2284560"/>
           </a:xfrm>
           <a:prstGeom prst="rect">
             <a:avLst/>
@@ -23526,7 +23764,7 @@
       </p:pic>
       <p:pic>
         <p:nvPicPr>
-          <p:cNvPr id="105" name="Picture 9" descr="A blue and white logo&#10;&#10;Description automatically generated"/>
+          <p:cNvPr id="106" name="Picture 9" descr="A blue and white logo&#10;&#10;Description automatically generated"/>
           <p:cNvPicPr/>
           <p:nvPr/>
         </p:nvPicPr>
@@ -23537,7 +23775,7 @@
         <p:spPr>
           <a:xfrm>
             <a:off x="10199520" y="282600"/>
-            <a:ext cx="1794960" cy="594720"/>
+            <a:ext cx="1794600" cy="594360"/>
           </a:xfrm>
           <a:prstGeom prst="rect">
             <a:avLst/>
